--- a/PrimeNet_CEO_Briefing.pptx
+++ b/PrimeNet_CEO_Briefing.pptx
@@ -508,7 +508,7 @@
           <a:p>
             <a:r>
               <a:rPr lang="en-US" dirty="0"/>
-              <a:t>Elevator pitch: PrimeNet is Zain's own network-intelligence platform. It replaced scattered vendor tools and manual spreadsheets with one live web platform covering both vendors and every radio generation. Built entirely in-house — no external license.</a:t>
+              <a:t>Elevator pitch: PrimeNet is Zain's own network-intelligence platform — one login for both vendors and every radio generation, built entirely in-house.</a:t>
             </a:r>
             <a:endParaRPr lang="en-US" dirty="0"/>
           </a:p>
@@ -596,7 +596,7 @@
           <a:p>
             <a:r>
               <a:rPr lang="en-US" dirty="0"/>
-              <a:t>The before/after in one view. Left: how radio engineering worked — per-vendor consoles, manual exports, reactive troubleshooting, knowledge concentrated in individuals. Right: one platform, automated data, proactive detection, codified knowledge.</a:t>
+              <a:t>Before: engineers stitched answers from six disconnected places. After: one platform — KPIs, detectors, configuration, maps, reports and vendor knowledge behind a single login.</a:t>
             </a:r>
             <a:endParaRPr lang="en-US" dirty="0"/>
           </a:p>
@@ -684,7 +684,7 @@
           <a:p>
             <a:r>
               <a:rPr lang="en-US" dirty="0"/>
-              <a:t>Scale of what exists today: 40+ modules across performance, optimization and configuration; both vendors normalized into one KPI language; data flows automatically; ~19,000 vendor parameter reference pages searchable in-tool.</a:t>
+              <a:t>Scale today: 40+ modules; Nokia and Huawei normalized into one KPI language; 2G through 5G; data loads itself around the clock; ~19,000 vendor parameter reference pages searchable in-tool; one shared source of truth.</a:t>
             </a:r>
             <a:endParaRPr lang="en-US" dirty="0"/>
           </a:p>
@@ -772,7 +772,7 @@
           <a:p>
             <a:r>
               <a:rPr lang="en-US" dirty="0"/>
-              <a:t>Four value pillars: engineering time recovered; problems caught before they hit customers; analysis converted directly into network changes; and all of it on owned IP with no recurring license cost.</a:t>
+              <a:t>Value in one view: assembling a KPI picture used to take hours of exports and merging — now minutes. Detectors find problems before customers feel them; analysis ends in ready-to-apply changes; no license fees; features ship in days.</a:t>
             </a:r>
             <a:endParaRPr lang="en-US" dirty="0"/>
           </a:p>
@@ -860,7 +860,7 @@
           <a:p>
             <a:r>
               <a:rPr lang="en-US" dirty="0"/>
-              <a:t>Sentiment is the leading indicator of a tool's real value. PrimeNet moved from 'another tool' to daily habit: the day opens with its morning report, its numbers settle debates, and because it is built in-house, engineers see their feedback shipped — which keeps adoption growing organically.</a:t>
+              <a:t>Sentiment: PrimeNet moved from 'another tool' to daily habit. The morning report opens the day, its numbers settle debates, and because it's built in-house, engineers see their feedback shipped — adoption spreads by pull, not push.</a:t>
             </a:r>
             <a:endParaRPr lang="en-US" dirty="0"/>
           </a:p>
@@ -948,7 +948,7 @@
           <a:p>
             <a:r>
               <a:rPr lang="en-US" dirty="0"/>
-              <a:t>For Zain this is bigger than a tool: it is owned intelligence about our most valuable asset. It makes us vendor-independent in how we see the network, it protects institutional knowledge, and it is the working proof of the data-driven culture we want everywhere. The trajectory: recommendations, then closed-loop automation, then scale to new domains and potentially other operations.</a:t>
+              <a:t>The future: PrimeNet as the network-truth hub for the whole company. Executive BI and NOC views are live today via the Power BI bridge. Planned next: marketing (launch offers where coverage shines), sales (sell what the network can carry), customer care (see the cell behind the complaint), and planning portals — all fed from the same source.</a:t>
             </a:r>
             <a:endParaRPr lang="en-US" dirty="0"/>
           </a:p>
@@ -1036,7 +1036,7 @@
           <a:p>
             <a:r>
               <a:rPr lang="en-US" dirty="0"/>
-              <a:t>The same data that runs radio engineering answers questions across the business. The Power BI bridge already carries network insight out of engineering. Road ahead: now — the radio network unified; next — shared cross-department dashboards and complaint-to-cell correlation; beyond — AI-driven, closed-loop optimization.</a:t>
+              <a:t>The trajectory rises: today the radio network is unified; next, shared dashboards across departments; then dedicated marketing and sales portals fed by network truth; beyond that, an AI-driven closed loop where the network detects, recommends and — with approval — corrects itself.</a:t>
             </a:r>
             <a:endParaRPr lang="en-US" dirty="0"/>
           </a:p>
@@ -2093,7 +2093,7 @@
         </p:nvSpPr>
         <p:spPr>
           <a:xfrm>
-            <a:off x="822960" y="1417320"/>
+            <a:off x="822960" y="1600200"/>
             <a:ext cx="6858000" cy="292608"/>
           </a:xfrm>
           <a:prstGeom prst="rect">
@@ -2132,7 +2132,7 @@
         </p:nvSpPr>
         <p:spPr>
           <a:xfrm>
-            <a:off x="822960" y="1783080"/>
+            <a:off x="822960" y="1965960"/>
             <a:ext cx="7772400" cy="960120"/>
           </a:xfrm>
           <a:prstGeom prst="rect">
@@ -2171,7 +2171,7 @@
         </p:nvSpPr>
         <p:spPr>
           <a:xfrm>
-            <a:off x="822960" y="2834640"/>
+            <a:off x="822960" y="3017520"/>
             <a:ext cx="7863840" cy="457200"/>
           </a:xfrm>
           <a:prstGeom prst="rect">
@@ -2210,50 +2210,8 @@
         </p:nvSpPr>
         <p:spPr>
           <a:xfrm>
-            <a:off x="822960" y="3429000"/>
-            <a:ext cx="6675120" cy="868680"/>
-          </a:xfrm>
-          <a:prstGeom prst="rect">
-            <a:avLst/>
-          </a:prstGeom>
-          <a:noFill/>
-          <a:ln/>
-        </p:spPr>
-        <p:txBody>
-          <a:bodyPr wrap="square" lIns="0" tIns="0" rIns="0" bIns="0" rtlCol="0" anchor="ctr"/>
-          <a:lstStyle/>
-          <a:p>
-            <a:pPr indent="0" marL="0">
-              <a:lnSpc>
-                <a:spcPct val="115000"/>
-              </a:lnSpc>
-              <a:buNone/>
-            </a:pPr>
-            <a:r>
-              <a:rPr lang="en-US" sz="1400" dirty="0">
-                <a:solidFill>
-                  <a:srgbClr val="A9B7C9"/>
-                </a:solidFill>
-                <a:latin typeface="Calibri" pitchFamily="34" charset="0"/>
-                <a:ea typeface="Calibri" pitchFamily="34" charset="-122"/>
-                <a:cs typeface="Calibri" pitchFamily="34" charset="-120"/>
-              </a:rPr>
-              <a:t>Built in-house by Zain engineers, PrimeNet unifies performance and configuration data from every vendor and every generation of the radio network into one live, shared source of insight.</a:t>
-            </a:r>
-            <a:endParaRPr lang="en-US" sz="1400" dirty="0"/>
-          </a:p>
-        </p:txBody>
-      </p:sp>
-      <p:sp>
-        <p:nvSpPr>
-          <p:cNvPr id="36" name="Text 34"/>
-          <p:cNvSpPr/>
-          <p:nvPr/>
-        </p:nvSpPr>
-        <p:spPr>
-          <a:xfrm>
-            <a:off x="822960" y="4892040"/>
-            <a:ext cx="1841602" cy="457200"/>
+            <a:off x="822960" y="3977640"/>
+            <a:ext cx="1147572" cy="457200"/>
           </a:xfrm>
           <a:prstGeom prst="roundRect">
             <a:avLst>
@@ -2285,7 +2243,7 @@
                 <a:ea typeface="Calibri" pitchFamily="34" charset="-122"/>
                 <a:cs typeface="Calibri" pitchFamily="34" charset="-120"/>
               </a:rPr>
-              <a:t>40+ analysis tools</a:t>
+              <a:t>40+ tools</a:t>
             </a:r>
             <a:endParaRPr lang="en-US" sz="1150" dirty="0"/>
           </a:p>
@@ -2293,14 +2251,14 @@
       </p:sp>
       <p:sp>
         <p:nvSpPr>
-          <p:cNvPr id="37" name="Text 35"/>
-          <p:cNvSpPr/>
-          <p:nvPr/>
-        </p:nvSpPr>
-        <p:spPr>
-          <a:xfrm>
-            <a:off x="2893162" y="4892040"/>
-            <a:ext cx="2266798" cy="457200"/>
+          <p:cNvPr id="36" name="Text 34"/>
+          <p:cNvSpPr/>
+          <p:nvPr/>
+        </p:nvSpPr>
+        <p:spPr>
+          <a:xfrm>
+            <a:off x="2171700" y="3977640"/>
+            <a:ext cx="1581912" cy="457200"/>
           </a:xfrm>
           <a:prstGeom prst="roundRect">
             <a:avLst>
@@ -2332,7 +2290,7 @@
                 <a:ea typeface="Calibri" pitchFamily="34" charset="-122"/>
                 <a:cs typeface="Calibri" pitchFamily="34" charset="-120"/>
               </a:rPr>
-              <a:t>Nokia + Huawei, unified</a:t>
+              <a:t>Nokia + Huawei</a:t>
             </a:r>
             <a:endParaRPr lang="en-US" sz="1150" dirty="0"/>
           </a:p>
@@ -2340,14 +2298,14 @@
       </p:sp>
       <p:sp>
         <p:nvSpPr>
-          <p:cNvPr id="38" name="Text 36"/>
-          <p:cNvSpPr/>
-          <p:nvPr/>
-        </p:nvSpPr>
-        <p:spPr>
-          <a:xfrm>
-            <a:off x="5388559" y="4892040"/>
-            <a:ext cx="1756562" cy="457200"/>
+          <p:cNvPr id="37" name="Text 35"/>
+          <p:cNvSpPr/>
+          <p:nvPr/>
+        </p:nvSpPr>
+        <p:spPr>
+          <a:xfrm>
+            <a:off x="3954780" y="3977640"/>
+            <a:ext cx="1842516" cy="457200"/>
           </a:xfrm>
           <a:prstGeom prst="roundRect">
             <a:avLst>
@@ -2387,14 +2345,14 @@
       </p:sp>
       <p:sp>
         <p:nvSpPr>
-          <p:cNvPr id="39" name="Text 37"/>
-          <p:cNvSpPr/>
-          <p:nvPr/>
-        </p:nvSpPr>
-        <p:spPr>
-          <a:xfrm>
-            <a:off x="7373722" y="4892040"/>
-            <a:ext cx="2011680" cy="457200"/>
+          <p:cNvPr id="38" name="Text 36"/>
+          <p:cNvSpPr/>
+          <p:nvPr/>
+        </p:nvSpPr>
+        <p:spPr>
+          <a:xfrm>
+            <a:off x="5998464" y="3977640"/>
+            <a:ext cx="1581912" cy="457200"/>
           </a:xfrm>
           <a:prstGeom prst="roundRect">
             <a:avLst>
@@ -2426,7 +2384,54 @@
                 <a:ea typeface="Calibri" pitchFamily="34" charset="-122"/>
                 <a:cs typeface="Calibri" pitchFamily="34" charset="-120"/>
               </a:rPr>
-              <a:t>Data 24/7, automated</a:t>
+              <a:t>Built in-house</a:t>
+            </a:r>
+            <a:endParaRPr lang="en-US" sz="1150" dirty="0"/>
+          </a:p>
+        </p:txBody>
+      </p:sp>
+      <p:sp>
+        <p:nvSpPr>
+          <p:cNvPr id="39" name="Text 37"/>
+          <p:cNvSpPr/>
+          <p:nvPr/>
+        </p:nvSpPr>
+        <p:spPr>
+          <a:xfrm>
+            <a:off x="7781544" y="3977640"/>
+            <a:ext cx="1147572" cy="457200"/>
+          </a:xfrm>
+          <a:prstGeom prst="roundRect">
+            <a:avLst>
+              <a:gd name="adj" fmla="val 50000"/>
+            </a:avLst>
+          </a:prstGeom>
+          <a:solidFill>
+            <a:srgbClr val="1B2736"/>
+          </a:solidFill>
+          <a:ln w="12700">
+            <a:solidFill>
+              <a:srgbClr val="304258"/>
+            </a:solidFill>
+          </a:ln>
+        </p:spPr>
+        <p:txBody>
+          <a:bodyPr wrap="square" lIns="0" tIns="0" rIns="0" bIns="0" rtlCol="0" anchor="ctr"/>
+          <a:lstStyle/>
+          <a:p>
+            <a:pPr algn="ctr" indent="0" marL="0">
+              <a:buNone/>
+            </a:pPr>
+            <a:r>
+              <a:rPr lang="en-US" sz="1150" dirty="0">
+                <a:solidFill>
+                  <a:srgbClr val="E8EEF7"/>
+                </a:solidFill>
+                <a:latin typeface="Calibri" pitchFamily="34" charset="0"/>
+                <a:ea typeface="Calibri" pitchFamily="34" charset="-122"/>
+                <a:cs typeface="Calibri" pitchFamily="34" charset="-120"/>
+              </a:rPr>
+              <a:t>Data 24/7</a:t>
             </a:r>
             <a:endParaRPr lang="en-US" sz="1150" dirty="0"/>
           </a:p>
@@ -2465,7 +2470,7 @@
                 <a:ea typeface="Calibri" pitchFamily="34" charset="-122"/>
                 <a:cs typeface="Calibri" pitchFamily="34" charset="-120"/>
               </a:rPr>
-              <a:t>Prepared by the Radio Network Optimization team</a:t>
+              <a:t>Radio Network Optimization team</a:t>
             </a:r>
             <a:endParaRPr lang="en-US" sz="1050" dirty="0"/>
           </a:p>
@@ -2913,7 +2918,7 @@
                 <a:ea typeface="Calibri" pitchFamily="34" charset="-122"/>
                 <a:cs typeface="Calibri" pitchFamily="34" charset="-120"/>
               </a:rPr>
-              <a:t>From scattered and manual, to unified and live</a:t>
+              <a:t>From scattered, to one platform</a:t>
             </a:r>
             <a:endParaRPr lang="en-US" sz="2800" dirty="0"/>
           </a:p>
@@ -2927,12 +2932,196 @@
         </p:nvSpPr>
         <p:spPr>
           <a:xfrm>
-            <a:off x="548640" y="1417320"/>
-            <a:ext cx="5230368" cy="4983480"/>
+            <a:off x="1668780" y="2400300"/>
+            <a:ext cx="2560320" cy="914400"/>
+          </a:xfrm>
+          <a:prstGeom prst="line">
+            <a:avLst/>
+          </a:prstGeom>
+          <a:noFill/>
+          <a:ln w="12700">
+            <a:solidFill>
+              <a:srgbClr val="5C3540"/>
+            </a:solidFill>
+            <a:prstDash val="solid"/>
+          </a:ln>
+        </p:spPr>
+      </p:sp>
+      <p:sp>
+        <p:nvSpPr>
+          <p:cNvPr id="20" name="Shape 18"/>
+          <p:cNvSpPr/>
+          <p:nvPr/>
+        </p:nvSpPr>
+        <p:spPr>
+          <a:xfrm flipV="1">
+            <a:off x="2125980" y="2125980"/>
+            <a:ext cx="1737360" cy="1371600"/>
+          </a:xfrm>
+          <a:prstGeom prst="line">
+            <a:avLst/>
+          </a:prstGeom>
+          <a:noFill/>
+          <a:ln w="12700">
+            <a:solidFill>
+              <a:srgbClr val="5C3540"/>
+            </a:solidFill>
+            <a:prstDash val="solid"/>
+          </a:ln>
+        </p:spPr>
+      </p:sp>
+      <p:sp>
+        <p:nvSpPr>
+          <p:cNvPr id="21" name="Shape 19"/>
+          <p:cNvSpPr/>
+          <p:nvPr/>
+        </p:nvSpPr>
+        <p:spPr>
+          <a:xfrm>
+            <a:off x="1668780" y="2400300"/>
+            <a:ext cx="2286000" cy="2194560"/>
+          </a:xfrm>
+          <a:prstGeom prst="line">
+            <a:avLst/>
+          </a:prstGeom>
+          <a:noFill/>
+          <a:ln w="12700">
+            <a:solidFill>
+              <a:srgbClr val="5C3540"/>
+            </a:solidFill>
+            <a:prstDash val="solid"/>
+          </a:ln>
+        </p:spPr>
+      </p:sp>
+      <p:sp>
+        <p:nvSpPr>
+          <p:cNvPr id="22" name="Shape 20"/>
+          <p:cNvSpPr/>
+          <p:nvPr/>
+        </p:nvSpPr>
+        <p:spPr>
+          <a:xfrm>
+            <a:off x="2125980" y="3497580"/>
+            <a:ext cx="1828800" cy="1097280"/>
+          </a:xfrm>
+          <a:prstGeom prst="line">
+            <a:avLst/>
+          </a:prstGeom>
+          <a:noFill/>
+          <a:ln w="12700">
+            <a:solidFill>
+              <a:srgbClr val="5C3540"/>
+            </a:solidFill>
+            <a:prstDash val="solid"/>
+          </a:ln>
+        </p:spPr>
+      </p:sp>
+      <p:sp>
+        <p:nvSpPr>
+          <p:cNvPr id="23" name="Shape 21"/>
+          <p:cNvSpPr/>
+          <p:nvPr/>
+        </p:nvSpPr>
+        <p:spPr>
+          <a:xfrm flipV="1">
+            <a:off x="1668780" y="2125980"/>
+            <a:ext cx="2194560" cy="2468880"/>
+          </a:xfrm>
+          <a:prstGeom prst="line">
+            <a:avLst/>
+          </a:prstGeom>
+          <a:noFill/>
+          <a:ln w="12700">
+            <a:solidFill>
+              <a:srgbClr val="5C3540"/>
+            </a:solidFill>
+            <a:prstDash val="solid"/>
+          </a:ln>
+        </p:spPr>
+      </p:sp>
+      <p:sp>
+        <p:nvSpPr>
+          <p:cNvPr id="24" name="Shape 22"/>
+          <p:cNvSpPr/>
+          <p:nvPr/>
+        </p:nvSpPr>
+        <p:spPr>
+          <a:xfrm flipV="1">
+            <a:off x="1668780" y="3314700"/>
+            <a:ext cx="2560320" cy="1280160"/>
+          </a:xfrm>
+          <a:prstGeom prst="line">
+            <a:avLst/>
+          </a:prstGeom>
+          <a:noFill/>
+          <a:ln w="12700">
+            <a:solidFill>
+              <a:srgbClr val="5C3540"/>
+            </a:solidFill>
+            <a:prstDash val="solid"/>
+          </a:ln>
+        </p:spPr>
+      </p:sp>
+      <p:sp>
+        <p:nvSpPr>
+          <p:cNvPr id="25" name="Shape 23"/>
+          <p:cNvSpPr/>
+          <p:nvPr/>
+        </p:nvSpPr>
+        <p:spPr>
+          <a:xfrm>
+            <a:off x="1668780" y="2400300"/>
+            <a:ext cx="457200" cy="1097280"/>
+          </a:xfrm>
+          <a:prstGeom prst="line">
+            <a:avLst/>
+          </a:prstGeom>
+          <a:noFill/>
+          <a:ln w="12700">
+            <a:solidFill>
+              <a:srgbClr val="5C3540"/>
+            </a:solidFill>
+            <a:prstDash val="solid"/>
+          </a:ln>
+        </p:spPr>
+      </p:sp>
+      <p:sp>
+        <p:nvSpPr>
+          <p:cNvPr id="26" name="Shape 24"/>
+          <p:cNvSpPr/>
+          <p:nvPr/>
+        </p:nvSpPr>
+        <p:spPr>
+          <a:xfrm>
+            <a:off x="3863340" y="2125980"/>
+            <a:ext cx="365760" cy="1188720"/>
+          </a:xfrm>
+          <a:prstGeom prst="line">
+            <a:avLst/>
+          </a:prstGeom>
+          <a:noFill/>
+          <a:ln w="12700">
+            <a:solidFill>
+              <a:srgbClr val="5C3540"/>
+            </a:solidFill>
+            <a:prstDash val="solid"/>
+          </a:ln>
+        </p:spPr>
+      </p:sp>
+      <p:sp>
+        <p:nvSpPr>
+          <p:cNvPr id="27" name="Text 25"/>
+          <p:cNvSpPr/>
+          <p:nvPr/>
+        </p:nvSpPr>
+        <p:spPr>
+          <a:xfrm>
+            <a:off x="868680" y="2148840"/>
+            <a:ext cx="1600200" cy="502920"/>
           </a:xfrm>
           <a:prstGeom prst="roundRect">
             <a:avLst>
-              <a:gd name="adj" fmla="val 2202"/>
+              <a:gd name="adj" fmla="val 16364"/>
             </a:avLst>
           </a:prstGeom>
           <a:solidFill>
@@ -2940,85 +3129,293 @@
           </a:solidFill>
           <a:ln w="12700">
             <a:solidFill>
-              <a:srgbClr val="304258"/>
-            </a:solidFill>
-            <a:prstDash val="solid"/>
-          </a:ln>
-        </p:spPr>
-      </p:sp>
-      <p:sp>
-        <p:nvSpPr>
-          <p:cNvPr id="20" name="Shape 18"/>
-          <p:cNvSpPr/>
-          <p:nvPr/>
-        </p:nvSpPr>
-        <p:spPr>
-          <a:xfrm>
-            <a:off x="6409944" y="1417320"/>
-            <a:ext cx="5230368" cy="4983480"/>
-          </a:xfrm>
-          <a:prstGeom prst="roundRect">
-            <a:avLst>
-              <a:gd name="adj" fmla="val 2202"/>
-            </a:avLst>
-          </a:prstGeom>
-          <a:solidFill>
-            <a:srgbClr val="1B2736"/>
-          </a:solidFill>
-          <a:ln w="15875">
-            <a:solidFill>
-              <a:srgbClr val="27577B"/>
-            </a:solidFill>
-            <a:prstDash val="solid"/>
-          </a:ln>
-        </p:spPr>
-      </p:sp>
-      <p:sp>
-        <p:nvSpPr>
-          <p:cNvPr id="21" name="Shape 19"/>
-          <p:cNvSpPr/>
-          <p:nvPr/>
-        </p:nvSpPr>
-        <p:spPr>
-          <a:xfrm>
-            <a:off x="5815584" y="3685032"/>
-            <a:ext cx="566928" cy="457200"/>
-          </a:xfrm>
-          <a:prstGeom prst="rightArrow">
-            <a:avLst/>
-          </a:prstGeom>
-          <a:solidFill>
-            <a:srgbClr val="38BDF8"/>
-          </a:solidFill>
-          <a:ln/>
-        </p:spPr>
-      </p:sp>
-      <p:sp>
-        <p:nvSpPr>
-          <p:cNvPr id="22" name="Text 20"/>
-          <p:cNvSpPr/>
-          <p:nvPr/>
-        </p:nvSpPr>
-        <p:spPr>
-          <a:xfrm>
-            <a:off x="868680" y="1618488"/>
-            <a:ext cx="2743200" cy="274320"/>
-          </a:xfrm>
-          <a:prstGeom prst="rect">
-            <a:avLst/>
-          </a:prstGeom>
-          <a:noFill/>
-          <a:ln/>
+              <a:srgbClr val="6B3A44"/>
+            </a:solidFill>
+          </a:ln>
         </p:spPr>
         <p:txBody>
           <a:bodyPr wrap="square" lIns="0" tIns="0" rIns="0" bIns="0" rtlCol="0" anchor="ctr"/>
           <a:lstStyle/>
           <a:p>
-            <a:pPr indent="0" marL="0">
+            <a:pPr algn="ctr" indent="0" marL="0">
               <a:buNone/>
             </a:pPr>
             <a:r>
-              <a:rPr lang="en-US" sz="1300" b="1" spc="200" kern="0" dirty="0">
+              <a:rPr lang="en-US" sz="1150" dirty="0">
+                <a:solidFill>
+                  <a:srgbClr val="E8EEF7"/>
+                </a:solidFill>
+                <a:latin typeface="Calibri" pitchFamily="34" charset="0"/>
+                <a:ea typeface="Calibri" pitchFamily="34" charset="-122"/>
+                <a:cs typeface="Calibri" pitchFamily="34" charset="-120"/>
+              </a:rPr>
+              <a:t>Nokia console</a:t>
+            </a:r>
+            <a:endParaRPr lang="en-US" sz="1150" dirty="0"/>
+          </a:p>
+        </p:txBody>
+      </p:sp>
+      <p:sp>
+        <p:nvSpPr>
+          <p:cNvPr id="28" name="Text 26"/>
+          <p:cNvSpPr/>
+          <p:nvPr/>
+        </p:nvSpPr>
+        <p:spPr>
+          <a:xfrm>
+            <a:off x="3063240" y="1874520"/>
+            <a:ext cx="1600200" cy="502920"/>
+          </a:xfrm>
+          <a:prstGeom prst="roundRect">
+            <a:avLst>
+              <a:gd name="adj" fmla="val 16364"/>
+            </a:avLst>
+          </a:prstGeom>
+          <a:solidFill>
+            <a:srgbClr val="182230"/>
+          </a:solidFill>
+          <a:ln w="12700">
+            <a:solidFill>
+              <a:srgbClr val="6B3A44"/>
+            </a:solidFill>
+          </a:ln>
+        </p:spPr>
+        <p:txBody>
+          <a:bodyPr wrap="square" lIns="0" tIns="0" rIns="0" bIns="0" rtlCol="0" anchor="ctr"/>
+          <a:lstStyle/>
+          <a:p>
+            <a:pPr algn="ctr" indent="0" marL="0">
+              <a:buNone/>
+            </a:pPr>
+            <a:r>
+              <a:rPr lang="en-US" sz="1150" dirty="0">
+                <a:solidFill>
+                  <a:srgbClr val="E8EEF7"/>
+                </a:solidFill>
+                <a:latin typeface="Calibri" pitchFamily="34" charset="0"/>
+                <a:ea typeface="Calibri" pitchFamily="34" charset="-122"/>
+                <a:cs typeface="Calibri" pitchFamily="34" charset="-120"/>
+              </a:rPr>
+              <a:t>Huawei console</a:t>
+            </a:r>
+            <a:endParaRPr lang="en-US" sz="1150" dirty="0"/>
+          </a:p>
+        </p:txBody>
+      </p:sp>
+      <p:sp>
+        <p:nvSpPr>
+          <p:cNvPr id="29" name="Text 27"/>
+          <p:cNvSpPr/>
+          <p:nvPr/>
+        </p:nvSpPr>
+        <p:spPr>
+          <a:xfrm>
+            <a:off x="1325880" y="3246120"/>
+            <a:ext cx="1600200" cy="502920"/>
+          </a:xfrm>
+          <a:prstGeom prst="roundRect">
+            <a:avLst>
+              <a:gd name="adj" fmla="val 16364"/>
+            </a:avLst>
+          </a:prstGeom>
+          <a:solidFill>
+            <a:srgbClr val="182230"/>
+          </a:solidFill>
+          <a:ln w="12700">
+            <a:solidFill>
+              <a:srgbClr val="6B3A44"/>
+            </a:solidFill>
+          </a:ln>
+        </p:spPr>
+        <p:txBody>
+          <a:bodyPr wrap="square" lIns="0" tIns="0" rIns="0" bIns="0" rtlCol="0" anchor="ctr"/>
+          <a:lstStyle/>
+          <a:p>
+            <a:pPr algn="ctr" indent="0" marL="0">
+              <a:buNone/>
+            </a:pPr>
+            <a:r>
+              <a:rPr lang="en-US" sz="1150" dirty="0">
+                <a:solidFill>
+                  <a:srgbClr val="E8EEF7"/>
+                </a:solidFill>
+                <a:latin typeface="Calibri" pitchFamily="34" charset="0"/>
+                <a:ea typeface="Calibri" pitchFamily="34" charset="-122"/>
+                <a:cs typeface="Calibri" pitchFamily="34" charset="-120"/>
+              </a:rPr>
+              <a:t>Excel exports</a:t>
+            </a:r>
+            <a:endParaRPr lang="en-US" sz="1150" dirty="0"/>
+          </a:p>
+        </p:txBody>
+      </p:sp>
+      <p:sp>
+        <p:nvSpPr>
+          <p:cNvPr id="30" name="Text 28"/>
+          <p:cNvSpPr/>
+          <p:nvPr/>
+        </p:nvSpPr>
+        <p:spPr>
+          <a:xfrm>
+            <a:off x="3429000" y="3063240"/>
+            <a:ext cx="1600200" cy="502920"/>
+          </a:xfrm>
+          <a:prstGeom prst="roundRect">
+            <a:avLst>
+              <a:gd name="adj" fmla="val 16364"/>
+            </a:avLst>
+          </a:prstGeom>
+          <a:solidFill>
+            <a:srgbClr val="182230"/>
+          </a:solidFill>
+          <a:ln w="12700">
+            <a:solidFill>
+              <a:srgbClr val="6B3A44"/>
+            </a:solidFill>
+          </a:ln>
+        </p:spPr>
+        <p:txBody>
+          <a:bodyPr wrap="square" lIns="0" tIns="0" rIns="0" bIns="0" rtlCol="0" anchor="ctr"/>
+          <a:lstStyle/>
+          <a:p>
+            <a:pPr algn="ctr" indent="0" marL="0">
+              <a:buNone/>
+            </a:pPr>
+            <a:r>
+              <a:rPr lang="en-US" sz="1150" dirty="0">
+                <a:solidFill>
+                  <a:srgbClr val="E8EEF7"/>
+                </a:solidFill>
+                <a:latin typeface="Calibri" pitchFamily="34" charset="0"/>
+                <a:ea typeface="Calibri" pitchFamily="34" charset="-122"/>
+                <a:cs typeface="Calibri" pitchFamily="34" charset="-120"/>
+              </a:rPr>
+              <a:t>Manual reports</a:t>
+            </a:r>
+            <a:endParaRPr lang="en-US" sz="1150" dirty="0"/>
+          </a:p>
+        </p:txBody>
+      </p:sp>
+      <p:sp>
+        <p:nvSpPr>
+          <p:cNvPr id="31" name="Text 29"/>
+          <p:cNvSpPr/>
+          <p:nvPr/>
+        </p:nvSpPr>
+        <p:spPr>
+          <a:xfrm>
+            <a:off x="868680" y="4343400"/>
+            <a:ext cx="1600200" cy="502920"/>
+          </a:xfrm>
+          <a:prstGeom prst="roundRect">
+            <a:avLst>
+              <a:gd name="adj" fmla="val 16364"/>
+            </a:avLst>
+          </a:prstGeom>
+          <a:solidFill>
+            <a:srgbClr val="182230"/>
+          </a:solidFill>
+          <a:ln w="12700">
+            <a:solidFill>
+              <a:srgbClr val="6B3A44"/>
+            </a:solidFill>
+          </a:ln>
+        </p:spPr>
+        <p:txBody>
+          <a:bodyPr wrap="square" lIns="0" tIns="0" rIns="0" bIns="0" rtlCol="0" anchor="ctr"/>
+          <a:lstStyle/>
+          <a:p>
+            <a:pPr algn="ctr" indent="0" marL="0">
+              <a:buNone/>
+            </a:pPr>
+            <a:r>
+              <a:rPr lang="en-US" sz="1150" dirty="0">
+                <a:solidFill>
+                  <a:srgbClr val="E8EEF7"/>
+                </a:solidFill>
+                <a:latin typeface="Calibri" pitchFamily="34" charset="0"/>
+                <a:ea typeface="Calibri" pitchFamily="34" charset="-122"/>
+                <a:cs typeface="Calibri" pitchFamily="34" charset="-120"/>
+              </a:rPr>
+              <a:t>Tribal knowledge</a:t>
+            </a:r>
+            <a:endParaRPr lang="en-US" sz="1150" dirty="0"/>
+          </a:p>
+        </p:txBody>
+      </p:sp>
+      <p:sp>
+        <p:nvSpPr>
+          <p:cNvPr id="32" name="Text 30"/>
+          <p:cNvSpPr/>
+          <p:nvPr/>
+        </p:nvSpPr>
+        <p:spPr>
+          <a:xfrm>
+            <a:off x="3154680" y="4343400"/>
+            <a:ext cx="1600200" cy="502920"/>
+          </a:xfrm>
+          <a:prstGeom prst="roundRect">
+            <a:avLst>
+              <a:gd name="adj" fmla="val 16364"/>
+            </a:avLst>
+          </a:prstGeom>
+          <a:solidFill>
+            <a:srgbClr val="182230"/>
+          </a:solidFill>
+          <a:ln w="12700">
+            <a:solidFill>
+              <a:srgbClr val="6B3A44"/>
+            </a:solidFill>
+          </a:ln>
+        </p:spPr>
+        <p:txBody>
+          <a:bodyPr wrap="square" lIns="0" tIns="0" rIns="0" bIns="0" rtlCol="0" anchor="ctr"/>
+          <a:lstStyle/>
+          <a:p>
+            <a:pPr algn="ctr" indent="0" marL="0">
+              <a:buNone/>
+            </a:pPr>
+            <a:r>
+              <a:rPr lang="en-US" sz="1150" dirty="0">
+                <a:solidFill>
+                  <a:srgbClr val="E8EEF7"/>
+                </a:solidFill>
+                <a:latin typeface="Calibri" pitchFamily="34" charset="0"/>
+                <a:ea typeface="Calibri" pitchFamily="34" charset="-122"/>
+                <a:cs typeface="Calibri" pitchFamily="34" charset="-120"/>
+              </a:rPr>
+              <a:t>Vendor manuals</a:t>
+            </a:r>
+            <a:endParaRPr lang="en-US" sz="1150" dirty="0"/>
+          </a:p>
+        </p:txBody>
+      </p:sp>
+      <p:sp>
+        <p:nvSpPr>
+          <p:cNvPr id="33" name="Text 31"/>
+          <p:cNvSpPr/>
+          <p:nvPr/>
+        </p:nvSpPr>
+        <p:spPr>
+          <a:xfrm>
+            <a:off x="640080" y="5989320"/>
+            <a:ext cx="4846320" cy="274320"/>
+          </a:xfrm>
+          <a:prstGeom prst="rect">
+            <a:avLst/>
+          </a:prstGeom>
+          <a:noFill/>
+          <a:ln/>
+        </p:spPr>
+        <p:txBody>
+          <a:bodyPr wrap="square" lIns="0" tIns="0" rIns="0" bIns="0" rtlCol="0" anchor="ctr"/>
+          <a:lstStyle/>
+          <a:p>
+            <a:pPr algn="ctr" indent="0" marL="0">
+              <a:buNone/>
+            </a:pPr>
+            <a:r>
+              <a:rPr lang="en-US" sz="1200" b="1" dirty="0">
                 <a:solidFill>
                   <a:srgbClr val="F87171"/>
                 </a:solidFill>
@@ -3026,22 +3423,114 @@
                 <a:ea typeface="Calibri" pitchFamily="34" charset="-122"/>
                 <a:cs typeface="Calibri" pitchFamily="34" charset="-120"/>
               </a:rPr>
-              <a:t>BEFORE</a:t>
+              <a:t>BEFORE — six places, no single answer</a:t>
             </a:r>
-            <a:endParaRPr lang="en-US" sz="1300" dirty="0"/>
-          </a:p>
-        </p:txBody>
-      </p:sp>
-      <p:sp>
-        <p:nvSpPr>
-          <p:cNvPr id="23" name="Text 21"/>
-          <p:cNvSpPr/>
-          <p:nvPr/>
-        </p:nvSpPr>
-        <p:spPr>
-          <a:xfrm>
-            <a:off x="868680" y="1892808"/>
-            <a:ext cx="4572000" cy="256032"/>
+            <a:endParaRPr lang="en-US" sz="1200" dirty="0"/>
+          </a:p>
+        </p:txBody>
+      </p:sp>
+      <p:sp>
+        <p:nvSpPr>
+          <p:cNvPr id="34" name="Shape 32"/>
+          <p:cNvSpPr/>
+          <p:nvPr/>
+        </p:nvSpPr>
+        <p:spPr>
+          <a:xfrm>
+            <a:off x="5577840" y="3520440"/>
+            <a:ext cx="777240" cy="566928"/>
+          </a:xfrm>
+          <a:prstGeom prst="rightArrow">
+            <a:avLst/>
+          </a:prstGeom>
+          <a:solidFill>
+            <a:srgbClr val="38BDF8"/>
+          </a:solidFill>
+          <a:ln/>
+        </p:spPr>
+      </p:sp>
+      <p:sp>
+        <p:nvSpPr>
+          <p:cNvPr id="35" name="Shape 33"/>
+          <p:cNvSpPr/>
+          <p:nvPr/>
+        </p:nvSpPr>
+        <p:spPr>
+          <a:xfrm>
+            <a:off x="9144000" y="2103120"/>
+            <a:ext cx="9144" cy="1600200"/>
+          </a:xfrm>
+          <a:prstGeom prst="line">
+            <a:avLst/>
+          </a:prstGeom>
+          <a:noFill/>
+          <a:ln w="15875">
+            <a:solidFill>
+              <a:srgbClr val="304258"/>
+            </a:solidFill>
+            <a:prstDash val="solid"/>
+          </a:ln>
+        </p:spPr>
+      </p:sp>
+      <p:sp>
+        <p:nvSpPr>
+          <p:cNvPr id="36" name="Shape 34"/>
+          <p:cNvSpPr/>
+          <p:nvPr/>
+        </p:nvSpPr>
+        <p:spPr>
+          <a:xfrm>
+            <a:off x="8860536" y="1819656"/>
+            <a:ext cx="566928" cy="566928"/>
+          </a:xfrm>
+          <a:prstGeom prst="ellipse">
+            <a:avLst/>
+          </a:prstGeom>
+          <a:solidFill>
+            <a:srgbClr val="1B2736"/>
+          </a:solidFill>
+          <a:ln w="15875">
+            <a:solidFill>
+              <a:srgbClr val="304258"/>
+            </a:solidFill>
+            <a:prstDash val="solid"/>
+          </a:ln>
+        </p:spPr>
+      </p:sp>
+      <p:pic>
+        <p:nvPicPr>
+          <p:cNvPr id="37" name="Image 0" descr="preencoded.png">    </p:cNvPr>
+          <p:cNvPicPr>
+            <a:picLocks noChangeAspect="1"/>
+          </p:cNvPicPr>
+          <p:nvPr/>
+        </p:nvPicPr>
+        <p:blipFill>
+          <a:blip r:embed="rId1"/>
+          <a:stretch>
+            <a:fillRect/>
+          </a:stretch>
+        </p:blipFill>
+        <p:spPr>
+          <a:xfrm>
+            <a:off x="9013607" y="1972727"/>
+            <a:ext cx="260787" cy="260787"/>
+          </a:xfrm>
+          <a:prstGeom prst="rect">
+            <a:avLst/>
+          </a:prstGeom>
+        </p:spPr>
+      </p:pic>
+      <p:sp>
+        <p:nvSpPr>
+          <p:cNvPr id="38" name="Text 35"/>
+          <p:cNvSpPr/>
+          <p:nvPr/>
+        </p:nvSpPr>
+        <p:spPr>
+          <a:xfrm>
+            <a:off x="8412480" y="1499616"/>
+            <a:ext cx="1463040" cy="256032"/>
           </a:xfrm>
           <a:prstGeom prst="rect">
             <a:avLst/>
@@ -3053,11 +3542,11 @@
           <a:bodyPr wrap="square" lIns="0" tIns="0" rIns="0" bIns="0" rtlCol="0" anchor="ctr"/>
           <a:lstStyle/>
           <a:p>
-            <a:pPr indent="0" marL="0">
+            <a:pPr algn="ctr" indent="0" marL="0">
               <a:buNone/>
             </a:pPr>
             <a:r>
-              <a:rPr lang="en-US" sz="1100" i="1" dirty="0">
+              <a:rPr lang="en-US" sz="1150" b="1" dirty="0">
                 <a:solidFill>
                   <a:srgbClr val="A9B7C9"/>
                 </a:solidFill>
@@ -3065,22 +3554,94 @@
                 <a:ea typeface="Calibri" pitchFamily="34" charset="-122"/>
                 <a:cs typeface="Calibri" pitchFamily="34" charset="-120"/>
               </a:rPr>
-              <a:t>Fragmented tools, manual effort</a:t>
+              <a:t>KPIs</a:t>
             </a:r>
-            <a:endParaRPr lang="en-US" sz="1100" dirty="0"/>
-          </a:p>
-        </p:txBody>
-      </p:sp>
-      <p:sp>
-        <p:nvSpPr>
-          <p:cNvPr id="24" name="Text 22"/>
-          <p:cNvSpPr/>
-          <p:nvPr/>
-        </p:nvSpPr>
-        <p:spPr>
-          <a:xfrm>
-            <a:off x="6729984" y="1618488"/>
-            <a:ext cx="3200400" cy="274320"/>
+            <a:endParaRPr lang="en-US" sz="1150" dirty="0"/>
+          </a:p>
+        </p:txBody>
+      </p:sp>
+      <p:sp>
+        <p:nvSpPr>
+          <p:cNvPr id="39" name="Shape 36"/>
+          <p:cNvSpPr/>
+          <p:nvPr/>
+        </p:nvSpPr>
+        <p:spPr>
+          <a:xfrm flipV="1">
+            <a:off x="9144000" y="2903220"/>
+            <a:ext cx="1385814" cy="800100"/>
+          </a:xfrm>
+          <a:prstGeom prst="line">
+            <a:avLst/>
+          </a:prstGeom>
+          <a:noFill/>
+          <a:ln w="15875">
+            <a:solidFill>
+              <a:srgbClr val="304258"/>
+            </a:solidFill>
+            <a:prstDash val="solid"/>
+          </a:ln>
+        </p:spPr>
+      </p:sp>
+      <p:sp>
+        <p:nvSpPr>
+          <p:cNvPr id="40" name="Shape 37"/>
+          <p:cNvSpPr/>
+          <p:nvPr/>
+        </p:nvSpPr>
+        <p:spPr>
+          <a:xfrm>
+            <a:off x="10246350" y="2619756"/>
+            <a:ext cx="566928" cy="566928"/>
+          </a:xfrm>
+          <a:prstGeom prst="ellipse">
+            <a:avLst/>
+          </a:prstGeom>
+          <a:solidFill>
+            <a:srgbClr val="1B2736"/>
+          </a:solidFill>
+          <a:ln w="15875">
+            <a:solidFill>
+              <a:srgbClr val="304258"/>
+            </a:solidFill>
+            <a:prstDash val="solid"/>
+          </a:ln>
+        </p:spPr>
+      </p:sp>
+      <p:pic>
+        <p:nvPicPr>
+          <p:cNvPr id="41" name="Image 1" descr="preencoded.png">    </p:cNvPr>
+          <p:cNvPicPr>
+            <a:picLocks noChangeAspect="1"/>
+          </p:cNvPicPr>
+          <p:nvPr/>
+        </p:nvPicPr>
+        <p:blipFill>
+          <a:blip r:embed="rId2"/>
+          <a:stretch>
+            <a:fillRect/>
+          </a:stretch>
+        </p:blipFill>
+        <p:spPr>
+          <a:xfrm>
+            <a:off x="10399420" y="2772827"/>
+            <a:ext cx="260787" cy="260787"/>
+          </a:xfrm>
+          <a:prstGeom prst="rect">
+            <a:avLst/>
+          </a:prstGeom>
+        </p:spPr>
+      </p:pic>
+      <p:sp>
+        <p:nvSpPr>
+          <p:cNvPr id="42" name="Text 38"/>
+          <p:cNvSpPr/>
+          <p:nvPr/>
+        </p:nvSpPr>
+        <p:spPr>
+          <a:xfrm>
+            <a:off x="10913862" y="2775204"/>
+            <a:ext cx="1463040" cy="256032"/>
           </a:xfrm>
           <a:prstGeom prst="rect">
             <a:avLst/>
@@ -3092,11 +3653,558 @@
           <a:bodyPr wrap="square" lIns="0" tIns="0" rIns="0" bIns="0" rtlCol="0" anchor="ctr"/>
           <a:lstStyle/>
           <a:p>
-            <a:pPr indent="0" marL="0">
+            <a:pPr algn="l" indent="0" marL="0">
               <a:buNone/>
             </a:pPr>
             <a:r>
-              <a:rPr lang="en-US" sz="1300" b="1" spc="200" kern="0" dirty="0">
+              <a:rPr lang="en-US" sz="1150" b="1" dirty="0">
+                <a:solidFill>
+                  <a:srgbClr val="A9B7C9"/>
+                </a:solidFill>
+                <a:latin typeface="Calibri" pitchFamily="34" charset="0"/>
+                <a:ea typeface="Calibri" pitchFamily="34" charset="-122"/>
+                <a:cs typeface="Calibri" pitchFamily="34" charset="-120"/>
+              </a:rPr>
+              <a:t>Detectors</a:t>
+            </a:r>
+            <a:endParaRPr lang="en-US" sz="1150" dirty="0"/>
+          </a:p>
+        </p:txBody>
+      </p:sp>
+      <p:sp>
+        <p:nvSpPr>
+          <p:cNvPr id="43" name="Shape 39"/>
+          <p:cNvSpPr/>
+          <p:nvPr/>
+        </p:nvSpPr>
+        <p:spPr>
+          <a:xfrm>
+            <a:off x="9144000" y="3703320"/>
+            <a:ext cx="1385814" cy="800100"/>
+          </a:xfrm>
+          <a:prstGeom prst="line">
+            <a:avLst/>
+          </a:prstGeom>
+          <a:noFill/>
+          <a:ln w="15875">
+            <a:solidFill>
+              <a:srgbClr val="304258"/>
+            </a:solidFill>
+            <a:prstDash val="solid"/>
+          </a:ln>
+        </p:spPr>
+      </p:sp>
+      <p:sp>
+        <p:nvSpPr>
+          <p:cNvPr id="44" name="Shape 40"/>
+          <p:cNvSpPr/>
+          <p:nvPr/>
+        </p:nvSpPr>
+        <p:spPr>
+          <a:xfrm>
+            <a:off x="10246350" y="4219956"/>
+            <a:ext cx="566928" cy="566928"/>
+          </a:xfrm>
+          <a:prstGeom prst="ellipse">
+            <a:avLst/>
+          </a:prstGeom>
+          <a:solidFill>
+            <a:srgbClr val="1B2736"/>
+          </a:solidFill>
+          <a:ln w="15875">
+            <a:solidFill>
+              <a:srgbClr val="304258"/>
+            </a:solidFill>
+            <a:prstDash val="solid"/>
+          </a:ln>
+        </p:spPr>
+      </p:sp>
+      <p:pic>
+        <p:nvPicPr>
+          <p:cNvPr id="45" name="Image 2" descr="preencoded.png">    </p:cNvPr>
+          <p:cNvPicPr>
+            <a:picLocks noChangeAspect="1"/>
+          </p:cNvPicPr>
+          <p:nvPr/>
+        </p:nvPicPr>
+        <p:blipFill>
+          <a:blip r:embed="rId3"/>
+          <a:stretch>
+            <a:fillRect/>
+          </a:stretch>
+        </p:blipFill>
+        <p:spPr>
+          <a:xfrm>
+            <a:off x="10399420" y="4373027"/>
+            <a:ext cx="260787" cy="260787"/>
+          </a:xfrm>
+          <a:prstGeom prst="rect">
+            <a:avLst/>
+          </a:prstGeom>
+        </p:spPr>
+      </p:pic>
+      <p:sp>
+        <p:nvSpPr>
+          <p:cNvPr id="46" name="Text 41"/>
+          <p:cNvSpPr/>
+          <p:nvPr/>
+        </p:nvSpPr>
+        <p:spPr>
+          <a:xfrm>
+            <a:off x="10913862" y="4375404"/>
+            <a:ext cx="1463040" cy="256032"/>
+          </a:xfrm>
+          <a:prstGeom prst="rect">
+            <a:avLst/>
+          </a:prstGeom>
+          <a:noFill/>
+          <a:ln/>
+        </p:spPr>
+        <p:txBody>
+          <a:bodyPr wrap="square" lIns="0" tIns="0" rIns="0" bIns="0" rtlCol="0" anchor="ctr"/>
+          <a:lstStyle/>
+          <a:p>
+            <a:pPr algn="l" indent="0" marL="0">
+              <a:buNone/>
+            </a:pPr>
+            <a:r>
+              <a:rPr lang="en-US" sz="1150" b="1" dirty="0">
+                <a:solidFill>
+                  <a:srgbClr val="A9B7C9"/>
+                </a:solidFill>
+                <a:latin typeface="Calibri" pitchFamily="34" charset="0"/>
+                <a:ea typeface="Calibri" pitchFamily="34" charset="-122"/>
+                <a:cs typeface="Calibri" pitchFamily="34" charset="-120"/>
+              </a:rPr>
+              <a:t>Config</a:t>
+            </a:r>
+            <a:endParaRPr lang="en-US" sz="1150" dirty="0"/>
+          </a:p>
+        </p:txBody>
+      </p:sp>
+      <p:sp>
+        <p:nvSpPr>
+          <p:cNvPr id="47" name="Shape 42"/>
+          <p:cNvSpPr/>
+          <p:nvPr/>
+        </p:nvSpPr>
+        <p:spPr>
+          <a:xfrm>
+            <a:off x="9144000" y="3703320"/>
+            <a:ext cx="9144" cy="1600200"/>
+          </a:xfrm>
+          <a:prstGeom prst="line">
+            <a:avLst/>
+          </a:prstGeom>
+          <a:noFill/>
+          <a:ln w="15875">
+            <a:solidFill>
+              <a:srgbClr val="304258"/>
+            </a:solidFill>
+            <a:prstDash val="solid"/>
+          </a:ln>
+        </p:spPr>
+      </p:sp>
+      <p:sp>
+        <p:nvSpPr>
+          <p:cNvPr id="48" name="Shape 43"/>
+          <p:cNvSpPr/>
+          <p:nvPr/>
+        </p:nvSpPr>
+        <p:spPr>
+          <a:xfrm>
+            <a:off x="8860536" y="5020056"/>
+            <a:ext cx="566928" cy="566928"/>
+          </a:xfrm>
+          <a:prstGeom prst="ellipse">
+            <a:avLst/>
+          </a:prstGeom>
+          <a:solidFill>
+            <a:srgbClr val="1B2736"/>
+          </a:solidFill>
+          <a:ln w="15875">
+            <a:solidFill>
+              <a:srgbClr val="304258"/>
+            </a:solidFill>
+            <a:prstDash val="solid"/>
+          </a:ln>
+        </p:spPr>
+      </p:sp>
+      <p:pic>
+        <p:nvPicPr>
+          <p:cNvPr id="49" name="Image 3" descr="preencoded.png">    </p:cNvPr>
+          <p:cNvPicPr>
+            <a:picLocks noChangeAspect="1"/>
+          </p:cNvPicPr>
+          <p:nvPr/>
+        </p:nvPicPr>
+        <p:blipFill>
+          <a:blip r:embed="rId4"/>
+          <a:stretch>
+            <a:fillRect/>
+          </a:stretch>
+        </p:blipFill>
+        <p:spPr>
+          <a:xfrm>
+            <a:off x="9013607" y="5173127"/>
+            <a:ext cx="260787" cy="260787"/>
+          </a:xfrm>
+          <a:prstGeom prst="rect">
+            <a:avLst/>
+          </a:prstGeom>
+        </p:spPr>
+      </p:pic>
+      <p:sp>
+        <p:nvSpPr>
+          <p:cNvPr id="50" name="Text 44"/>
+          <p:cNvSpPr/>
+          <p:nvPr/>
+        </p:nvSpPr>
+        <p:spPr>
+          <a:xfrm>
+            <a:off x="8412480" y="5669280"/>
+            <a:ext cx="1463040" cy="256032"/>
+          </a:xfrm>
+          <a:prstGeom prst="rect">
+            <a:avLst/>
+          </a:prstGeom>
+          <a:noFill/>
+          <a:ln/>
+        </p:spPr>
+        <p:txBody>
+          <a:bodyPr wrap="square" lIns="0" tIns="0" rIns="0" bIns="0" rtlCol="0" anchor="ctr"/>
+          <a:lstStyle/>
+          <a:p>
+            <a:pPr algn="ctr" indent="0" marL="0">
+              <a:buNone/>
+            </a:pPr>
+            <a:r>
+              <a:rPr lang="en-US" sz="1150" b="1" dirty="0">
+                <a:solidFill>
+                  <a:srgbClr val="A9B7C9"/>
+                </a:solidFill>
+                <a:latin typeface="Calibri" pitchFamily="34" charset="0"/>
+                <a:ea typeface="Calibri" pitchFamily="34" charset="-122"/>
+                <a:cs typeface="Calibri" pitchFamily="34" charset="-120"/>
+              </a:rPr>
+              <a:t>Maps</a:t>
+            </a:r>
+            <a:endParaRPr lang="en-US" sz="1150" dirty="0"/>
+          </a:p>
+        </p:txBody>
+      </p:sp>
+      <p:sp>
+        <p:nvSpPr>
+          <p:cNvPr id="51" name="Shape 45"/>
+          <p:cNvSpPr/>
+          <p:nvPr/>
+        </p:nvSpPr>
+        <p:spPr>
+          <a:xfrm flipV="1">
+            <a:off x="7758186" y="3703320"/>
+            <a:ext cx="1385814" cy="800100"/>
+          </a:xfrm>
+          <a:prstGeom prst="line">
+            <a:avLst/>
+          </a:prstGeom>
+          <a:noFill/>
+          <a:ln w="15875">
+            <a:solidFill>
+              <a:srgbClr val="304258"/>
+            </a:solidFill>
+            <a:prstDash val="solid"/>
+          </a:ln>
+        </p:spPr>
+      </p:sp>
+      <p:sp>
+        <p:nvSpPr>
+          <p:cNvPr id="52" name="Shape 46"/>
+          <p:cNvSpPr/>
+          <p:nvPr/>
+        </p:nvSpPr>
+        <p:spPr>
+          <a:xfrm>
+            <a:off x="7474722" y="4219956"/>
+            <a:ext cx="566928" cy="566928"/>
+          </a:xfrm>
+          <a:prstGeom prst="ellipse">
+            <a:avLst/>
+          </a:prstGeom>
+          <a:solidFill>
+            <a:srgbClr val="1B2736"/>
+          </a:solidFill>
+          <a:ln w="15875">
+            <a:solidFill>
+              <a:srgbClr val="304258"/>
+            </a:solidFill>
+            <a:prstDash val="solid"/>
+          </a:ln>
+        </p:spPr>
+      </p:sp>
+      <p:pic>
+        <p:nvPicPr>
+          <p:cNvPr id="53" name="Image 4" descr="preencoded.png">    </p:cNvPr>
+          <p:cNvPicPr>
+            <a:picLocks noChangeAspect="1"/>
+          </p:cNvPicPr>
+          <p:nvPr/>
+        </p:nvPicPr>
+        <p:blipFill>
+          <a:blip r:embed="rId5"/>
+          <a:stretch>
+            <a:fillRect/>
+          </a:stretch>
+        </p:blipFill>
+        <p:spPr>
+          <a:xfrm>
+            <a:off x="7627793" y="4373027"/>
+            <a:ext cx="260787" cy="260787"/>
+          </a:xfrm>
+          <a:prstGeom prst="rect">
+            <a:avLst/>
+          </a:prstGeom>
+        </p:spPr>
+      </p:pic>
+      <p:sp>
+        <p:nvSpPr>
+          <p:cNvPr id="54" name="Text 47"/>
+          <p:cNvSpPr/>
+          <p:nvPr/>
+        </p:nvSpPr>
+        <p:spPr>
+          <a:xfrm>
+            <a:off x="5911098" y="4375404"/>
+            <a:ext cx="1463040" cy="256032"/>
+          </a:xfrm>
+          <a:prstGeom prst="rect">
+            <a:avLst/>
+          </a:prstGeom>
+          <a:noFill/>
+          <a:ln/>
+        </p:spPr>
+        <p:txBody>
+          <a:bodyPr wrap="square" lIns="0" tIns="0" rIns="0" bIns="0" rtlCol="0" anchor="ctr"/>
+          <a:lstStyle/>
+          <a:p>
+            <a:pPr algn="r" indent="0" marL="0">
+              <a:buNone/>
+            </a:pPr>
+            <a:r>
+              <a:rPr lang="en-US" sz="1150" b="1" dirty="0">
+                <a:solidFill>
+                  <a:srgbClr val="A9B7C9"/>
+                </a:solidFill>
+                <a:latin typeface="Calibri" pitchFamily="34" charset="0"/>
+                <a:ea typeface="Calibri" pitchFamily="34" charset="-122"/>
+                <a:cs typeface="Calibri" pitchFamily="34" charset="-120"/>
+              </a:rPr>
+              <a:t>Reports</a:t>
+            </a:r>
+            <a:endParaRPr lang="en-US" sz="1150" dirty="0"/>
+          </a:p>
+        </p:txBody>
+      </p:sp>
+      <p:sp>
+        <p:nvSpPr>
+          <p:cNvPr id="55" name="Shape 48"/>
+          <p:cNvSpPr/>
+          <p:nvPr/>
+        </p:nvSpPr>
+        <p:spPr>
+          <a:xfrm>
+            <a:off x="7758186" y="2903220"/>
+            <a:ext cx="1385814" cy="800100"/>
+          </a:xfrm>
+          <a:prstGeom prst="line">
+            <a:avLst/>
+          </a:prstGeom>
+          <a:noFill/>
+          <a:ln w="15875">
+            <a:solidFill>
+              <a:srgbClr val="304258"/>
+            </a:solidFill>
+            <a:prstDash val="solid"/>
+          </a:ln>
+        </p:spPr>
+      </p:sp>
+      <p:sp>
+        <p:nvSpPr>
+          <p:cNvPr id="56" name="Shape 49"/>
+          <p:cNvSpPr/>
+          <p:nvPr/>
+        </p:nvSpPr>
+        <p:spPr>
+          <a:xfrm>
+            <a:off x="7474722" y="2619756"/>
+            <a:ext cx="566928" cy="566928"/>
+          </a:xfrm>
+          <a:prstGeom prst="ellipse">
+            <a:avLst/>
+          </a:prstGeom>
+          <a:solidFill>
+            <a:srgbClr val="1B2736"/>
+          </a:solidFill>
+          <a:ln w="15875">
+            <a:solidFill>
+              <a:srgbClr val="304258"/>
+            </a:solidFill>
+            <a:prstDash val="solid"/>
+          </a:ln>
+        </p:spPr>
+      </p:sp>
+      <p:pic>
+        <p:nvPicPr>
+          <p:cNvPr id="57" name="Image 5" descr="preencoded.png">    </p:cNvPr>
+          <p:cNvPicPr>
+            <a:picLocks noChangeAspect="1"/>
+          </p:cNvPicPr>
+          <p:nvPr/>
+        </p:nvPicPr>
+        <p:blipFill>
+          <a:blip r:embed="rId6"/>
+          <a:stretch>
+            <a:fillRect/>
+          </a:stretch>
+        </p:blipFill>
+        <p:spPr>
+          <a:xfrm>
+            <a:off x="7627793" y="2772827"/>
+            <a:ext cx="260787" cy="260787"/>
+          </a:xfrm>
+          <a:prstGeom prst="rect">
+            <a:avLst/>
+          </a:prstGeom>
+        </p:spPr>
+      </p:pic>
+      <p:sp>
+        <p:nvSpPr>
+          <p:cNvPr id="58" name="Text 50"/>
+          <p:cNvSpPr/>
+          <p:nvPr/>
+        </p:nvSpPr>
+        <p:spPr>
+          <a:xfrm>
+            <a:off x="5911098" y="2775204"/>
+            <a:ext cx="1463040" cy="256032"/>
+          </a:xfrm>
+          <a:prstGeom prst="rect">
+            <a:avLst/>
+          </a:prstGeom>
+          <a:noFill/>
+          <a:ln/>
+        </p:spPr>
+        <p:txBody>
+          <a:bodyPr wrap="square" lIns="0" tIns="0" rIns="0" bIns="0" rtlCol="0" anchor="ctr"/>
+          <a:lstStyle/>
+          <a:p>
+            <a:pPr algn="r" indent="0" marL="0">
+              <a:buNone/>
+            </a:pPr>
+            <a:r>
+              <a:rPr lang="en-US" sz="1150" b="1" dirty="0">
+                <a:solidFill>
+                  <a:srgbClr val="A9B7C9"/>
+                </a:solidFill>
+                <a:latin typeface="Calibri" pitchFamily="34" charset="0"/>
+                <a:ea typeface="Calibri" pitchFamily="34" charset="-122"/>
+                <a:cs typeface="Calibri" pitchFamily="34" charset="-120"/>
+              </a:rPr>
+              <a:t>Knowledge</a:t>
+            </a:r>
+            <a:endParaRPr lang="en-US" sz="1150" dirty="0"/>
+          </a:p>
+        </p:txBody>
+      </p:sp>
+      <p:sp>
+        <p:nvSpPr>
+          <p:cNvPr id="59" name="Shape 51"/>
+          <p:cNvSpPr/>
+          <p:nvPr/>
+        </p:nvSpPr>
+        <p:spPr>
+          <a:xfrm>
+            <a:off x="8430768" y="2990088"/>
+            <a:ext cx="1426464" cy="1426464"/>
+          </a:xfrm>
+          <a:prstGeom prst="ellipse">
+            <a:avLst/>
+          </a:prstGeom>
+          <a:solidFill>
+            <a:srgbClr val="223246"/>
+          </a:solidFill>
+          <a:ln w="22225">
+            <a:solidFill>
+              <a:srgbClr val="38BDF8"/>
+            </a:solidFill>
+            <a:prstDash val="solid"/>
+          </a:ln>
+        </p:spPr>
+      </p:sp>
+      <p:sp>
+        <p:nvSpPr>
+          <p:cNvPr id="60" name="Text 52"/>
+          <p:cNvSpPr/>
+          <p:nvPr/>
+        </p:nvSpPr>
+        <p:spPr>
+          <a:xfrm>
+            <a:off x="8430768" y="2990088"/>
+            <a:ext cx="1426464" cy="1426464"/>
+          </a:xfrm>
+          <a:prstGeom prst="rect">
+            <a:avLst/>
+          </a:prstGeom>
+          <a:noFill/>
+          <a:ln/>
+        </p:spPr>
+        <p:txBody>
+          <a:bodyPr wrap="square" lIns="0" tIns="0" rIns="0" bIns="0" rtlCol="0" anchor="ctr"/>
+          <a:lstStyle/>
+          <a:p>
+            <a:pPr algn="ctr" indent="0" marL="0">
+              <a:buNone/>
+            </a:pPr>
+            <a:r>
+              <a:rPr lang="en-US" sz="1450" b="1" dirty="0">
+                <a:solidFill>
+                  <a:srgbClr val="E8EEF7"/>
+                </a:solidFill>
+                <a:latin typeface="Calibri" pitchFamily="34" charset="0"/>
+                <a:ea typeface="Calibri" pitchFamily="34" charset="-122"/>
+                <a:cs typeface="Calibri" pitchFamily="34" charset="-120"/>
+              </a:rPr>
+              <a:t>PrimeNet</a:t>
+            </a:r>
+            <a:endParaRPr lang="en-US" sz="1450" dirty="0"/>
+          </a:p>
+        </p:txBody>
+      </p:sp>
+      <p:sp>
+        <p:nvSpPr>
+          <p:cNvPr id="61" name="Text 53"/>
+          <p:cNvSpPr/>
+          <p:nvPr/>
+        </p:nvSpPr>
+        <p:spPr>
+          <a:xfrm>
+            <a:off x="6766560" y="5989320"/>
+            <a:ext cx="4754880" cy="274320"/>
+          </a:xfrm>
+          <a:prstGeom prst="rect">
+            <a:avLst/>
+          </a:prstGeom>
+          <a:noFill/>
+          <a:ln/>
+        </p:spPr>
+        <p:txBody>
+          <a:bodyPr wrap="square" lIns="0" tIns="0" rIns="0" bIns="0" rtlCol="0" anchor="ctr"/>
+          <a:lstStyle/>
+          <a:p>
+            <a:pPr algn="ctr" indent="0" marL="0">
+              <a:buNone/>
+            </a:pPr>
+            <a:r>
+              <a:rPr lang="en-US" sz="1200" b="1" dirty="0">
                 <a:solidFill>
                   <a:srgbClr val="34D399"/>
                 </a:solidFill>
@@ -3104,736 +4212,9 @@
                 <a:ea typeface="Calibri" pitchFamily="34" charset="-122"/>
                 <a:cs typeface="Calibri" pitchFamily="34" charset="-120"/>
               </a:rPr>
-              <a:t>WITH PRIMENET</a:t>
+              <a:t>AFTER — one login, every answer</a:t>
             </a:r>
-            <a:endParaRPr lang="en-US" sz="1300" dirty="0"/>
-          </a:p>
-        </p:txBody>
-      </p:sp>
-      <p:sp>
-        <p:nvSpPr>
-          <p:cNvPr id="25" name="Text 23"/>
-          <p:cNvSpPr/>
-          <p:nvPr/>
-        </p:nvSpPr>
-        <p:spPr>
-          <a:xfrm>
-            <a:off x="6729984" y="1892808"/>
-            <a:ext cx="4572000" cy="256032"/>
-          </a:xfrm>
-          <a:prstGeom prst="rect">
-            <a:avLst/>
-          </a:prstGeom>
-          <a:noFill/>
-          <a:ln/>
-        </p:spPr>
-        <p:txBody>
-          <a:bodyPr wrap="square" lIns="0" tIns="0" rIns="0" bIns="0" rtlCol="0" anchor="ctr"/>
-          <a:lstStyle/>
-          <a:p>
-            <a:pPr indent="0" marL="0">
-              <a:buNone/>
-            </a:pPr>
-            <a:r>
-              <a:rPr lang="en-US" sz="1100" i="1" dirty="0">
-                <a:solidFill>
-                  <a:srgbClr val="A9B7C9"/>
-                </a:solidFill>
-                <a:latin typeface="Calibri" pitchFamily="34" charset="0"/>
-                <a:ea typeface="Calibri" pitchFamily="34" charset="-122"/>
-                <a:cs typeface="Calibri" pitchFamily="34" charset="-120"/>
-              </a:rPr>
-              <a:t>One platform, live answers</a:t>
-            </a:r>
-            <a:endParaRPr lang="en-US" sz="1100" dirty="0"/>
-          </a:p>
-        </p:txBody>
-      </p:sp>
-      <p:pic>
-        <p:nvPicPr>
-          <p:cNvPr id="26" name="Image 0" descr="preencoded.png">    </p:cNvPr>
-          <p:cNvPicPr>
-            <a:picLocks noChangeAspect="1"/>
-          </p:cNvPicPr>
-          <p:nvPr/>
-        </p:nvPicPr>
-        <p:blipFill>
-          <a:blip r:embed="rId1"/>
-          <a:stretch>
-            <a:fillRect/>
-          </a:stretch>
-        </p:blipFill>
-        <p:spPr>
-          <a:xfrm>
-            <a:off x="868680" y="2377440"/>
-            <a:ext cx="274320" cy="274320"/>
-          </a:xfrm>
-          <a:prstGeom prst="rect">
-            <a:avLst/>
-          </a:prstGeom>
-        </p:spPr>
-      </p:pic>
-      <p:sp>
-        <p:nvSpPr>
-          <p:cNvPr id="27" name="Text 24"/>
-          <p:cNvSpPr/>
-          <p:nvPr/>
-        </p:nvSpPr>
-        <p:spPr>
-          <a:xfrm>
-            <a:off x="1325880" y="2331720"/>
-            <a:ext cx="4343400" cy="914400"/>
-          </a:xfrm>
-          <a:prstGeom prst="rect">
-            <a:avLst/>
-          </a:prstGeom>
-          <a:noFill/>
-          <a:ln/>
-        </p:spPr>
-        <p:txBody>
-          <a:bodyPr wrap="square" lIns="0" tIns="0" rIns="0" bIns="0" rtlCol="0" anchor="t"/>
-          <a:lstStyle/>
-          <a:p>
-            <a:pPr indent="0" marL="0">
-              <a:lnSpc>
-                <a:spcPct val="112000"/>
-              </a:lnSpc>
-              <a:buNone/>
-            </a:pPr>
-            <a:r>
-              <a:rPr lang="en-US" sz="1300" b="1" dirty="0">
-                <a:solidFill>
-                  <a:srgbClr val="E8EEF7"/>
-                </a:solidFill>
-                <a:latin typeface="Calibri" pitchFamily="34" charset="0"/>
-                <a:ea typeface="Calibri" pitchFamily="34" charset="-122"/>
-                <a:cs typeface="Calibri" pitchFamily="34" charset="-120"/>
-              </a:rPr>
-              <a:t>Separate consoles per vendor</a:t>
-            </a:r>
-            <a:endParaRPr lang="en-US" sz="1300" dirty="0"/>
-          </a:p>
-          <a:p>
-            <a:pPr indent="0" marL="0">
-              <a:lnSpc>
-                <a:spcPct val="112000"/>
-              </a:lnSpc>
-              <a:buNone/>
-            </a:pPr>
-            <a:r>
-              <a:rPr lang="en-US" sz="1100" dirty="0">
-                <a:solidFill>
-                  <a:srgbClr val="A9B7C9"/>
-                </a:solidFill>
-                <a:latin typeface="Calibri" pitchFamily="34" charset="0"/>
-                <a:ea typeface="Calibri" pitchFamily="34" charset="-122"/>
-                <a:cs typeface="Calibri" pitchFamily="34" charset="-120"/>
-              </a:rPr>
-              <a:t>Nokia and Huawei data lived apart, in expert-only tools.</a:t>
-            </a:r>
-            <a:endParaRPr lang="en-US" sz="1300" dirty="0"/>
-          </a:p>
-        </p:txBody>
-      </p:sp>
-      <p:pic>
-        <p:nvPicPr>
-          <p:cNvPr id="28" name="Image 1" descr="preencoded.png">    </p:cNvPr>
-          <p:cNvPicPr>
-            <a:picLocks noChangeAspect="1"/>
-          </p:cNvPicPr>
-          <p:nvPr/>
-        </p:nvPicPr>
-        <p:blipFill>
-          <a:blip r:embed="rId2"/>
-          <a:stretch>
-            <a:fillRect/>
-          </a:stretch>
-        </p:blipFill>
-        <p:spPr>
-          <a:xfrm>
-            <a:off x="868680" y="3410712"/>
-            <a:ext cx="274320" cy="274320"/>
-          </a:xfrm>
-          <a:prstGeom prst="rect">
-            <a:avLst/>
-          </a:prstGeom>
-        </p:spPr>
-      </p:pic>
-      <p:sp>
-        <p:nvSpPr>
-          <p:cNvPr id="29" name="Text 25"/>
-          <p:cNvSpPr/>
-          <p:nvPr/>
-        </p:nvSpPr>
-        <p:spPr>
-          <a:xfrm>
-            <a:off x="1325880" y="3364992"/>
-            <a:ext cx="4343400" cy="914400"/>
-          </a:xfrm>
-          <a:prstGeom prst="rect">
-            <a:avLst/>
-          </a:prstGeom>
-          <a:noFill/>
-          <a:ln/>
-        </p:spPr>
-        <p:txBody>
-          <a:bodyPr wrap="square" lIns="0" tIns="0" rIns="0" bIns="0" rtlCol="0" anchor="t"/>
-          <a:lstStyle/>
-          <a:p>
-            <a:pPr indent="0" marL="0">
-              <a:lnSpc>
-                <a:spcPct val="112000"/>
-              </a:lnSpc>
-              <a:buNone/>
-            </a:pPr>
-            <a:r>
-              <a:rPr lang="en-US" sz="1300" b="1" dirty="0">
-                <a:solidFill>
-                  <a:srgbClr val="E8EEF7"/>
-                </a:solidFill>
-                <a:latin typeface="Calibri" pitchFamily="34" charset="0"/>
-                <a:ea typeface="Calibri" pitchFamily="34" charset="-122"/>
-                <a:cs typeface="Calibri" pitchFamily="34" charset="-120"/>
-              </a:rPr>
-              <a:t>Manual exports and spreadsheets</a:t>
-            </a:r>
-            <a:endParaRPr lang="en-US" sz="1300" dirty="0"/>
-          </a:p>
-          <a:p>
-            <a:pPr indent="0" marL="0">
-              <a:lnSpc>
-                <a:spcPct val="112000"/>
-              </a:lnSpc>
-              <a:buNone/>
-            </a:pPr>
-            <a:r>
-              <a:rPr lang="en-US" sz="1100" dirty="0">
-                <a:solidFill>
-                  <a:srgbClr val="A9B7C9"/>
-                </a:solidFill>
-                <a:latin typeface="Calibri" pitchFamily="34" charset="0"/>
-                <a:ea typeface="Calibri" pitchFamily="34" charset="-122"/>
-                <a:cs typeface="Calibri" pitchFamily="34" charset="-120"/>
-              </a:rPr>
-              <a:t>Hours to assemble one KPI view — stale by the time it shipped.</a:t>
-            </a:r>
-            <a:endParaRPr lang="en-US" sz="1300" dirty="0"/>
-          </a:p>
-        </p:txBody>
-      </p:sp>
-      <p:pic>
-        <p:nvPicPr>
-          <p:cNvPr id="30" name="Image 2" descr="preencoded.png">    </p:cNvPr>
-          <p:cNvPicPr>
-            <a:picLocks noChangeAspect="1"/>
-          </p:cNvPicPr>
-          <p:nvPr/>
-        </p:nvPicPr>
-        <p:blipFill>
-          <a:blip r:embed="rId3"/>
-          <a:stretch>
-            <a:fillRect/>
-          </a:stretch>
-        </p:blipFill>
-        <p:spPr>
-          <a:xfrm>
-            <a:off x="868680" y="4443984"/>
-            <a:ext cx="274320" cy="274320"/>
-          </a:xfrm>
-          <a:prstGeom prst="rect">
-            <a:avLst/>
-          </a:prstGeom>
-        </p:spPr>
-      </p:pic>
-      <p:sp>
-        <p:nvSpPr>
-          <p:cNvPr id="31" name="Text 26"/>
-          <p:cNvSpPr/>
-          <p:nvPr/>
-        </p:nvSpPr>
-        <p:spPr>
-          <a:xfrm>
-            <a:off x="1325880" y="4398264"/>
-            <a:ext cx="4343400" cy="914400"/>
-          </a:xfrm>
-          <a:prstGeom prst="rect">
-            <a:avLst/>
-          </a:prstGeom>
-          <a:noFill/>
-          <a:ln/>
-        </p:spPr>
-        <p:txBody>
-          <a:bodyPr wrap="square" lIns="0" tIns="0" rIns="0" bIns="0" rtlCol="0" anchor="t"/>
-          <a:lstStyle/>
-          <a:p>
-            <a:pPr indent="0" marL="0">
-              <a:lnSpc>
-                <a:spcPct val="112000"/>
-              </a:lnSpc>
-              <a:buNone/>
-            </a:pPr>
-            <a:r>
-              <a:rPr lang="en-US" sz="1300" b="1" dirty="0">
-                <a:solidFill>
-                  <a:srgbClr val="E8EEF7"/>
-                </a:solidFill>
-                <a:latin typeface="Calibri" pitchFamily="34" charset="0"/>
-                <a:ea typeface="Calibri" pitchFamily="34" charset="-122"/>
-                <a:cs typeface="Calibri" pitchFamily="34" charset="-120"/>
-              </a:rPr>
-              <a:t>Reactive by necessity</a:t>
-            </a:r>
-            <a:endParaRPr lang="en-US" sz="1300" dirty="0"/>
-          </a:p>
-          <a:p>
-            <a:pPr indent="0" marL="0">
-              <a:lnSpc>
-                <a:spcPct val="112000"/>
-              </a:lnSpc>
-              <a:buNone/>
-            </a:pPr>
-            <a:r>
-              <a:rPr lang="en-US" sz="1100" dirty="0">
-                <a:solidFill>
-                  <a:srgbClr val="A9B7C9"/>
-                </a:solidFill>
-                <a:latin typeface="Calibri" pitchFamily="34" charset="0"/>
-                <a:ea typeface="Calibri" pitchFamily="34" charset="-122"/>
-                <a:cs typeface="Calibri" pitchFamily="34" charset="-120"/>
-              </a:rPr>
-              <a:t>Problems often surfaced only after customers felt them.</a:t>
-            </a:r>
-            <a:endParaRPr lang="en-US" sz="1300" dirty="0"/>
-          </a:p>
-        </p:txBody>
-      </p:sp>
-      <p:pic>
-        <p:nvPicPr>
-          <p:cNvPr id="32" name="Image 3" descr="preencoded.png">    </p:cNvPr>
-          <p:cNvPicPr>
-            <a:picLocks noChangeAspect="1"/>
-          </p:cNvPicPr>
-          <p:nvPr/>
-        </p:nvPicPr>
-        <p:blipFill>
-          <a:blip r:embed="rId4"/>
-          <a:stretch>
-            <a:fillRect/>
-          </a:stretch>
-        </p:blipFill>
-        <p:spPr>
-          <a:xfrm>
-            <a:off x="868680" y="5477256"/>
-            <a:ext cx="274320" cy="274320"/>
-          </a:xfrm>
-          <a:prstGeom prst="rect">
-            <a:avLst/>
-          </a:prstGeom>
-        </p:spPr>
-      </p:pic>
-      <p:sp>
-        <p:nvSpPr>
-          <p:cNvPr id="33" name="Text 27"/>
-          <p:cNvSpPr/>
-          <p:nvPr/>
-        </p:nvSpPr>
-        <p:spPr>
-          <a:xfrm>
-            <a:off x="1325880" y="5431536"/>
-            <a:ext cx="4343400" cy="914400"/>
-          </a:xfrm>
-          <a:prstGeom prst="rect">
-            <a:avLst/>
-          </a:prstGeom>
-          <a:noFill/>
-          <a:ln/>
-        </p:spPr>
-        <p:txBody>
-          <a:bodyPr wrap="square" lIns="0" tIns="0" rIns="0" bIns="0" rtlCol="0" anchor="t"/>
-          <a:lstStyle/>
-          <a:p>
-            <a:pPr indent="0" marL="0">
-              <a:lnSpc>
-                <a:spcPct val="112000"/>
-              </a:lnSpc>
-              <a:buNone/>
-            </a:pPr>
-            <a:r>
-              <a:rPr lang="en-US" sz="1300" b="1" dirty="0">
-                <a:solidFill>
-                  <a:srgbClr val="E8EEF7"/>
-                </a:solidFill>
-                <a:latin typeface="Calibri" pitchFamily="34" charset="0"/>
-                <a:ea typeface="Calibri" pitchFamily="34" charset="-122"/>
-                <a:cs typeface="Calibri" pitchFamily="34" charset="-120"/>
-              </a:rPr>
-              <a:t>Knowledge in a few heads</a:t>
-            </a:r>
-            <a:endParaRPr lang="en-US" sz="1300" dirty="0"/>
-          </a:p>
-          <a:p>
-            <a:pPr indent="0" marL="0">
-              <a:lnSpc>
-                <a:spcPct val="112000"/>
-              </a:lnSpc>
-              <a:buNone/>
-            </a:pPr>
-            <a:r>
-              <a:rPr lang="en-US" sz="1100" dirty="0">
-                <a:solidFill>
-                  <a:srgbClr val="A9B7C9"/>
-                </a:solidFill>
-                <a:latin typeface="Calibri" pitchFamily="34" charset="0"/>
-                <a:ea typeface="Calibri" pitchFamily="34" charset="-122"/>
-                <a:cs typeface="Calibri" pitchFamily="34" charset="-120"/>
-              </a:rPr>
-              <a:t>Parameters and know-how depended on individuals.</a:t>
-            </a:r>
-            <a:endParaRPr lang="en-US" sz="1300" dirty="0"/>
-          </a:p>
-        </p:txBody>
-      </p:sp>
-      <p:pic>
-        <p:nvPicPr>
-          <p:cNvPr id="34" name="Image 4" descr="preencoded.png">    </p:cNvPr>
-          <p:cNvPicPr>
-            <a:picLocks noChangeAspect="1"/>
-          </p:cNvPicPr>
-          <p:nvPr/>
-        </p:nvPicPr>
-        <p:blipFill>
-          <a:blip r:embed="rId5"/>
-          <a:stretch>
-            <a:fillRect/>
-          </a:stretch>
-        </p:blipFill>
-        <p:spPr>
-          <a:xfrm>
-            <a:off x="6729984" y="2377440"/>
-            <a:ext cx="274320" cy="274320"/>
-          </a:xfrm>
-          <a:prstGeom prst="rect">
-            <a:avLst/>
-          </a:prstGeom>
-        </p:spPr>
-      </p:pic>
-      <p:sp>
-        <p:nvSpPr>
-          <p:cNvPr id="35" name="Text 28"/>
-          <p:cNvSpPr/>
-          <p:nvPr/>
-        </p:nvSpPr>
-        <p:spPr>
-          <a:xfrm>
-            <a:off x="7187184" y="2331720"/>
-            <a:ext cx="4343400" cy="914400"/>
-          </a:xfrm>
-          <a:prstGeom prst="rect">
-            <a:avLst/>
-          </a:prstGeom>
-          <a:noFill/>
-          <a:ln/>
-        </p:spPr>
-        <p:txBody>
-          <a:bodyPr wrap="square" lIns="0" tIns="0" rIns="0" bIns="0" rtlCol="0" anchor="t"/>
-          <a:lstStyle/>
-          <a:p>
-            <a:pPr indent="0" marL="0">
-              <a:lnSpc>
-                <a:spcPct val="112000"/>
-              </a:lnSpc>
-              <a:buNone/>
-            </a:pPr>
-            <a:r>
-              <a:rPr lang="en-US" sz="1300" b="1" dirty="0">
-                <a:solidFill>
-                  <a:srgbClr val="E8EEF7"/>
-                </a:solidFill>
-                <a:latin typeface="Calibri" pitchFamily="34" charset="0"/>
-                <a:ea typeface="Calibri" pitchFamily="34" charset="-122"/>
-                <a:cs typeface="Calibri" pitchFamily="34" charset="-120"/>
-              </a:rPr>
-              <a:t>One login, whole network</a:t>
-            </a:r>
-            <a:endParaRPr lang="en-US" sz="1300" dirty="0"/>
-          </a:p>
-          <a:p>
-            <a:pPr indent="0" marL="0">
-              <a:lnSpc>
-                <a:spcPct val="112000"/>
-              </a:lnSpc>
-              <a:buNone/>
-            </a:pPr>
-            <a:r>
-              <a:rPr lang="en-US" sz="1100" dirty="0">
-                <a:solidFill>
-                  <a:srgbClr val="A9B7C9"/>
-                </a:solidFill>
-                <a:latin typeface="Calibri" pitchFamily="34" charset="0"/>
-                <a:ea typeface="Calibri" pitchFamily="34" charset="-122"/>
-                <a:cs typeface="Calibri" pitchFamily="34" charset="-120"/>
-              </a:rPr>
-              <a:t>Both vendors, 2G to 5G, in a single web platform.</a:t>
-            </a:r>
-            <a:endParaRPr lang="en-US" sz="1300" dirty="0"/>
-          </a:p>
-        </p:txBody>
-      </p:sp>
-      <p:pic>
-        <p:nvPicPr>
-          <p:cNvPr id="36" name="Image 5" descr="preencoded.png">    </p:cNvPr>
-          <p:cNvPicPr>
-            <a:picLocks noChangeAspect="1"/>
-          </p:cNvPicPr>
-          <p:nvPr/>
-        </p:nvPicPr>
-        <p:blipFill>
-          <a:blip r:embed="rId6"/>
-          <a:stretch>
-            <a:fillRect/>
-          </a:stretch>
-        </p:blipFill>
-        <p:spPr>
-          <a:xfrm>
-            <a:off x="6729984" y="3410712"/>
-            <a:ext cx="274320" cy="274320"/>
-          </a:xfrm>
-          <a:prstGeom prst="rect">
-            <a:avLst/>
-          </a:prstGeom>
-        </p:spPr>
-      </p:pic>
-      <p:sp>
-        <p:nvSpPr>
-          <p:cNvPr id="37" name="Text 29"/>
-          <p:cNvSpPr/>
-          <p:nvPr/>
-        </p:nvSpPr>
-        <p:spPr>
-          <a:xfrm>
-            <a:off x="7187184" y="3364992"/>
-            <a:ext cx="4343400" cy="914400"/>
-          </a:xfrm>
-          <a:prstGeom prst="rect">
-            <a:avLst/>
-          </a:prstGeom>
-          <a:noFill/>
-          <a:ln/>
-        </p:spPr>
-        <p:txBody>
-          <a:bodyPr wrap="square" lIns="0" tIns="0" rIns="0" bIns="0" rtlCol="0" anchor="t"/>
-          <a:lstStyle/>
-          <a:p>
-            <a:pPr indent="0" marL="0">
-              <a:lnSpc>
-                <a:spcPct val="112000"/>
-              </a:lnSpc>
-              <a:buNone/>
-            </a:pPr>
-            <a:r>
-              <a:rPr lang="en-US" sz="1300" b="1" dirty="0">
-                <a:solidFill>
-                  <a:srgbClr val="E8EEF7"/>
-                </a:solidFill>
-                <a:latin typeface="Calibri" pitchFamily="34" charset="0"/>
-                <a:ea typeface="Calibri" pitchFamily="34" charset="-122"/>
-                <a:cs typeface="Calibri" pitchFamily="34" charset="-120"/>
-              </a:rPr>
-              <a:t>Data arrives on its own</a:t>
-            </a:r>
-            <a:endParaRPr lang="en-US" sz="1300" dirty="0"/>
-          </a:p>
-          <a:p>
-            <a:pPr indent="0" marL="0">
-              <a:lnSpc>
-                <a:spcPct val="112000"/>
-              </a:lnSpc>
-              <a:buNone/>
-            </a:pPr>
-            <a:r>
-              <a:rPr lang="en-US" sz="1100" dirty="0">
-                <a:solidFill>
-                  <a:srgbClr val="A9B7C9"/>
-                </a:solidFill>
-                <a:latin typeface="Calibri" pitchFamily="34" charset="0"/>
-                <a:ea typeface="Calibri" pitchFamily="34" charset="-122"/>
-                <a:cs typeface="Calibri" pitchFamily="34" charset="-120"/>
-              </a:rPr>
-              <a:t>An automated pipeline loads network data around the clock.</a:t>
-            </a:r>
-            <a:endParaRPr lang="en-US" sz="1300" dirty="0"/>
-          </a:p>
-        </p:txBody>
-      </p:sp>
-      <p:pic>
-        <p:nvPicPr>
-          <p:cNvPr id="38" name="Image 6" descr="preencoded.png">    </p:cNvPr>
-          <p:cNvPicPr>
-            <a:picLocks noChangeAspect="1"/>
-          </p:cNvPicPr>
-          <p:nvPr/>
-        </p:nvPicPr>
-        <p:blipFill>
-          <a:blip r:embed="rId7"/>
-          <a:stretch>
-            <a:fillRect/>
-          </a:stretch>
-        </p:blipFill>
-        <p:spPr>
-          <a:xfrm>
-            <a:off x="6729984" y="4443984"/>
-            <a:ext cx="274320" cy="274320"/>
-          </a:xfrm>
-          <a:prstGeom prst="rect">
-            <a:avLst/>
-          </a:prstGeom>
-        </p:spPr>
-      </p:pic>
-      <p:sp>
-        <p:nvSpPr>
-          <p:cNvPr id="39" name="Text 30"/>
-          <p:cNvSpPr/>
-          <p:nvPr/>
-        </p:nvSpPr>
-        <p:spPr>
-          <a:xfrm>
-            <a:off x="7187184" y="4398264"/>
-            <a:ext cx="4343400" cy="914400"/>
-          </a:xfrm>
-          <a:prstGeom prst="rect">
-            <a:avLst/>
-          </a:prstGeom>
-          <a:noFill/>
-          <a:ln/>
-        </p:spPr>
-        <p:txBody>
-          <a:bodyPr wrap="square" lIns="0" tIns="0" rIns="0" bIns="0" rtlCol="0" anchor="t"/>
-          <a:lstStyle/>
-          <a:p>
-            <a:pPr indent="0" marL="0">
-              <a:lnSpc>
-                <a:spcPct val="112000"/>
-              </a:lnSpc>
-              <a:buNone/>
-            </a:pPr>
-            <a:r>
-              <a:rPr lang="en-US" sz="1300" b="1" dirty="0">
-                <a:solidFill>
-                  <a:srgbClr val="E8EEF7"/>
-                </a:solidFill>
-                <a:latin typeface="Calibri" pitchFamily="34" charset="0"/>
-                <a:ea typeface="Calibri" pitchFamily="34" charset="-122"/>
-                <a:cs typeface="Calibri" pitchFamily="34" charset="-120"/>
-              </a:rPr>
-              <a:t>Problems find us first</a:t>
-            </a:r>
-            <a:endParaRPr lang="en-US" sz="1300" dirty="0"/>
-          </a:p>
-          <a:p>
-            <a:pPr indent="0" marL="0">
-              <a:lnSpc>
-                <a:spcPct val="112000"/>
-              </a:lnSpc>
-              <a:buNone/>
-            </a:pPr>
-            <a:r>
-              <a:rPr lang="en-US" sz="1100" dirty="0">
-                <a:solidFill>
-                  <a:srgbClr val="A9B7C9"/>
-                </a:solidFill>
-                <a:latin typeface="Calibri" pitchFamily="34" charset="0"/>
-                <a:ea typeface="Calibri" pitchFamily="34" charset="-122"/>
-                <a:cs typeface="Calibri" pitchFamily="34" charset="-120"/>
-              </a:rPr>
-              <a:t>Sleeping-cell, overshooting and capacity detectors flag issues early.</a:t>
-            </a:r>
-            <a:endParaRPr lang="en-US" sz="1300" dirty="0"/>
-          </a:p>
-        </p:txBody>
-      </p:sp>
-      <p:pic>
-        <p:nvPicPr>
-          <p:cNvPr id="40" name="Image 7" descr="preencoded.png">    </p:cNvPr>
-          <p:cNvPicPr>
-            <a:picLocks noChangeAspect="1"/>
-          </p:cNvPicPr>
-          <p:nvPr/>
-        </p:nvPicPr>
-        <p:blipFill>
-          <a:blip r:embed="rId8"/>
-          <a:stretch>
-            <a:fillRect/>
-          </a:stretch>
-        </p:blipFill>
-        <p:spPr>
-          <a:xfrm>
-            <a:off x="6729984" y="5477256"/>
-            <a:ext cx="274320" cy="274320"/>
-          </a:xfrm>
-          <a:prstGeom prst="rect">
-            <a:avLst/>
-          </a:prstGeom>
-        </p:spPr>
-      </p:pic>
-      <p:sp>
-        <p:nvSpPr>
-          <p:cNvPr id="41" name="Text 31"/>
-          <p:cNvSpPr/>
-          <p:nvPr/>
-        </p:nvSpPr>
-        <p:spPr>
-          <a:xfrm>
-            <a:off x="7187184" y="5431536"/>
-            <a:ext cx="4343400" cy="914400"/>
-          </a:xfrm>
-          <a:prstGeom prst="rect">
-            <a:avLst/>
-          </a:prstGeom>
-          <a:noFill/>
-          <a:ln/>
-        </p:spPr>
-        <p:txBody>
-          <a:bodyPr wrap="square" lIns="0" tIns="0" rIns="0" bIns="0" rtlCol="0" anchor="t"/>
-          <a:lstStyle/>
-          <a:p>
-            <a:pPr indent="0" marL="0">
-              <a:lnSpc>
-                <a:spcPct val="112000"/>
-              </a:lnSpc>
-              <a:buNone/>
-            </a:pPr>
-            <a:r>
-              <a:rPr lang="en-US" sz="1300" b="1" dirty="0">
-                <a:solidFill>
-                  <a:srgbClr val="E8EEF7"/>
-                </a:solidFill>
-                <a:latin typeface="Calibri" pitchFamily="34" charset="0"/>
-                <a:ea typeface="Calibri" pitchFamily="34" charset="-122"/>
-                <a:cs typeface="Calibri" pitchFamily="34" charset="-120"/>
-              </a:rPr>
-              <a:t>Knowledge built into the tool</a:t>
-            </a:r>
-            <a:endParaRPr lang="en-US" sz="1300" dirty="0"/>
-          </a:p>
-          <a:p>
-            <a:pPr indent="0" marL="0">
-              <a:lnSpc>
-                <a:spcPct val="112000"/>
-              </a:lnSpc>
-              <a:buNone/>
-            </a:pPr>
-            <a:r>
-              <a:rPr lang="en-US" sz="1100" dirty="0">
-                <a:solidFill>
-                  <a:srgbClr val="A9B7C9"/>
-                </a:solidFill>
-                <a:latin typeface="Calibri" pitchFamily="34" charset="0"/>
-                <a:ea typeface="Calibri" pitchFamily="34" charset="-122"/>
-                <a:cs typeface="Calibri" pitchFamily="34" charset="-120"/>
-              </a:rPr>
-              <a:t>Parameter dictionaries and shared workflows, open to every engineer.</a:t>
-            </a:r>
-            <a:endParaRPr lang="en-US" sz="1300" dirty="0"/>
+            <a:endParaRPr lang="en-US" sz="1200" dirty="0"/>
           </a:p>
         </p:txBody>
       </p:sp>
@@ -4293,12 +4674,12 @@
         </p:nvSpPr>
         <p:spPr>
           <a:xfrm>
-            <a:off x="548640" y="1481328"/>
-            <a:ext cx="3520440" cy="1993392"/>
+            <a:off x="548640" y="1600200"/>
+            <a:ext cx="3520440" cy="2084832"/>
           </a:xfrm>
           <a:prstGeom prst="roundRect">
             <a:avLst>
-              <a:gd name="adj" fmla="val 4587"/>
+              <a:gd name="adj" fmla="val 4386"/>
             </a:avLst>
           </a:prstGeom>
           <a:solidFill>
@@ -4320,8 +4701,8 @@
         </p:nvSpPr>
         <p:spPr>
           <a:xfrm>
-            <a:off x="822960" y="1645920"/>
-            <a:ext cx="2971800" cy="685800"/>
+            <a:off x="822960" y="1874520"/>
+            <a:ext cx="2971800" cy="914400"/>
           </a:xfrm>
           <a:prstGeom prst="rect">
             <a:avLst/>
@@ -4337,7 +4718,7 @@
               <a:buNone/>
             </a:pPr>
             <a:r>
-              <a:rPr lang="en-US" sz="3800" b="1" dirty="0">
+              <a:rPr lang="en-US" sz="4800" b="1" dirty="0">
                 <a:solidFill>
                   <a:srgbClr val="38BDF8"/>
                 </a:solidFill>
@@ -4347,7 +4728,7 @@
               </a:rPr>
               <a:t>40+</a:t>
             </a:r>
-            <a:endParaRPr lang="en-US" sz="3800" dirty="0"/>
+            <a:endParaRPr lang="en-US" sz="4800" dirty="0"/>
           </a:p>
         </p:txBody>
       </p:sp>
@@ -4359,8 +4740,8 @@
         </p:nvSpPr>
         <p:spPr>
           <a:xfrm>
-            <a:off x="822960" y="2350008"/>
-            <a:ext cx="2971800" cy="292608"/>
+            <a:off x="822960" y="2926080"/>
+            <a:ext cx="2971800" cy="365760"/>
           </a:xfrm>
           <a:prstGeom prst="rect">
             <a:avLst/>
@@ -4376,7 +4757,7 @@
               <a:buNone/>
             </a:pPr>
             <a:r>
-              <a:rPr lang="en-US" sz="1350" b="1" dirty="0">
+              <a:rPr lang="en-US" sz="1500" b="1" dirty="0">
                 <a:solidFill>
                   <a:srgbClr val="E8EEF7"/>
                 </a:solidFill>
@@ -4384,68 +4765,26 @@
                 <a:ea typeface="Calibri" pitchFamily="34" charset="-122"/>
                 <a:cs typeface="Calibri" pitchFamily="34" charset="-120"/>
               </a:rPr>
-              <a:t>analysis modules</a:t>
+              <a:t>analysis tools</a:t>
             </a:r>
-            <a:endParaRPr lang="en-US" sz="1350" dirty="0"/>
-          </a:p>
-        </p:txBody>
-      </p:sp>
-      <p:sp>
-        <p:nvSpPr>
-          <p:cNvPr id="22" name="Text 20"/>
-          <p:cNvSpPr/>
-          <p:nvPr/>
-        </p:nvSpPr>
-        <p:spPr>
-          <a:xfrm>
-            <a:off x="822960" y="2670048"/>
-            <a:ext cx="2971800" cy="685800"/>
-          </a:xfrm>
-          <a:prstGeom prst="rect">
-            <a:avLst/>
-          </a:prstGeom>
-          <a:noFill/>
-          <a:ln/>
-        </p:spPr>
-        <p:txBody>
-          <a:bodyPr wrap="square" lIns="0" tIns="0" rIns="0" bIns="0" rtlCol="0" anchor="ctr"/>
-          <a:lstStyle/>
-          <a:p>
-            <a:pPr indent="0" marL="0">
-              <a:lnSpc>
-                <a:spcPct val="110000"/>
-              </a:lnSpc>
-              <a:buNone/>
-            </a:pPr>
-            <a:r>
-              <a:rPr lang="en-US" sz="1050" dirty="0">
-                <a:solidFill>
-                  <a:srgbClr val="A9B7C9"/>
-                </a:solidFill>
-                <a:latin typeface="Calibri" pitchFamily="34" charset="0"/>
-                <a:ea typeface="Calibri" pitchFamily="34" charset="-122"/>
-                <a:cs typeface="Calibri" pitchFamily="34" charset="-120"/>
-              </a:rPr>
-              <a:t>Dashboards, detectors, optimizers and extractors — behind one secure login.</a:t>
-            </a:r>
-            <a:endParaRPr lang="en-US" sz="1050" dirty="0"/>
-          </a:p>
-        </p:txBody>
-      </p:sp>
-      <p:sp>
-        <p:nvSpPr>
-          <p:cNvPr id="23" name="Shape 21"/>
-          <p:cNvSpPr/>
-          <p:nvPr/>
-        </p:nvSpPr>
-        <p:spPr>
-          <a:xfrm>
-            <a:off x="4334256" y="1481328"/>
-            <a:ext cx="3520440" cy="1993392"/>
+            <a:endParaRPr lang="en-US" sz="1500" dirty="0"/>
+          </a:p>
+        </p:txBody>
+      </p:sp>
+      <p:sp>
+        <p:nvSpPr>
+          <p:cNvPr id="22" name="Shape 20"/>
+          <p:cNvSpPr/>
+          <p:nvPr/>
+        </p:nvSpPr>
+        <p:spPr>
+          <a:xfrm>
+            <a:off x="4334256" y="1600200"/>
+            <a:ext cx="3520440" cy="2084832"/>
           </a:xfrm>
           <a:prstGeom prst="roundRect">
             <a:avLst>
-              <a:gd name="adj" fmla="val 4587"/>
+              <a:gd name="adj" fmla="val 4386"/>
             </a:avLst>
           </a:prstGeom>
           <a:solidFill>
@@ -4461,14 +4800,14 @@
       </p:sp>
       <p:sp>
         <p:nvSpPr>
-          <p:cNvPr id="24" name="Text 22"/>
-          <p:cNvSpPr/>
-          <p:nvPr/>
-        </p:nvSpPr>
-        <p:spPr>
-          <a:xfrm>
-            <a:off x="4608576" y="1645920"/>
-            <a:ext cx="2971800" cy="685800"/>
+          <p:cNvPr id="23" name="Text 21"/>
+          <p:cNvSpPr/>
+          <p:nvPr/>
+        </p:nvSpPr>
+        <p:spPr>
+          <a:xfrm>
+            <a:off x="4608576" y="1874520"/>
+            <a:ext cx="2971800" cy="914400"/>
           </a:xfrm>
           <a:prstGeom prst="rect">
             <a:avLst/>
@@ -4484,7 +4823,7 @@
               <a:buNone/>
             </a:pPr>
             <a:r>
-              <a:rPr lang="en-US" sz="3800" b="1" dirty="0">
+              <a:rPr lang="en-US" sz="4800" b="1" dirty="0">
                 <a:solidFill>
                   <a:srgbClr val="38BDF8"/>
                 </a:solidFill>
@@ -4494,20 +4833,20 @@
               </a:rPr>
               <a:t>2</a:t>
             </a:r>
-            <a:endParaRPr lang="en-US" sz="3800" dirty="0"/>
-          </a:p>
-        </p:txBody>
-      </p:sp>
-      <p:sp>
-        <p:nvSpPr>
-          <p:cNvPr id="25" name="Text 23"/>
-          <p:cNvSpPr/>
-          <p:nvPr/>
-        </p:nvSpPr>
-        <p:spPr>
-          <a:xfrm>
-            <a:off x="4608576" y="2350008"/>
-            <a:ext cx="2971800" cy="292608"/>
+            <a:endParaRPr lang="en-US" sz="4800" dirty="0"/>
+          </a:p>
+        </p:txBody>
+      </p:sp>
+      <p:sp>
+        <p:nvSpPr>
+          <p:cNvPr id="24" name="Text 22"/>
+          <p:cNvSpPr/>
+          <p:nvPr/>
+        </p:nvSpPr>
+        <p:spPr>
+          <a:xfrm>
+            <a:off x="4608576" y="2926080"/>
+            <a:ext cx="2971800" cy="365760"/>
           </a:xfrm>
           <a:prstGeom prst="rect">
             <a:avLst/>
@@ -4523,7 +4862,7 @@
               <a:buNone/>
             </a:pPr>
             <a:r>
-              <a:rPr lang="en-US" sz="1350" b="1" dirty="0">
+              <a:rPr lang="en-US" sz="1500" b="1" dirty="0">
                 <a:solidFill>
                   <a:srgbClr val="E8EEF7"/>
                 </a:solidFill>
@@ -4533,66 +4872,24 @@
               </a:rPr>
               <a:t>vendors, one view</a:t>
             </a:r>
-            <a:endParaRPr lang="en-US" sz="1350" dirty="0"/>
-          </a:p>
-        </p:txBody>
-      </p:sp>
-      <p:sp>
-        <p:nvSpPr>
-          <p:cNvPr id="26" name="Text 24"/>
-          <p:cNvSpPr/>
-          <p:nvPr/>
-        </p:nvSpPr>
-        <p:spPr>
-          <a:xfrm>
-            <a:off x="4608576" y="2670048"/>
-            <a:ext cx="2971800" cy="685800"/>
-          </a:xfrm>
-          <a:prstGeom prst="rect">
-            <a:avLst/>
-          </a:prstGeom>
-          <a:noFill/>
-          <a:ln/>
-        </p:spPr>
-        <p:txBody>
-          <a:bodyPr wrap="square" lIns="0" tIns="0" rIns="0" bIns="0" rtlCol="0" anchor="ctr"/>
-          <a:lstStyle/>
-          <a:p>
-            <a:pPr indent="0" marL="0">
-              <a:lnSpc>
-                <a:spcPct val="110000"/>
-              </a:lnSpc>
-              <a:buNone/>
-            </a:pPr>
-            <a:r>
-              <a:rPr lang="en-US" sz="1050" dirty="0">
-                <a:solidFill>
-                  <a:srgbClr val="A9B7C9"/>
-                </a:solidFill>
-                <a:latin typeface="Calibri" pitchFamily="34" charset="0"/>
-                <a:ea typeface="Calibri" pitchFamily="34" charset="-122"/>
-                <a:cs typeface="Calibri" pitchFamily="34" charset="-120"/>
-              </a:rPr>
-              <a:t>Nokia and Huawei counters translated into the same KPI language.</a:t>
-            </a:r>
-            <a:endParaRPr lang="en-US" sz="1050" dirty="0"/>
-          </a:p>
-        </p:txBody>
-      </p:sp>
-      <p:sp>
-        <p:nvSpPr>
-          <p:cNvPr id="27" name="Shape 25"/>
-          <p:cNvSpPr/>
-          <p:nvPr/>
-        </p:nvSpPr>
-        <p:spPr>
-          <a:xfrm>
-            <a:off x="8119872" y="1481328"/>
-            <a:ext cx="3520440" cy="1993392"/>
+            <a:endParaRPr lang="en-US" sz="1500" dirty="0"/>
+          </a:p>
+        </p:txBody>
+      </p:sp>
+      <p:sp>
+        <p:nvSpPr>
+          <p:cNvPr id="25" name="Shape 23"/>
+          <p:cNvSpPr/>
+          <p:nvPr/>
+        </p:nvSpPr>
+        <p:spPr>
+          <a:xfrm>
+            <a:off x="8119872" y="1600200"/>
+            <a:ext cx="3520440" cy="2084832"/>
           </a:xfrm>
           <a:prstGeom prst="roundRect">
             <a:avLst>
-              <a:gd name="adj" fmla="val 4587"/>
+              <a:gd name="adj" fmla="val 4386"/>
             </a:avLst>
           </a:prstGeom>
           <a:solidFill>
@@ -4608,14 +4905,14 @@
       </p:sp>
       <p:sp>
         <p:nvSpPr>
-          <p:cNvPr id="28" name="Text 26"/>
-          <p:cNvSpPr/>
-          <p:nvPr/>
-        </p:nvSpPr>
-        <p:spPr>
-          <a:xfrm>
-            <a:off x="8394192" y="1645920"/>
-            <a:ext cx="2971800" cy="685800"/>
+          <p:cNvPr id="26" name="Text 24"/>
+          <p:cNvSpPr/>
+          <p:nvPr/>
+        </p:nvSpPr>
+        <p:spPr>
+          <a:xfrm>
+            <a:off x="8394192" y="1874520"/>
+            <a:ext cx="2971800" cy="914400"/>
           </a:xfrm>
           <a:prstGeom prst="rect">
             <a:avLst/>
@@ -4631,7 +4928,7 @@
               <a:buNone/>
             </a:pPr>
             <a:r>
-              <a:rPr lang="en-US" sz="3800" b="1" dirty="0">
+              <a:rPr lang="en-US" sz="4800" b="1" dirty="0">
                 <a:solidFill>
                   <a:srgbClr val="38BDF8"/>
                 </a:solidFill>
@@ -4641,20 +4938,20 @@
               </a:rPr>
               <a:t>2G–5G</a:t>
             </a:r>
-            <a:endParaRPr lang="en-US" sz="3800" dirty="0"/>
-          </a:p>
-        </p:txBody>
-      </p:sp>
-      <p:sp>
-        <p:nvSpPr>
-          <p:cNvPr id="29" name="Text 27"/>
-          <p:cNvSpPr/>
-          <p:nvPr/>
-        </p:nvSpPr>
-        <p:spPr>
-          <a:xfrm>
-            <a:off x="8394192" y="2350008"/>
-            <a:ext cx="2971800" cy="292608"/>
+            <a:endParaRPr lang="en-US" sz="4800" dirty="0"/>
+          </a:p>
+        </p:txBody>
+      </p:sp>
+      <p:sp>
+        <p:nvSpPr>
+          <p:cNvPr id="27" name="Text 25"/>
+          <p:cNvSpPr/>
+          <p:nvPr/>
+        </p:nvSpPr>
+        <p:spPr>
+          <a:xfrm>
+            <a:off x="8394192" y="2926080"/>
+            <a:ext cx="2971800" cy="365760"/>
           </a:xfrm>
           <a:prstGeom prst="rect">
             <a:avLst/>
@@ -4670,7 +4967,7 @@
               <a:buNone/>
             </a:pPr>
             <a:r>
-              <a:rPr lang="en-US" sz="1350" b="1" dirty="0">
+              <a:rPr lang="en-US" sz="1500" b="1" dirty="0">
                 <a:solidFill>
                   <a:srgbClr val="E8EEF7"/>
                 </a:solidFill>
@@ -4680,66 +4977,24 @@
               </a:rPr>
               <a:t>every generation</a:t>
             </a:r>
-            <a:endParaRPr lang="en-US" sz="1350" dirty="0"/>
-          </a:p>
-        </p:txBody>
-      </p:sp>
-      <p:sp>
-        <p:nvSpPr>
-          <p:cNvPr id="30" name="Text 28"/>
-          <p:cNvSpPr/>
-          <p:nvPr/>
-        </p:nvSpPr>
-        <p:spPr>
-          <a:xfrm>
-            <a:off x="8394192" y="2670048"/>
-            <a:ext cx="2971800" cy="685800"/>
-          </a:xfrm>
-          <a:prstGeom prst="rect">
-            <a:avLst/>
-          </a:prstGeom>
-          <a:noFill/>
-          <a:ln/>
-        </p:spPr>
-        <p:txBody>
-          <a:bodyPr wrap="square" lIns="0" tIns="0" rIns="0" bIns="0" rtlCol="0" anchor="ctr"/>
-          <a:lstStyle/>
-          <a:p>
-            <a:pPr indent="0" marL="0">
-              <a:lnSpc>
-                <a:spcPct val="110000"/>
-              </a:lnSpc>
-              <a:buNone/>
-            </a:pPr>
-            <a:r>
-              <a:rPr lang="en-US" sz="1050" dirty="0">
-                <a:solidFill>
-                  <a:srgbClr val="A9B7C9"/>
-                </a:solidFill>
-                <a:latin typeface="Calibri" pitchFamily="34" charset="0"/>
-                <a:ea typeface="Calibri" pitchFamily="34" charset="-122"/>
-                <a:cs typeface="Calibri" pitchFamily="34" charset="-120"/>
-              </a:rPr>
-              <a:t>One filter set and one workflow across the whole radio estate.</a:t>
-            </a:r>
-            <a:endParaRPr lang="en-US" sz="1050" dirty="0"/>
-          </a:p>
-        </p:txBody>
-      </p:sp>
-      <p:sp>
-        <p:nvSpPr>
-          <p:cNvPr id="31" name="Shape 29"/>
-          <p:cNvSpPr/>
-          <p:nvPr/>
-        </p:nvSpPr>
-        <p:spPr>
-          <a:xfrm>
-            <a:off x="548640" y="3730752"/>
-            <a:ext cx="3520440" cy="1993392"/>
+            <a:endParaRPr lang="en-US" sz="1500" dirty="0"/>
+          </a:p>
+        </p:txBody>
+      </p:sp>
+      <p:sp>
+        <p:nvSpPr>
+          <p:cNvPr id="28" name="Shape 26"/>
+          <p:cNvSpPr/>
+          <p:nvPr/>
+        </p:nvSpPr>
+        <p:spPr>
+          <a:xfrm>
+            <a:off x="548640" y="3977640"/>
+            <a:ext cx="3520440" cy="2084832"/>
           </a:xfrm>
           <a:prstGeom prst="roundRect">
             <a:avLst>
-              <a:gd name="adj" fmla="val 4587"/>
+              <a:gd name="adj" fmla="val 4386"/>
             </a:avLst>
           </a:prstGeom>
           <a:solidFill>
@@ -4755,14 +5010,14 @@
       </p:sp>
       <p:sp>
         <p:nvSpPr>
-          <p:cNvPr id="32" name="Text 30"/>
-          <p:cNvSpPr/>
-          <p:nvPr/>
-        </p:nvSpPr>
-        <p:spPr>
-          <a:xfrm>
-            <a:off x="822960" y="3895344"/>
-            <a:ext cx="2971800" cy="685800"/>
+          <p:cNvPr id="29" name="Text 27"/>
+          <p:cNvSpPr/>
+          <p:nvPr/>
+        </p:nvSpPr>
+        <p:spPr>
+          <a:xfrm>
+            <a:off x="822960" y="4251960"/>
+            <a:ext cx="2971800" cy="914400"/>
           </a:xfrm>
           <a:prstGeom prst="rect">
             <a:avLst/>
@@ -4778,7 +5033,7 @@
               <a:buNone/>
             </a:pPr>
             <a:r>
-              <a:rPr lang="en-US" sz="3800" b="1" dirty="0">
+              <a:rPr lang="en-US" sz="4800" b="1" dirty="0">
                 <a:solidFill>
                   <a:srgbClr val="38BDF8"/>
                 </a:solidFill>
@@ -4788,20 +5043,20 @@
               </a:rPr>
               <a:t>24/7</a:t>
             </a:r>
-            <a:endParaRPr lang="en-US" sz="3800" dirty="0"/>
-          </a:p>
-        </p:txBody>
-      </p:sp>
-      <p:sp>
-        <p:nvSpPr>
-          <p:cNvPr id="33" name="Text 31"/>
-          <p:cNvSpPr/>
-          <p:nvPr/>
-        </p:nvSpPr>
-        <p:spPr>
-          <a:xfrm>
-            <a:off x="822960" y="4599432"/>
-            <a:ext cx="2971800" cy="292608"/>
+            <a:endParaRPr lang="en-US" sz="4800" dirty="0"/>
+          </a:p>
+        </p:txBody>
+      </p:sp>
+      <p:sp>
+        <p:nvSpPr>
+          <p:cNvPr id="30" name="Text 28"/>
+          <p:cNvSpPr/>
+          <p:nvPr/>
+        </p:nvSpPr>
+        <p:spPr>
+          <a:xfrm>
+            <a:off x="822960" y="5303520"/>
+            <a:ext cx="2971800" cy="365760"/>
           </a:xfrm>
           <a:prstGeom prst="rect">
             <a:avLst/>
@@ -4817,7 +5072,7 @@
               <a:buNone/>
             </a:pPr>
             <a:r>
-              <a:rPr lang="en-US" sz="1350" b="1" dirty="0">
+              <a:rPr lang="en-US" sz="1500" b="1" dirty="0">
                 <a:solidFill>
                   <a:srgbClr val="E8EEF7"/>
                 </a:solidFill>
@@ -4825,68 +5080,26 @@
                 <a:ea typeface="Calibri" pitchFamily="34" charset="-122"/>
                 <a:cs typeface="Calibri" pitchFamily="34" charset="-120"/>
               </a:rPr>
-              <a:t>automated pipeline</a:t>
+              <a:t>automated data</a:t>
             </a:r>
-            <a:endParaRPr lang="en-US" sz="1350" dirty="0"/>
-          </a:p>
-        </p:txBody>
-      </p:sp>
-      <p:sp>
-        <p:nvSpPr>
-          <p:cNvPr id="34" name="Text 32"/>
-          <p:cNvSpPr/>
-          <p:nvPr/>
-        </p:nvSpPr>
-        <p:spPr>
-          <a:xfrm>
-            <a:off x="822960" y="4919472"/>
-            <a:ext cx="2971800" cy="685800"/>
-          </a:xfrm>
-          <a:prstGeom prst="rect">
-            <a:avLst/>
-          </a:prstGeom>
-          <a:noFill/>
-          <a:ln/>
-        </p:spPr>
-        <p:txBody>
-          <a:bodyPr wrap="square" lIns="0" tIns="0" rIns="0" bIns="0" rtlCol="0" anchor="ctr"/>
-          <a:lstStyle/>
-          <a:p>
-            <a:pPr indent="0" marL="0">
-              <a:lnSpc>
-                <a:spcPct val="110000"/>
-              </a:lnSpc>
-              <a:buNone/>
-            </a:pPr>
-            <a:r>
-              <a:rPr lang="en-US" sz="1050" dirty="0">
-                <a:solidFill>
-                  <a:srgbClr val="A9B7C9"/>
-                </a:solidFill>
-                <a:latin typeface="Calibri" pitchFamily="34" charset="0"/>
-                <a:ea typeface="Calibri" pitchFamily="34" charset="-122"/>
-                <a:cs typeface="Calibri" pitchFamily="34" charset="-120"/>
-              </a:rPr>
-              <a:t>Hourly and daily network data loads itself — no manual collection.</a:t>
-            </a:r>
-            <a:endParaRPr lang="en-US" sz="1050" dirty="0"/>
-          </a:p>
-        </p:txBody>
-      </p:sp>
-      <p:sp>
-        <p:nvSpPr>
-          <p:cNvPr id="35" name="Shape 33"/>
-          <p:cNvSpPr/>
-          <p:nvPr/>
-        </p:nvSpPr>
-        <p:spPr>
-          <a:xfrm>
-            <a:off x="4334256" y="3730752"/>
-            <a:ext cx="3520440" cy="1993392"/>
+            <a:endParaRPr lang="en-US" sz="1500" dirty="0"/>
+          </a:p>
+        </p:txBody>
+      </p:sp>
+      <p:sp>
+        <p:nvSpPr>
+          <p:cNvPr id="31" name="Shape 29"/>
+          <p:cNvSpPr/>
+          <p:nvPr/>
+        </p:nvSpPr>
+        <p:spPr>
+          <a:xfrm>
+            <a:off x="4334256" y="3977640"/>
+            <a:ext cx="3520440" cy="2084832"/>
           </a:xfrm>
           <a:prstGeom prst="roundRect">
             <a:avLst>
-              <a:gd name="adj" fmla="val 4587"/>
+              <a:gd name="adj" fmla="val 4386"/>
             </a:avLst>
           </a:prstGeom>
           <a:solidFill>
@@ -4902,14 +5115,14 @@
       </p:sp>
       <p:sp>
         <p:nvSpPr>
-          <p:cNvPr id="36" name="Text 34"/>
-          <p:cNvSpPr/>
-          <p:nvPr/>
-        </p:nvSpPr>
-        <p:spPr>
-          <a:xfrm>
-            <a:off x="4608576" y="3895344"/>
-            <a:ext cx="2971800" cy="685800"/>
+          <p:cNvPr id="32" name="Text 30"/>
+          <p:cNvSpPr/>
+          <p:nvPr/>
+        </p:nvSpPr>
+        <p:spPr>
+          <a:xfrm>
+            <a:off x="4608576" y="4251960"/>
+            <a:ext cx="2971800" cy="914400"/>
           </a:xfrm>
           <a:prstGeom prst="rect">
             <a:avLst/>
@@ -4925,7 +5138,7 @@
               <a:buNone/>
             </a:pPr>
             <a:r>
-              <a:rPr lang="en-US" sz="3800" b="1" dirty="0">
+              <a:rPr lang="en-US" sz="4800" b="1" dirty="0">
                 <a:solidFill>
                   <a:srgbClr val="38BDF8"/>
                 </a:solidFill>
@@ -4935,20 +5148,20 @@
               </a:rPr>
               <a:t>19k+</a:t>
             </a:r>
-            <a:endParaRPr lang="en-US" sz="3800" dirty="0"/>
-          </a:p>
-        </p:txBody>
-      </p:sp>
-      <p:sp>
-        <p:nvSpPr>
-          <p:cNvPr id="37" name="Text 35"/>
-          <p:cNvSpPr/>
-          <p:nvPr/>
-        </p:nvSpPr>
-        <p:spPr>
-          <a:xfrm>
-            <a:off x="4608576" y="4599432"/>
-            <a:ext cx="2971800" cy="292608"/>
+            <a:endParaRPr lang="en-US" sz="4800" dirty="0"/>
+          </a:p>
+        </p:txBody>
+      </p:sp>
+      <p:sp>
+        <p:nvSpPr>
+          <p:cNvPr id="33" name="Text 31"/>
+          <p:cNvSpPr/>
+          <p:nvPr/>
+        </p:nvSpPr>
+        <p:spPr>
+          <a:xfrm>
+            <a:off x="4608576" y="5303520"/>
+            <a:ext cx="2971800" cy="365760"/>
           </a:xfrm>
           <a:prstGeom prst="rect">
             <a:avLst/>
@@ -4964,7 +5177,7 @@
               <a:buNone/>
             </a:pPr>
             <a:r>
-              <a:rPr lang="en-US" sz="1350" b="1" dirty="0">
+              <a:rPr lang="en-US" sz="1500" b="1" dirty="0">
                 <a:solidFill>
                   <a:srgbClr val="E8EEF7"/>
                 </a:solidFill>
@@ -4974,66 +5187,24 @@
               </a:rPr>
               <a:t>parameter references</a:t>
             </a:r>
-            <a:endParaRPr lang="en-US" sz="1350" dirty="0"/>
-          </a:p>
-        </p:txBody>
-      </p:sp>
-      <p:sp>
-        <p:nvSpPr>
-          <p:cNvPr id="38" name="Text 36"/>
-          <p:cNvSpPr/>
-          <p:nvPr/>
-        </p:nvSpPr>
-        <p:spPr>
-          <a:xfrm>
-            <a:off x="4608576" y="4919472"/>
-            <a:ext cx="2971800" cy="685800"/>
-          </a:xfrm>
-          <a:prstGeom prst="rect">
-            <a:avLst/>
-          </a:prstGeom>
-          <a:noFill/>
-          <a:ln/>
-        </p:spPr>
-        <p:txBody>
-          <a:bodyPr wrap="square" lIns="0" tIns="0" rIns="0" bIns="0" rtlCol="0" anchor="ctr"/>
-          <a:lstStyle/>
-          <a:p>
-            <a:pPr indent="0" marL="0">
-              <a:lnSpc>
-                <a:spcPct val="110000"/>
-              </a:lnSpc>
-              <a:buNone/>
-            </a:pPr>
-            <a:r>
-              <a:rPr lang="en-US" sz="1050" dirty="0">
-                <a:solidFill>
-                  <a:srgbClr val="A9B7C9"/>
-                </a:solidFill>
-                <a:latin typeface="Calibri" pitchFamily="34" charset="0"/>
-                <a:ea typeface="Calibri" pitchFamily="34" charset="-122"/>
-                <a:cs typeface="Calibri" pitchFamily="34" charset="-120"/>
-              </a:rPr>
-              <a:t>Vendor knowledge searchable in seconds, not buried in manuals.</a:t>
-            </a:r>
-            <a:endParaRPr lang="en-US" sz="1050" dirty="0"/>
-          </a:p>
-        </p:txBody>
-      </p:sp>
-      <p:sp>
-        <p:nvSpPr>
-          <p:cNvPr id="39" name="Shape 37"/>
-          <p:cNvSpPr/>
-          <p:nvPr/>
-        </p:nvSpPr>
-        <p:spPr>
-          <a:xfrm>
-            <a:off x="8119872" y="3730752"/>
-            <a:ext cx="3520440" cy="1993392"/>
+            <a:endParaRPr lang="en-US" sz="1500" dirty="0"/>
+          </a:p>
+        </p:txBody>
+      </p:sp>
+      <p:sp>
+        <p:nvSpPr>
+          <p:cNvPr id="34" name="Shape 32"/>
+          <p:cNvSpPr/>
+          <p:nvPr/>
+        </p:nvSpPr>
+        <p:spPr>
+          <a:xfrm>
+            <a:off x="8119872" y="3977640"/>
+            <a:ext cx="3520440" cy="2084832"/>
           </a:xfrm>
           <a:prstGeom prst="roundRect">
             <a:avLst>
-              <a:gd name="adj" fmla="val 4587"/>
+              <a:gd name="adj" fmla="val 4386"/>
             </a:avLst>
           </a:prstGeom>
           <a:solidFill>
@@ -5049,14 +5220,14 @@
       </p:sp>
       <p:sp>
         <p:nvSpPr>
-          <p:cNvPr id="40" name="Text 38"/>
-          <p:cNvSpPr/>
-          <p:nvPr/>
-        </p:nvSpPr>
-        <p:spPr>
-          <a:xfrm>
-            <a:off x="8394192" y="3895344"/>
-            <a:ext cx="2971800" cy="685800"/>
+          <p:cNvPr id="35" name="Text 33"/>
+          <p:cNvSpPr/>
+          <p:nvPr/>
+        </p:nvSpPr>
+        <p:spPr>
+          <a:xfrm>
+            <a:off x="8394192" y="4251960"/>
+            <a:ext cx="2971800" cy="914400"/>
           </a:xfrm>
           <a:prstGeom prst="rect">
             <a:avLst/>
@@ -5072,7 +5243,7 @@
               <a:buNone/>
             </a:pPr>
             <a:r>
-              <a:rPr lang="en-US" sz="3800" b="1" dirty="0">
+              <a:rPr lang="en-US" sz="4800" b="1" dirty="0">
                 <a:solidFill>
                   <a:srgbClr val="38BDF8"/>
                 </a:solidFill>
@@ -5082,20 +5253,20 @@
               </a:rPr>
               <a:t>1</a:t>
             </a:r>
-            <a:endParaRPr lang="en-US" sz="3800" dirty="0"/>
-          </a:p>
-        </p:txBody>
-      </p:sp>
-      <p:sp>
-        <p:nvSpPr>
-          <p:cNvPr id="41" name="Text 39"/>
-          <p:cNvSpPr/>
-          <p:nvPr/>
-        </p:nvSpPr>
-        <p:spPr>
-          <a:xfrm>
-            <a:off x="8394192" y="4599432"/>
-            <a:ext cx="2971800" cy="292608"/>
+            <a:endParaRPr lang="en-US" sz="4800" dirty="0"/>
+          </a:p>
+        </p:txBody>
+      </p:sp>
+      <p:sp>
+        <p:nvSpPr>
+          <p:cNvPr id="36" name="Text 34"/>
+          <p:cNvSpPr/>
+          <p:nvPr/>
+        </p:nvSpPr>
+        <p:spPr>
+          <a:xfrm>
+            <a:off x="8394192" y="5303520"/>
+            <a:ext cx="2971800" cy="365760"/>
           </a:xfrm>
           <a:prstGeom prst="rect">
             <a:avLst/>
@@ -5111,7 +5282,7 @@
               <a:buNone/>
             </a:pPr>
             <a:r>
-              <a:rPr lang="en-US" sz="1350" b="1" dirty="0">
+              <a:rPr lang="en-US" sz="1500" b="1" dirty="0">
                 <a:solidFill>
                   <a:srgbClr val="E8EEF7"/>
                 </a:solidFill>
@@ -5121,88 +5292,7 @@
               </a:rPr>
               <a:t>source of truth</a:t>
             </a:r>
-            <a:endParaRPr lang="en-US" sz="1350" dirty="0"/>
-          </a:p>
-        </p:txBody>
-      </p:sp>
-      <p:sp>
-        <p:nvSpPr>
-          <p:cNvPr id="42" name="Text 40"/>
-          <p:cNvSpPr/>
-          <p:nvPr/>
-        </p:nvSpPr>
-        <p:spPr>
-          <a:xfrm>
-            <a:off x="8394192" y="4919472"/>
-            <a:ext cx="2971800" cy="685800"/>
-          </a:xfrm>
-          <a:prstGeom prst="rect">
-            <a:avLst/>
-          </a:prstGeom>
-          <a:noFill/>
-          <a:ln/>
-        </p:spPr>
-        <p:txBody>
-          <a:bodyPr wrap="square" lIns="0" tIns="0" rIns="0" bIns="0" rtlCol="0" anchor="ctr"/>
-          <a:lstStyle/>
-          <a:p>
-            <a:pPr indent="0" marL="0">
-              <a:lnSpc>
-                <a:spcPct val="110000"/>
-              </a:lnSpc>
-              <a:buNone/>
-            </a:pPr>
-            <a:r>
-              <a:rPr lang="en-US" sz="1050" dirty="0">
-                <a:solidFill>
-                  <a:srgbClr val="A9B7C9"/>
-                </a:solidFill>
-                <a:latin typeface="Calibri" pitchFamily="34" charset="0"/>
-                <a:ea typeface="Calibri" pitchFamily="34" charset="-122"/>
-                <a:cs typeface="Calibri" pitchFamily="34" charset="-120"/>
-              </a:rPr>
-              <a:t>Every team quotes the same number, from the same place.</a:t>
-            </a:r>
-            <a:endParaRPr lang="en-US" sz="1050" dirty="0"/>
-          </a:p>
-        </p:txBody>
-      </p:sp>
-      <p:sp>
-        <p:nvSpPr>
-          <p:cNvPr id="43" name="Text 41"/>
-          <p:cNvSpPr/>
-          <p:nvPr/>
-        </p:nvSpPr>
-        <p:spPr>
-          <a:xfrm>
-            <a:off x="548640" y="6108192"/>
-            <a:ext cx="11064240" cy="320040"/>
-          </a:xfrm>
-          <a:prstGeom prst="rect">
-            <a:avLst/>
-          </a:prstGeom>
-          <a:noFill/>
-          <a:ln/>
-        </p:spPr>
-        <p:txBody>
-          <a:bodyPr wrap="square" lIns="0" tIns="0" rIns="0" bIns="0" rtlCol="0" anchor="ctr"/>
-          <a:lstStyle/>
-          <a:p>
-            <a:pPr indent="0" marL="0">
-              <a:buNone/>
-            </a:pPr>
-            <a:r>
-              <a:rPr lang="en-US" sz="1150" i="1" dirty="0">
-                <a:solidFill>
-                  <a:srgbClr val="8BC1FF"/>
-                </a:solidFill>
-                <a:latin typeface="Calibri" pitchFamily="34" charset="0"/>
-                <a:ea typeface="Calibri" pitchFamily="34" charset="-122"/>
-                <a:cs typeface="Calibri" pitchFamily="34" charset="-120"/>
-              </a:rPr>
-              <a:t>Plus: live configuration extraction from the network, remote antenna control (RET), automated morning reports, and full audit trails — in the same platform.</a:t>
-            </a:r>
-            <a:endParaRPr lang="en-US" sz="1150" dirty="0"/>
+            <a:endParaRPr lang="en-US" sz="1500" dirty="0"/>
           </a:p>
         </p:txBody>
       </p:sp>
@@ -5648,7 +5738,7 @@
                 <a:ea typeface="Calibri" pitchFamily="34" charset="-122"/>
                 <a:cs typeface="Calibri" pitchFamily="34" charset="-120"/>
               </a:rPr>
-              <a:t>Faster answers, earlier warnings, lower cost</a:t>
+              <a:t>One KPI view: hours, down to minutes</a:t>
             </a:r>
             <a:endParaRPr lang="en-US" sz="2800" dirty="0"/>
           </a:p>
@@ -5656,21 +5746,221 @@
       </p:sp>
       <p:sp>
         <p:nvSpPr>
-          <p:cNvPr id="19" name="Shape 17"/>
-          <p:cNvSpPr/>
-          <p:nvPr/>
-        </p:nvSpPr>
-        <p:spPr>
-          <a:xfrm>
-            <a:off x="548640" y="1481328"/>
-            <a:ext cx="5513832" cy="2286000"/>
+          <p:cNvPr id="19" name="Text 17"/>
+          <p:cNvSpPr/>
+          <p:nvPr/>
+        </p:nvSpPr>
+        <p:spPr>
+          <a:xfrm>
+            <a:off x="548640" y="1783080"/>
+            <a:ext cx="1828800" cy="457200"/>
+          </a:xfrm>
+          <a:prstGeom prst="rect">
+            <a:avLst/>
+          </a:prstGeom>
+          <a:noFill/>
+          <a:ln/>
+        </p:spPr>
+        <p:txBody>
+          <a:bodyPr wrap="square" lIns="0" tIns="0" rIns="0" bIns="0" rtlCol="0" anchor="ctr"/>
+          <a:lstStyle/>
+          <a:p>
+            <a:pPr indent="0" marL="0">
+              <a:buNone/>
+            </a:pPr>
+            <a:r>
+              <a:rPr lang="en-US" sz="1300" b="1" dirty="0">
+                <a:solidFill>
+                  <a:srgbClr val="F87171"/>
+                </a:solidFill>
+                <a:latin typeface="Calibri" pitchFamily="34" charset="0"/>
+                <a:ea typeface="Calibri" pitchFamily="34" charset="-122"/>
+                <a:cs typeface="Calibri" pitchFamily="34" charset="-120"/>
+              </a:rPr>
+              <a:t>BEFORE</a:t>
+            </a:r>
+            <a:endParaRPr lang="en-US" sz="1300" dirty="0"/>
+          </a:p>
+        </p:txBody>
+      </p:sp>
+      <p:sp>
+        <p:nvSpPr>
+          <p:cNvPr id="20" name="Shape 18"/>
+          <p:cNvSpPr/>
+          <p:nvPr/>
+        </p:nvSpPr>
+        <p:spPr>
+          <a:xfrm>
+            <a:off x="2560320" y="1783080"/>
+            <a:ext cx="8229600" cy="457200"/>
           </a:xfrm>
           <a:prstGeom prst="roundRect">
             <a:avLst>
-              <a:gd name="adj" fmla="val 4800"/>
+              <a:gd name="adj" fmla="val 16000"/>
             </a:avLst>
           </a:prstGeom>
           <a:solidFill>
+            <a:srgbClr val="5C3540"/>
+          </a:solidFill>
+          <a:ln/>
+        </p:spPr>
+      </p:sp>
+      <p:sp>
+        <p:nvSpPr>
+          <p:cNvPr id="21" name="Text 19"/>
+          <p:cNvSpPr/>
+          <p:nvPr/>
+        </p:nvSpPr>
+        <p:spPr>
+          <a:xfrm>
+            <a:off x="2788920" y="1783080"/>
+            <a:ext cx="5029200" cy="457200"/>
+          </a:xfrm>
+          <a:prstGeom prst="rect">
+            <a:avLst/>
+          </a:prstGeom>
+          <a:noFill/>
+          <a:ln/>
+        </p:spPr>
+        <p:txBody>
+          <a:bodyPr wrap="square" lIns="0" tIns="0" rIns="0" bIns="0" rtlCol="0" anchor="ctr"/>
+          <a:lstStyle/>
+          <a:p>
+            <a:pPr indent="0" marL="0">
+              <a:buNone/>
+            </a:pPr>
+            <a:r>
+              <a:rPr lang="en-US" sz="1200" dirty="0">
+                <a:solidFill>
+                  <a:srgbClr val="E8EEF7"/>
+                </a:solidFill>
+                <a:latin typeface="Calibri" pitchFamily="34" charset="0"/>
+                <a:ea typeface="Calibri" pitchFamily="34" charset="-122"/>
+                <a:cs typeface="Calibri" pitchFamily="34" charset="-120"/>
+              </a:rPr>
+              <a:t>hours of exports &amp; merging</a:t>
+            </a:r>
+            <a:endParaRPr lang="en-US" sz="1200" dirty="0"/>
+          </a:p>
+        </p:txBody>
+      </p:sp>
+      <p:sp>
+        <p:nvSpPr>
+          <p:cNvPr id="22" name="Text 20"/>
+          <p:cNvSpPr/>
+          <p:nvPr/>
+        </p:nvSpPr>
+        <p:spPr>
+          <a:xfrm>
+            <a:off x="548640" y="2514600"/>
+            <a:ext cx="1828800" cy="457200"/>
+          </a:xfrm>
+          <a:prstGeom prst="rect">
+            <a:avLst/>
+          </a:prstGeom>
+          <a:noFill/>
+          <a:ln/>
+        </p:spPr>
+        <p:txBody>
+          <a:bodyPr wrap="square" lIns="0" tIns="0" rIns="0" bIns="0" rtlCol="0" anchor="ctr"/>
+          <a:lstStyle/>
+          <a:p>
+            <a:pPr indent="0" marL="0">
+              <a:buNone/>
+            </a:pPr>
+            <a:r>
+              <a:rPr lang="en-US" sz="1300" b="1" dirty="0">
+                <a:solidFill>
+                  <a:srgbClr val="38BDF8"/>
+                </a:solidFill>
+                <a:latin typeface="Calibri" pitchFamily="34" charset="0"/>
+                <a:ea typeface="Calibri" pitchFamily="34" charset="-122"/>
+                <a:cs typeface="Calibri" pitchFamily="34" charset="-120"/>
+              </a:rPr>
+              <a:t>NOW</a:t>
+            </a:r>
+            <a:endParaRPr lang="en-US" sz="1300" dirty="0"/>
+          </a:p>
+        </p:txBody>
+      </p:sp>
+      <p:sp>
+        <p:nvSpPr>
+          <p:cNvPr id="23" name="Shape 21"/>
+          <p:cNvSpPr/>
+          <p:nvPr/>
+        </p:nvSpPr>
+        <p:spPr>
+          <a:xfrm>
+            <a:off x="2560320" y="2514600"/>
+            <a:ext cx="914400" cy="457200"/>
+          </a:xfrm>
+          <a:prstGeom prst="roundRect">
+            <a:avLst>
+              <a:gd name="adj" fmla="val 16000"/>
+            </a:avLst>
+          </a:prstGeom>
+          <a:solidFill>
+            <a:srgbClr val="38BDF8"/>
+          </a:solidFill>
+          <a:ln/>
+        </p:spPr>
+      </p:sp>
+      <p:sp>
+        <p:nvSpPr>
+          <p:cNvPr id="24" name="Text 22"/>
+          <p:cNvSpPr/>
+          <p:nvPr/>
+        </p:nvSpPr>
+        <p:spPr>
+          <a:xfrm>
+            <a:off x="3657600" y="2514600"/>
+            <a:ext cx="2743200" cy="457200"/>
+          </a:xfrm>
+          <a:prstGeom prst="rect">
+            <a:avLst/>
+          </a:prstGeom>
+          <a:noFill/>
+          <a:ln/>
+        </p:spPr>
+        <p:txBody>
+          <a:bodyPr wrap="square" lIns="0" tIns="0" rIns="0" bIns="0" rtlCol="0" anchor="ctr"/>
+          <a:lstStyle/>
+          <a:p>
+            <a:pPr indent="0" marL="0">
+              <a:buNone/>
+            </a:pPr>
+            <a:r>
+              <a:rPr lang="en-US" sz="1200" b="1" dirty="0">
+                <a:solidFill>
+                  <a:srgbClr val="38BDF8"/>
+                </a:solidFill>
+                <a:latin typeface="Calibri" pitchFamily="34" charset="0"/>
+                <a:ea typeface="Calibri" pitchFamily="34" charset="-122"/>
+                <a:cs typeface="Calibri" pitchFamily="34" charset="-120"/>
+              </a:rPr>
+              <a:t>minutes</a:t>
+            </a:r>
+            <a:endParaRPr lang="en-US" sz="1200" dirty="0"/>
+          </a:p>
+        </p:txBody>
+      </p:sp>
+      <p:sp>
+        <p:nvSpPr>
+          <p:cNvPr id="25" name="Shape 23"/>
+          <p:cNvSpPr/>
+          <p:nvPr/>
+        </p:nvSpPr>
+        <p:spPr>
+          <a:xfrm>
+            <a:off x="548640" y="3657600"/>
+            <a:ext cx="2651760" cy="2468880"/>
+          </a:xfrm>
+          <a:prstGeom prst="roundRect">
+            <a:avLst>
+              <a:gd name="adj" fmla="val 4444"/>
+            </a:avLst>
+          </a:prstGeom>
+          <a:solidFill>
             <a:srgbClr val="182230"/>
           </a:solidFill>
           <a:ln w="12700">
@@ -5683,14 +5973,14 @@
       </p:sp>
       <p:sp>
         <p:nvSpPr>
-          <p:cNvPr id="20" name="Shape 18"/>
-          <p:cNvSpPr/>
-          <p:nvPr/>
-        </p:nvSpPr>
-        <p:spPr>
-          <a:xfrm>
-            <a:off x="841248" y="1773936"/>
-            <a:ext cx="566928" cy="566928"/>
+          <p:cNvPr id="26" name="Shape 24"/>
+          <p:cNvSpPr/>
+          <p:nvPr/>
+        </p:nvSpPr>
+        <p:spPr>
+          <a:xfrm>
+            <a:off x="1490472" y="3977640"/>
+            <a:ext cx="768096" cy="768096"/>
           </a:xfrm>
           <a:prstGeom prst="ellipse">
             <a:avLst/>
@@ -5703,7 +5993,7 @@
       </p:sp>
       <p:pic>
         <p:nvPicPr>
-          <p:cNvPr id="21" name="Image 0" descr="preencoded.png">    </p:cNvPr>
+          <p:cNvPr id="27" name="Image 0" descr="preencoded.png">    </p:cNvPr>
           <p:cNvPicPr>
             <a:picLocks noChangeAspect="1"/>
           </p:cNvPicPr>
@@ -5717,8 +6007,8 @@
         </p:blipFill>
         <p:spPr>
           <a:xfrm>
-            <a:off x="969264" y="1901952"/>
-            <a:ext cx="310896" cy="310896"/>
+            <a:off x="1682496" y="4169664"/>
+            <a:ext cx="384048" cy="384048"/>
           </a:xfrm>
           <a:prstGeom prst="rect">
             <a:avLst/>
@@ -5727,14 +6017,14 @@
       </p:pic>
       <p:sp>
         <p:nvSpPr>
-          <p:cNvPr id="22" name="Text 19"/>
-          <p:cNvSpPr/>
-          <p:nvPr/>
-        </p:nvSpPr>
-        <p:spPr>
-          <a:xfrm>
-            <a:off x="1600200" y="1755648"/>
-            <a:ext cx="4142232" cy="320040"/>
+          <p:cNvPr id="28" name="Text 25"/>
+          <p:cNvSpPr/>
+          <p:nvPr/>
+        </p:nvSpPr>
+        <p:spPr>
+          <a:xfrm>
+            <a:off x="685800" y="4956048"/>
+            <a:ext cx="2377440" cy="347472"/>
           </a:xfrm>
           <a:prstGeom prst="rect">
             <a:avLst/>
@@ -5746,11 +6036,11 @@
           <a:bodyPr wrap="square" lIns="0" tIns="0" rIns="0" bIns="0" rtlCol="0" anchor="ctr"/>
           <a:lstStyle/>
           <a:p>
-            <a:pPr indent="0" marL="0">
+            <a:pPr algn="ctr" indent="0" marL="0">
               <a:buNone/>
             </a:pPr>
             <a:r>
-              <a:rPr lang="en-US" sz="1600" b="1" dirty="0">
+              <a:rPr lang="en-US" sz="1450" b="1" dirty="0">
                 <a:solidFill>
                   <a:srgbClr val="E8EEF7"/>
                 </a:solidFill>
@@ -5758,22 +6048,22 @@
                 <a:ea typeface="Calibri" pitchFamily="34" charset="-122"/>
                 <a:cs typeface="Calibri" pitchFamily="34" charset="-120"/>
               </a:rPr>
-              <a:t>Speed</a:t>
+              <a:t>Finds issues first</a:t>
             </a:r>
-            <a:endParaRPr lang="en-US" sz="1600" dirty="0"/>
-          </a:p>
-        </p:txBody>
-      </p:sp>
-      <p:sp>
-        <p:nvSpPr>
-          <p:cNvPr id="23" name="Text 20"/>
-          <p:cNvSpPr/>
-          <p:nvPr/>
-        </p:nvSpPr>
-        <p:spPr>
-          <a:xfrm>
-            <a:off x="1600200" y="2103120"/>
-            <a:ext cx="4142232" cy="292608"/>
+            <a:endParaRPr lang="en-US" sz="1450" dirty="0"/>
+          </a:p>
+        </p:txBody>
+      </p:sp>
+      <p:sp>
+        <p:nvSpPr>
+          <p:cNvPr id="29" name="Text 26"/>
+          <p:cNvSpPr/>
+          <p:nvPr/>
+        </p:nvSpPr>
+        <p:spPr>
+          <a:xfrm>
+            <a:off x="685800" y="5349240"/>
+            <a:ext cx="2377440" cy="320040"/>
           </a:xfrm>
           <a:prstGeom prst="rect">
             <a:avLst/>
@@ -5785,49 +6075,7 @@
           <a:bodyPr wrap="square" lIns="0" tIns="0" rIns="0" bIns="0" rtlCol="0" anchor="ctr"/>
           <a:lstStyle/>
           <a:p>
-            <a:pPr indent="0" marL="0">
-              <a:buNone/>
-            </a:pPr>
-            <a:r>
-              <a:rPr lang="en-US" sz="1250" b="1" dirty="0">
-                <a:solidFill>
-                  <a:srgbClr val="38BDF8"/>
-                </a:solidFill>
-                <a:latin typeface="Calibri" pitchFamily="34" charset="0"/>
-                <a:ea typeface="Calibri" pitchFamily="34" charset="-122"/>
-                <a:cs typeface="Calibri" pitchFamily="34" charset="-120"/>
-              </a:rPr>
-              <a:t>Hours of manual work, down to minutes.</a:t>
-            </a:r>
-            <a:endParaRPr lang="en-US" sz="1250" dirty="0"/>
-          </a:p>
-        </p:txBody>
-      </p:sp>
-      <p:sp>
-        <p:nvSpPr>
-          <p:cNvPr id="24" name="Text 21"/>
-          <p:cNvSpPr/>
-          <p:nvPr/>
-        </p:nvSpPr>
-        <p:spPr>
-          <a:xfrm>
-            <a:off x="868680" y="2651760"/>
-            <a:ext cx="4873752" cy="960120"/>
-          </a:xfrm>
-          <a:prstGeom prst="rect">
-            <a:avLst/>
-          </a:prstGeom>
-          <a:noFill/>
-          <a:ln/>
-        </p:spPr>
-        <p:txBody>
-          <a:bodyPr wrap="square" lIns="0" tIns="0" rIns="0" bIns="0" rtlCol="0" anchor="ctr"/>
-          <a:lstStyle/>
-          <a:p>
-            <a:pPr indent="0" marL="0">
-              <a:lnSpc>
-                <a:spcPct val="115000"/>
-              </a:lnSpc>
+            <a:pPr algn="ctr" indent="0" marL="0">
               <a:buNone/>
             </a:pPr>
             <a:r>
@@ -5839,7 +6087,7 @@
                 <a:ea typeface="Calibri" pitchFamily="34" charset="-122"/>
                 <a:cs typeface="Calibri" pitchFamily="34" charset="-120"/>
               </a:rPr>
-              <a:t>Answers that once required exports, macros and merging are now one query away — for anyone, not just specialists.</a:t>
+              <a:t>before customers do</a:t>
             </a:r>
             <a:endParaRPr lang="en-US" sz="1150" dirty="0"/>
           </a:p>
@@ -5847,18 +6095,18 @@
       </p:sp>
       <p:sp>
         <p:nvSpPr>
-          <p:cNvPr id="25" name="Shape 22"/>
-          <p:cNvSpPr/>
-          <p:nvPr/>
-        </p:nvSpPr>
-        <p:spPr>
-          <a:xfrm>
-            <a:off x="6309360" y="1481328"/>
-            <a:ext cx="5513832" cy="2286000"/>
+          <p:cNvPr id="30" name="Shape 27"/>
+          <p:cNvSpPr/>
+          <p:nvPr/>
+        </p:nvSpPr>
+        <p:spPr>
+          <a:xfrm>
+            <a:off x="3361334" y="3657600"/>
+            <a:ext cx="2651760" cy="2468880"/>
           </a:xfrm>
           <a:prstGeom prst="roundRect">
             <a:avLst>
-              <a:gd name="adj" fmla="val 4800"/>
+              <a:gd name="adj" fmla="val 4444"/>
             </a:avLst>
           </a:prstGeom>
           <a:solidFill>
@@ -5874,14 +6122,14 @@
       </p:sp>
       <p:sp>
         <p:nvSpPr>
-          <p:cNvPr id="26" name="Shape 23"/>
-          <p:cNvSpPr/>
-          <p:nvPr/>
-        </p:nvSpPr>
-        <p:spPr>
-          <a:xfrm>
-            <a:off x="6601968" y="1773936"/>
-            <a:ext cx="566928" cy="566928"/>
+          <p:cNvPr id="31" name="Shape 28"/>
+          <p:cNvSpPr/>
+          <p:nvPr/>
+        </p:nvSpPr>
+        <p:spPr>
+          <a:xfrm>
+            <a:off x="4303166" y="3977640"/>
+            <a:ext cx="768096" cy="768096"/>
           </a:xfrm>
           <a:prstGeom prst="ellipse">
             <a:avLst/>
@@ -5894,7 +6142,7 @@
       </p:sp>
       <p:pic>
         <p:nvPicPr>
-          <p:cNvPr id="27" name="Image 1" descr="preencoded.png">    </p:cNvPr>
+          <p:cNvPr id="32" name="Image 1" descr="preencoded.png">    </p:cNvPr>
           <p:cNvPicPr>
             <a:picLocks noChangeAspect="1"/>
           </p:cNvPicPr>
@@ -5908,8 +6156,8 @@
         </p:blipFill>
         <p:spPr>
           <a:xfrm>
-            <a:off x="6729984" y="1901952"/>
-            <a:ext cx="310896" cy="310896"/>
+            <a:off x="4495190" y="4169664"/>
+            <a:ext cx="384048" cy="384048"/>
           </a:xfrm>
           <a:prstGeom prst="rect">
             <a:avLst/>
@@ -5918,14 +6166,14 @@
       </p:pic>
       <p:sp>
         <p:nvSpPr>
-          <p:cNvPr id="28" name="Text 24"/>
-          <p:cNvSpPr/>
-          <p:nvPr/>
-        </p:nvSpPr>
-        <p:spPr>
-          <a:xfrm>
-            <a:off x="7360920" y="1755648"/>
-            <a:ext cx="4142232" cy="320040"/>
+          <p:cNvPr id="33" name="Text 29"/>
+          <p:cNvSpPr/>
+          <p:nvPr/>
+        </p:nvSpPr>
+        <p:spPr>
+          <a:xfrm>
+            <a:off x="3498494" y="4956048"/>
+            <a:ext cx="2377440" cy="347472"/>
           </a:xfrm>
           <a:prstGeom prst="rect">
             <a:avLst/>
@@ -5937,11 +6185,11 @@
           <a:bodyPr wrap="square" lIns="0" tIns="0" rIns="0" bIns="0" rtlCol="0" anchor="ctr"/>
           <a:lstStyle/>
           <a:p>
-            <a:pPr indent="0" marL="0">
+            <a:pPr algn="ctr" indent="0" marL="0">
               <a:buNone/>
             </a:pPr>
             <a:r>
-              <a:rPr lang="en-US" sz="1600" b="1" dirty="0">
+              <a:rPr lang="en-US" sz="1450" b="1" dirty="0">
                 <a:solidFill>
                   <a:srgbClr val="E8EEF7"/>
                 </a:solidFill>
@@ -5949,22 +6197,22 @@
                 <a:ea typeface="Calibri" pitchFamily="34" charset="-122"/>
                 <a:cs typeface="Calibri" pitchFamily="34" charset="-120"/>
               </a:rPr>
-              <a:t>Proactive quality</a:t>
+              <a:t>Insight → action</a:t>
             </a:r>
-            <a:endParaRPr lang="en-US" sz="1600" dirty="0"/>
-          </a:p>
-        </p:txBody>
-      </p:sp>
-      <p:sp>
-        <p:nvSpPr>
-          <p:cNvPr id="29" name="Text 25"/>
-          <p:cNvSpPr/>
-          <p:nvPr/>
-        </p:nvSpPr>
-        <p:spPr>
-          <a:xfrm>
-            <a:off x="7360920" y="2103120"/>
-            <a:ext cx="4142232" cy="292608"/>
+            <a:endParaRPr lang="en-US" sz="1450" dirty="0"/>
+          </a:p>
+        </p:txBody>
+      </p:sp>
+      <p:sp>
+        <p:nvSpPr>
+          <p:cNvPr id="34" name="Text 30"/>
+          <p:cNvSpPr/>
+          <p:nvPr/>
+        </p:nvSpPr>
+        <p:spPr>
+          <a:xfrm>
+            <a:off x="3498494" y="5349240"/>
+            <a:ext cx="2377440" cy="320040"/>
           </a:xfrm>
           <a:prstGeom prst="rect">
             <a:avLst/>
@@ -5976,49 +6224,7 @@
           <a:bodyPr wrap="square" lIns="0" tIns="0" rIns="0" bIns="0" rtlCol="0" anchor="ctr"/>
           <a:lstStyle/>
           <a:p>
-            <a:pPr indent="0" marL="0">
-              <a:buNone/>
-            </a:pPr>
-            <a:r>
-              <a:rPr lang="en-US" sz="1250" b="1" dirty="0">
-                <a:solidFill>
-                  <a:srgbClr val="34D399"/>
-                </a:solidFill>
-                <a:latin typeface="Calibri" pitchFamily="34" charset="0"/>
-                <a:ea typeface="Calibri" pitchFamily="34" charset="-122"/>
-                <a:cs typeface="Calibri" pitchFamily="34" charset="-120"/>
-              </a:rPr>
-              <a:t>Find it before the customer does.</a:t>
-            </a:r>
-            <a:endParaRPr lang="en-US" sz="1250" dirty="0"/>
-          </a:p>
-        </p:txBody>
-      </p:sp>
-      <p:sp>
-        <p:nvSpPr>
-          <p:cNvPr id="30" name="Text 26"/>
-          <p:cNvSpPr/>
-          <p:nvPr/>
-        </p:nvSpPr>
-        <p:spPr>
-          <a:xfrm>
-            <a:off x="6629400" y="2651760"/>
-            <a:ext cx="4873752" cy="960120"/>
-          </a:xfrm>
-          <a:prstGeom prst="rect">
-            <a:avLst/>
-          </a:prstGeom>
-          <a:noFill/>
-          <a:ln/>
-        </p:spPr>
-        <p:txBody>
-          <a:bodyPr wrap="square" lIns="0" tIns="0" rIns="0" bIns="0" rtlCol="0" anchor="ctr"/>
-          <a:lstStyle/>
-          <a:p>
-            <a:pPr indent="0" marL="0">
-              <a:lnSpc>
-                <a:spcPct val="115000"/>
-              </a:lnSpc>
+            <a:pPr algn="ctr" indent="0" marL="0">
               <a:buNone/>
             </a:pPr>
             <a:r>
@@ -6030,7 +6236,7 @@
                 <a:ea typeface="Calibri" pitchFamily="34" charset="-122"/>
                 <a:cs typeface="Calibri" pitchFamily="34" charset="-120"/>
               </a:rPr>
-              <a:t>Detectors continuously scan for sleeping cells, overshooting, capacity hotspots and coverage gaps.</a:t>
+              <a:t>changes ready to apply</a:t>
             </a:r>
             <a:endParaRPr lang="en-US" sz="1150" dirty="0"/>
           </a:p>
@@ -6038,18 +6244,18 @@
       </p:sp>
       <p:sp>
         <p:nvSpPr>
-          <p:cNvPr id="31" name="Shape 27"/>
-          <p:cNvSpPr/>
-          <p:nvPr/>
-        </p:nvSpPr>
-        <p:spPr>
-          <a:xfrm>
-            <a:off x="548640" y="4023360"/>
-            <a:ext cx="5513832" cy="2286000"/>
+          <p:cNvPr id="35" name="Shape 31"/>
+          <p:cNvSpPr/>
+          <p:nvPr/>
+        </p:nvSpPr>
+        <p:spPr>
+          <a:xfrm>
+            <a:off x="6174029" y="3657600"/>
+            <a:ext cx="2651760" cy="2468880"/>
           </a:xfrm>
           <a:prstGeom prst="roundRect">
             <a:avLst>
-              <a:gd name="adj" fmla="val 4800"/>
+              <a:gd name="adj" fmla="val 4444"/>
             </a:avLst>
           </a:prstGeom>
           <a:solidFill>
@@ -6065,14 +6271,14 @@
       </p:sp>
       <p:sp>
         <p:nvSpPr>
-          <p:cNvPr id="32" name="Shape 28"/>
-          <p:cNvSpPr/>
-          <p:nvPr/>
-        </p:nvSpPr>
-        <p:spPr>
-          <a:xfrm>
-            <a:off x="841248" y="4315968"/>
-            <a:ext cx="566928" cy="566928"/>
+          <p:cNvPr id="36" name="Shape 32"/>
+          <p:cNvSpPr/>
+          <p:nvPr/>
+        </p:nvSpPr>
+        <p:spPr>
+          <a:xfrm>
+            <a:off x="7115861" y="3977640"/>
+            <a:ext cx="768096" cy="768096"/>
           </a:xfrm>
           <a:prstGeom prst="ellipse">
             <a:avLst/>
@@ -6085,7 +6291,7 @@
       </p:sp>
       <p:pic>
         <p:nvPicPr>
-          <p:cNvPr id="33" name="Image 2" descr="preencoded.png">    </p:cNvPr>
+          <p:cNvPr id="37" name="Image 2" descr="preencoded.png">    </p:cNvPr>
           <p:cNvPicPr>
             <a:picLocks noChangeAspect="1"/>
           </p:cNvPicPr>
@@ -6099,8 +6305,8 @@
         </p:blipFill>
         <p:spPr>
           <a:xfrm>
-            <a:off x="969264" y="4443984"/>
-            <a:ext cx="310896" cy="310896"/>
+            <a:off x="7307885" y="4169664"/>
+            <a:ext cx="384048" cy="384048"/>
           </a:xfrm>
           <a:prstGeom prst="rect">
             <a:avLst/>
@@ -6109,14 +6315,14 @@
       </p:pic>
       <p:sp>
         <p:nvSpPr>
-          <p:cNvPr id="34" name="Text 29"/>
-          <p:cNvSpPr/>
-          <p:nvPr/>
-        </p:nvSpPr>
-        <p:spPr>
-          <a:xfrm>
-            <a:off x="1600200" y="4297680"/>
-            <a:ext cx="4142232" cy="320040"/>
+          <p:cNvPr id="38" name="Text 33"/>
+          <p:cNvSpPr/>
+          <p:nvPr/>
+        </p:nvSpPr>
+        <p:spPr>
+          <a:xfrm>
+            <a:off x="6311189" y="4956048"/>
+            <a:ext cx="2377440" cy="347472"/>
           </a:xfrm>
           <a:prstGeom prst="rect">
             <a:avLst/>
@@ -6128,11 +6334,11 @@
           <a:bodyPr wrap="square" lIns="0" tIns="0" rIns="0" bIns="0" rtlCol="0" anchor="ctr"/>
           <a:lstStyle/>
           <a:p>
-            <a:pPr indent="0" marL="0">
+            <a:pPr algn="ctr" indent="0" marL="0">
               <a:buNone/>
             </a:pPr>
             <a:r>
-              <a:rPr lang="en-US" sz="1600" b="1" dirty="0">
+              <a:rPr lang="en-US" sz="1450" b="1" dirty="0">
                 <a:solidFill>
                   <a:srgbClr val="E8EEF7"/>
                 </a:solidFill>
@@ -6140,22 +6346,22 @@
                 <a:ea typeface="Calibri" pitchFamily="34" charset="-122"/>
                 <a:cs typeface="Calibri" pitchFamily="34" charset="-120"/>
               </a:rPr>
-              <a:t>From insight to action</a:t>
+              <a:t>Zero license cost</a:t>
             </a:r>
-            <a:endParaRPr lang="en-US" sz="1600" dirty="0"/>
-          </a:p>
-        </p:txBody>
-      </p:sp>
-      <p:sp>
-        <p:nvSpPr>
-          <p:cNvPr id="35" name="Text 30"/>
-          <p:cNvSpPr/>
-          <p:nvPr/>
-        </p:nvSpPr>
-        <p:spPr>
-          <a:xfrm>
-            <a:off x="1600200" y="4645152"/>
-            <a:ext cx="4142232" cy="292608"/>
+            <a:endParaRPr lang="en-US" sz="1450" dirty="0"/>
+          </a:p>
+        </p:txBody>
+      </p:sp>
+      <p:sp>
+        <p:nvSpPr>
+          <p:cNvPr id="39" name="Text 34"/>
+          <p:cNvSpPr/>
+          <p:nvPr/>
+        </p:nvSpPr>
+        <p:spPr>
+          <a:xfrm>
+            <a:off x="6311189" y="5349240"/>
+            <a:ext cx="2377440" cy="320040"/>
           </a:xfrm>
           <a:prstGeom prst="rect">
             <a:avLst/>
@@ -6167,49 +6373,7 @@
           <a:bodyPr wrap="square" lIns="0" tIns="0" rIns="0" bIns="0" rtlCol="0" anchor="ctr"/>
           <a:lstStyle/>
           <a:p>
-            <a:pPr indent="0" marL="0">
-              <a:buNone/>
-            </a:pPr>
-            <a:r>
-              <a:rPr lang="en-US" sz="1250" b="1" dirty="0">
-                <a:solidFill>
-                  <a:srgbClr val="FBBF24"/>
-                </a:solidFill>
-                <a:latin typeface="Calibri" pitchFamily="34" charset="0"/>
-                <a:ea typeface="Calibri" pitchFamily="34" charset="-122"/>
-                <a:cs typeface="Calibri" pitchFamily="34" charset="-120"/>
-              </a:rPr>
-              <a:t>Analysis that ends in execution.</a:t>
-            </a:r>
-            <a:endParaRPr lang="en-US" sz="1250" dirty="0"/>
-          </a:p>
-        </p:txBody>
-      </p:sp>
-      <p:sp>
-        <p:nvSpPr>
-          <p:cNvPr id="36" name="Text 31"/>
-          <p:cNvSpPr/>
-          <p:nvPr/>
-        </p:nvSpPr>
-        <p:spPr>
-          <a:xfrm>
-            <a:off x="868680" y="5193792"/>
-            <a:ext cx="4873752" cy="960120"/>
-          </a:xfrm>
-          <a:prstGeom prst="rect">
-            <a:avLst/>
-          </a:prstGeom>
-          <a:noFill/>
-          <a:ln/>
-        </p:spPr>
-        <p:txBody>
-          <a:bodyPr wrap="square" lIns="0" tIns="0" rIns="0" bIns="0" rtlCol="0" anchor="ctr"/>
-          <a:lstStyle/>
-          <a:p>
-            <a:pPr indent="0" marL="0">
-              <a:lnSpc>
-                <a:spcPct val="115000"/>
-              </a:lnSpc>
+            <a:pPr algn="ctr" indent="0" marL="0">
               <a:buNone/>
             </a:pPr>
             <a:r>
@@ -6221,7 +6385,7 @@
                 <a:ea typeface="Calibri" pitchFamily="34" charset="-122"/>
                 <a:cs typeface="Calibri" pitchFamily="34" charset="-120"/>
               </a:rPr>
-              <a:t>Load-balancing optimizers, remote tilt control and config generators turn findings into ready-to-apply changes.</a:t>
+              <a:t>100% Zain IP</a:t>
             </a:r>
             <a:endParaRPr lang="en-US" sz="1150" dirty="0"/>
           </a:p>
@@ -6229,18 +6393,18 @@
       </p:sp>
       <p:sp>
         <p:nvSpPr>
-          <p:cNvPr id="37" name="Shape 32"/>
-          <p:cNvSpPr/>
-          <p:nvPr/>
-        </p:nvSpPr>
-        <p:spPr>
-          <a:xfrm>
-            <a:off x="6309360" y="4023360"/>
-            <a:ext cx="5513832" cy="2286000"/>
+          <p:cNvPr id="40" name="Shape 35"/>
+          <p:cNvSpPr/>
+          <p:nvPr/>
+        </p:nvSpPr>
+        <p:spPr>
+          <a:xfrm>
+            <a:off x="8986723" y="3657600"/>
+            <a:ext cx="2651760" cy="2468880"/>
           </a:xfrm>
           <a:prstGeom prst="roundRect">
             <a:avLst>
-              <a:gd name="adj" fmla="val 4800"/>
+              <a:gd name="adj" fmla="val 4444"/>
             </a:avLst>
           </a:prstGeom>
           <a:solidFill>
@@ -6256,14 +6420,14 @@
       </p:sp>
       <p:sp>
         <p:nvSpPr>
-          <p:cNvPr id="38" name="Shape 33"/>
-          <p:cNvSpPr/>
-          <p:nvPr/>
-        </p:nvSpPr>
-        <p:spPr>
-          <a:xfrm>
-            <a:off x="6601968" y="4315968"/>
-            <a:ext cx="566928" cy="566928"/>
+          <p:cNvPr id="41" name="Shape 36"/>
+          <p:cNvSpPr/>
+          <p:nvPr/>
+        </p:nvSpPr>
+        <p:spPr>
+          <a:xfrm>
+            <a:off x="9928555" y="3977640"/>
+            <a:ext cx="768096" cy="768096"/>
           </a:xfrm>
           <a:prstGeom prst="ellipse">
             <a:avLst/>
@@ -6276,7 +6440,7 @@
       </p:sp>
       <p:pic>
         <p:nvPicPr>
-          <p:cNvPr id="39" name="Image 3" descr="preencoded.png">    </p:cNvPr>
+          <p:cNvPr id="42" name="Image 3" descr="preencoded.png">    </p:cNvPr>
           <p:cNvPicPr>
             <a:picLocks noChangeAspect="1"/>
           </p:cNvPicPr>
@@ -6290,8 +6454,8 @@
         </p:blipFill>
         <p:spPr>
           <a:xfrm>
-            <a:off x="6729984" y="4443984"/>
-            <a:ext cx="310896" cy="310896"/>
+            <a:off x="10120579" y="4169664"/>
+            <a:ext cx="384048" cy="384048"/>
           </a:xfrm>
           <a:prstGeom prst="rect">
             <a:avLst/>
@@ -6300,14 +6464,14 @@
       </p:pic>
       <p:sp>
         <p:nvSpPr>
-          <p:cNvPr id="40" name="Text 34"/>
-          <p:cNvSpPr/>
-          <p:nvPr/>
-        </p:nvSpPr>
-        <p:spPr>
-          <a:xfrm>
-            <a:off x="7360920" y="4297680"/>
-            <a:ext cx="4142232" cy="320040"/>
+          <p:cNvPr id="43" name="Text 37"/>
+          <p:cNvSpPr/>
+          <p:nvPr/>
+        </p:nvSpPr>
+        <p:spPr>
+          <a:xfrm>
+            <a:off x="9123883" y="4956048"/>
+            <a:ext cx="2377440" cy="347472"/>
           </a:xfrm>
           <a:prstGeom prst="rect">
             <a:avLst/>
@@ -6319,11 +6483,11 @@
           <a:bodyPr wrap="square" lIns="0" tIns="0" rIns="0" bIns="0" rtlCol="0" anchor="ctr"/>
           <a:lstStyle/>
           <a:p>
-            <a:pPr indent="0" marL="0">
+            <a:pPr algn="ctr" indent="0" marL="0">
               <a:buNone/>
             </a:pPr>
             <a:r>
-              <a:rPr lang="en-US" sz="1600" b="1" dirty="0">
+              <a:rPr lang="en-US" sz="1450" b="1" dirty="0">
                 <a:solidFill>
                   <a:srgbClr val="E8EEF7"/>
                 </a:solidFill>
@@ -6331,22 +6495,22 @@
                 <a:ea typeface="Calibri" pitchFamily="34" charset="-122"/>
                 <a:cs typeface="Calibri" pitchFamily="34" charset="-120"/>
               </a:rPr>
-              <a:t>Ownership economics</a:t>
+              <a:t>Ships in days</a:t>
             </a:r>
-            <a:endParaRPr lang="en-US" sz="1600" dirty="0"/>
-          </a:p>
-        </p:txBody>
-      </p:sp>
-      <p:sp>
-        <p:nvSpPr>
-          <p:cNvPr id="41" name="Text 35"/>
-          <p:cNvSpPr/>
-          <p:nvPr/>
-        </p:nvSpPr>
-        <p:spPr>
-          <a:xfrm>
-            <a:off x="7360920" y="4645152"/>
-            <a:ext cx="4142232" cy="292608"/>
+            <a:endParaRPr lang="en-US" sz="1450" dirty="0"/>
+          </a:p>
+        </p:txBody>
+      </p:sp>
+      <p:sp>
+        <p:nvSpPr>
+          <p:cNvPr id="44" name="Text 38"/>
+          <p:cNvSpPr/>
+          <p:nvPr/>
+        </p:nvSpPr>
+        <p:spPr>
+          <a:xfrm>
+            <a:off x="9123883" y="5349240"/>
+            <a:ext cx="2377440" cy="320040"/>
           </a:xfrm>
           <a:prstGeom prst="rect">
             <a:avLst/>
@@ -6358,49 +6522,7 @@
           <a:bodyPr wrap="square" lIns="0" tIns="0" rIns="0" bIns="0" rtlCol="0" anchor="ctr"/>
           <a:lstStyle/>
           <a:p>
-            <a:pPr indent="0" marL="0">
-              <a:buNone/>
-            </a:pPr>
-            <a:r>
-              <a:rPr lang="en-US" sz="1250" b="1" dirty="0">
-                <a:solidFill>
-                  <a:srgbClr val="8BC1FF"/>
-                </a:solidFill>
-                <a:latin typeface="Calibri" pitchFamily="34" charset="0"/>
-                <a:ea typeface="Calibri" pitchFamily="34" charset="-122"/>
-                <a:cs typeface="Calibri" pitchFamily="34" charset="-120"/>
-              </a:rPr>
-              <a:t>No per-seat license. 100% Zain IP.</a:t>
-            </a:r>
-            <a:endParaRPr lang="en-US" sz="1250" dirty="0"/>
-          </a:p>
-        </p:txBody>
-      </p:sp>
-      <p:sp>
-        <p:nvSpPr>
-          <p:cNvPr id="42" name="Text 36"/>
-          <p:cNvSpPr/>
-          <p:nvPr/>
-        </p:nvSpPr>
-        <p:spPr>
-          <a:xfrm>
-            <a:off x="6629400" y="5193792"/>
-            <a:ext cx="4873752" cy="960120"/>
-          </a:xfrm>
-          <a:prstGeom prst="rect">
-            <a:avLst/>
-          </a:prstGeom>
-          <a:noFill/>
-          <a:ln/>
-        </p:spPr>
-        <p:txBody>
-          <a:bodyPr wrap="square" lIns="0" tIns="0" rIns="0" bIns="0" rtlCol="0" anchor="ctr"/>
-          <a:lstStyle/>
-          <a:p>
-            <a:pPr indent="0" marL="0">
-              <a:lnSpc>
-                <a:spcPct val="115000"/>
-              </a:lnSpc>
+            <a:pPr algn="ctr" indent="0" marL="0">
               <a:buNone/>
             </a:pPr>
             <a:r>
@@ -6412,7 +6534,7 @@
                 <a:ea typeface="Calibri" pitchFamily="34" charset="-122"/>
                 <a:cs typeface="Calibri" pitchFamily="34" charset="-120"/>
               </a:rPr>
-              <a:t>Built and evolved in-house — new features ship in days, shaped directly by the engineers who use them.</a:t>
+              <a:t>shaped by our engineers</a:t>
             </a:r>
             <a:endParaRPr lang="en-US" sz="1150" dirty="0"/>
           </a:p>
@@ -6868,41 +6990,14 @@
       </p:sp>
       <p:sp>
         <p:nvSpPr>
-          <p:cNvPr id="19" name="Shape 17"/>
-          <p:cNvSpPr/>
-          <p:nvPr/>
-        </p:nvSpPr>
-        <p:spPr>
-          <a:xfrm>
-            <a:off x="548640" y="1463040"/>
-            <a:ext cx="11091672" cy="822960"/>
-          </a:xfrm>
-          <a:prstGeom prst="roundRect">
-            <a:avLst>
-              <a:gd name="adj" fmla="val 13333"/>
-            </a:avLst>
-          </a:prstGeom>
-          <a:solidFill>
-            <a:srgbClr val="1B2736"/>
-          </a:solidFill>
-          <a:ln w="12700">
-            <a:solidFill>
-              <a:srgbClr val="27577B"/>
-            </a:solidFill>
-            <a:prstDash val="solid"/>
-          </a:ln>
-        </p:spPr>
-      </p:sp>
-      <p:sp>
-        <p:nvSpPr>
-          <p:cNvPr id="20" name="Text 18"/>
-          <p:cNvSpPr/>
-          <p:nvPr/>
-        </p:nvSpPr>
-        <p:spPr>
-          <a:xfrm>
-            <a:off x="914400" y="1463040"/>
-            <a:ext cx="10424160" cy="822960"/>
+          <p:cNvPr id="19" name="Text 17"/>
+          <p:cNvSpPr/>
+          <p:nvPr/>
+        </p:nvSpPr>
+        <p:spPr>
+          <a:xfrm>
+            <a:off x="1280160" y="1828800"/>
+            <a:ext cx="9628632" cy="1005840"/>
           </a:xfrm>
           <a:prstGeom prst="rect">
             <a:avLst/>
@@ -6914,11 +7009,11 @@
           <a:bodyPr wrap="square" lIns="0" tIns="0" rIns="0" bIns="0" rtlCol="0" anchor="ctr"/>
           <a:lstStyle/>
           <a:p>
-            <a:pPr indent="0" marL="0">
+            <a:pPr algn="ctr" indent="0" marL="0">
               <a:buNone/>
             </a:pPr>
             <a:r>
-              <a:rPr lang="en-US" sz="1550" i="1" dirty="0">
+              <a:rPr lang="en-US" sz="2200" i="1" dirty="0">
                 <a:solidFill>
                   <a:srgbClr val="8BC1FF"/>
                 </a:solidFill>
@@ -6926,26 +7021,26 @@
                 <a:ea typeface="Calibri" pitchFamily="34" charset="-122"/>
                 <a:cs typeface="Calibri" pitchFamily="34" charset="-120"/>
               </a:rPr>
-              <a:t>The question changed — from “where is the data?” to “what do we do about it?”</a:t>
+              <a:t>“The question changed — from ‘where is the data?’ to ‘what do we do about it?’”</a:t>
             </a:r>
-            <a:endParaRPr lang="en-US" sz="1550" dirty="0"/>
-          </a:p>
-        </p:txBody>
-      </p:sp>
-      <p:sp>
-        <p:nvSpPr>
-          <p:cNvPr id="21" name="Shape 19"/>
-          <p:cNvSpPr/>
-          <p:nvPr/>
-        </p:nvSpPr>
-        <p:spPr>
-          <a:xfrm>
-            <a:off x="548640" y="2606040"/>
-            <a:ext cx="2651760" cy="3246120"/>
+            <a:endParaRPr lang="en-US" sz="2200" dirty="0"/>
+          </a:p>
+        </p:txBody>
+      </p:sp>
+      <p:sp>
+        <p:nvSpPr>
+          <p:cNvPr id="20" name="Shape 18"/>
+          <p:cNvSpPr/>
+          <p:nvPr/>
+        </p:nvSpPr>
+        <p:spPr>
+          <a:xfrm>
+            <a:off x="548640" y="3383280"/>
+            <a:ext cx="2651760" cy="2331720"/>
           </a:xfrm>
           <a:prstGeom prst="roundRect">
             <a:avLst>
-              <a:gd name="adj" fmla="val 4138"/>
+              <a:gd name="adj" fmla="val 4706"/>
             </a:avLst>
           </a:prstGeom>
           <a:solidFill>
@@ -6961,14 +7056,14 @@
       </p:sp>
       <p:sp>
         <p:nvSpPr>
-          <p:cNvPr id="22" name="Shape 20"/>
-          <p:cNvSpPr/>
-          <p:nvPr/>
-        </p:nvSpPr>
-        <p:spPr>
-          <a:xfrm>
-            <a:off x="822960" y="2926080"/>
-            <a:ext cx="566928" cy="566928"/>
+          <p:cNvPr id="21" name="Shape 19"/>
+          <p:cNvSpPr/>
+          <p:nvPr/>
+        </p:nvSpPr>
+        <p:spPr>
+          <a:xfrm>
+            <a:off x="1472184" y="3703320"/>
+            <a:ext cx="804672" cy="804672"/>
           </a:xfrm>
           <a:prstGeom prst="ellipse">
             <a:avLst/>
@@ -6981,7 +7076,7 @@
       </p:sp>
       <p:pic>
         <p:nvPicPr>
-          <p:cNvPr id="23" name="Image 0" descr="preencoded.png">    </p:cNvPr>
+          <p:cNvPr id="22" name="Image 0" descr="preencoded.png">    </p:cNvPr>
           <p:cNvPicPr>
             <a:picLocks noChangeAspect="1"/>
           </p:cNvPicPr>
@@ -6995,8 +7090,8 @@
         </p:blipFill>
         <p:spPr>
           <a:xfrm>
-            <a:off x="950976" y="3054096"/>
-            <a:ext cx="310896" cy="310896"/>
+            <a:off x="1673352" y="3904488"/>
+            <a:ext cx="402336" cy="402336"/>
           </a:xfrm>
           <a:prstGeom prst="rect">
             <a:avLst/>
@@ -7005,14 +7100,14 @@
       </p:pic>
       <p:sp>
         <p:nvSpPr>
-          <p:cNvPr id="24" name="Text 21"/>
-          <p:cNvSpPr/>
-          <p:nvPr/>
-        </p:nvSpPr>
-        <p:spPr>
-          <a:xfrm>
-            <a:off x="822960" y="3657600"/>
-            <a:ext cx="2103120" cy="658368"/>
+          <p:cNvPr id="23" name="Text 20"/>
+          <p:cNvSpPr/>
+          <p:nvPr/>
+        </p:nvSpPr>
+        <p:spPr>
+          <a:xfrm>
+            <a:off x="685800" y="4709160"/>
+            <a:ext cx="2377440" cy="685800"/>
           </a:xfrm>
           <a:prstGeom prst="rect">
             <a:avLst/>
@@ -7024,14 +7119,14 @@
           <a:bodyPr wrap="square" lIns="0" tIns="0" rIns="0" bIns="0" rtlCol="0" anchor="ctr"/>
           <a:lstStyle/>
           <a:p>
-            <a:pPr indent="0" marL="0">
+            <a:pPr algn="ctr" indent="0" marL="0">
               <a:lnSpc>
                 <a:spcPct val="105000"/>
               </a:lnSpc>
               <a:buNone/>
             </a:pPr>
             <a:r>
-              <a:rPr lang="en-US" sz="1350" b="1" dirty="0">
+              <a:rPr lang="en-US" sz="1450" b="1" dirty="0">
                 <a:solidFill>
                   <a:srgbClr val="E8EEF7"/>
                 </a:solidFill>
@@ -7039,68 +7134,26 @@
                 <a:ea typeface="Calibri" pitchFamily="34" charset="-122"/>
                 <a:cs typeface="Calibri" pitchFamily="34" charset="-120"/>
               </a:rPr>
-              <a:t>From firefighting to foresight</a:t>
+              <a:t>Daily habit</a:t>
             </a:r>
-            <a:endParaRPr lang="en-US" sz="1350" dirty="0"/>
-          </a:p>
-        </p:txBody>
-      </p:sp>
-      <p:sp>
-        <p:nvSpPr>
-          <p:cNvPr id="25" name="Text 22"/>
-          <p:cNvSpPr/>
-          <p:nvPr/>
-        </p:nvSpPr>
-        <p:spPr>
-          <a:xfrm>
-            <a:off x="822960" y="4325112"/>
-            <a:ext cx="2103120" cy="1371600"/>
-          </a:xfrm>
-          <a:prstGeom prst="rect">
-            <a:avLst/>
-          </a:prstGeom>
-          <a:noFill/>
-          <a:ln/>
-        </p:spPr>
-        <p:txBody>
-          <a:bodyPr wrap="square" lIns="0" tIns="0" rIns="0" bIns="0" rtlCol="0" anchor="ctr"/>
-          <a:lstStyle/>
-          <a:p>
-            <a:pPr indent="0" marL="0">
-              <a:lnSpc>
-                <a:spcPct val="115000"/>
-              </a:lnSpc>
-              <a:buNone/>
-            </a:pPr>
-            <a:r>
-              <a:rPr lang="en-US" sz="1100" dirty="0">
-                <a:solidFill>
-                  <a:srgbClr val="A9B7C9"/>
-                </a:solidFill>
-                <a:latin typeface="Calibri" pitchFamily="34" charset="0"/>
-                <a:ea typeface="Calibri" pitchFamily="34" charset="-122"/>
-                <a:cs typeface="Calibri" pitchFamily="34" charset="-120"/>
-              </a:rPr>
-              <a:t>Mornings begin with the automated radio report — not a scramble to gather data.</a:t>
-            </a:r>
-            <a:endParaRPr lang="en-US" sz="1100" dirty="0"/>
-          </a:p>
-        </p:txBody>
-      </p:sp>
-      <p:sp>
-        <p:nvSpPr>
-          <p:cNvPr id="26" name="Shape 23"/>
-          <p:cNvSpPr/>
-          <p:nvPr/>
-        </p:nvSpPr>
-        <p:spPr>
-          <a:xfrm>
-            <a:off x="3361334" y="2606040"/>
-            <a:ext cx="2651760" cy="3246120"/>
+            <a:endParaRPr lang="en-US" sz="1450" dirty="0"/>
+          </a:p>
+        </p:txBody>
+      </p:sp>
+      <p:sp>
+        <p:nvSpPr>
+          <p:cNvPr id="24" name="Shape 21"/>
+          <p:cNvSpPr/>
+          <p:nvPr/>
+        </p:nvSpPr>
+        <p:spPr>
+          <a:xfrm>
+            <a:off x="3361334" y="3383280"/>
+            <a:ext cx="2651760" cy="2331720"/>
           </a:xfrm>
           <a:prstGeom prst="roundRect">
             <a:avLst>
-              <a:gd name="adj" fmla="val 4138"/>
+              <a:gd name="adj" fmla="val 4706"/>
             </a:avLst>
           </a:prstGeom>
           <a:solidFill>
@@ -7116,14 +7169,14 @@
       </p:sp>
       <p:sp>
         <p:nvSpPr>
-          <p:cNvPr id="27" name="Shape 24"/>
-          <p:cNvSpPr/>
-          <p:nvPr/>
-        </p:nvSpPr>
-        <p:spPr>
-          <a:xfrm>
-            <a:off x="3635654" y="2926080"/>
-            <a:ext cx="566928" cy="566928"/>
+          <p:cNvPr id="25" name="Shape 22"/>
+          <p:cNvSpPr/>
+          <p:nvPr/>
+        </p:nvSpPr>
+        <p:spPr>
+          <a:xfrm>
+            <a:off x="4284878" y="3703320"/>
+            <a:ext cx="804672" cy="804672"/>
           </a:xfrm>
           <a:prstGeom prst="ellipse">
             <a:avLst/>
@@ -7136,7 +7189,7 @@
       </p:sp>
       <p:pic>
         <p:nvPicPr>
-          <p:cNvPr id="28" name="Image 1" descr="preencoded.png">    </p:cNvPr>
+          <p:cNvPr id="26" name="Image 1" descr="preencoded.png">    </p:cNvPr>
           <p:cNvPicPr>
             <a:picLocks noChangeAspect="1"/>
           </p:cNvPicPr>
@@ -7150,8 +7203,8 @@
         </p:blipFill>
         <p:spPr>
           <a:xfrm>
-            <a:off x="3763670" y="3054096"/>
-            <a:ext cx="310896" cy="310896"/>
+            <a:off x="4486046" y="3904488"/>
+            <a:ext cx="402336" cy="402336"/>
           </a:xfrm>
           <a:prstGeom prst="rect">
             <a:avLst/>
@@ -7160,14 +7213,14 @@
       </p:pic>
       <p:sp>
         <p:nvSpPr>
-          <p:cNvPr id="29" name="Text 25"/>
-          <p:cNvSpPr/>
-          <p:nvPr/>
-        </p:nvSpPr>
-        <p:spPr>
-          <a:xfrm>
-            <a:off x="3635654" y="3657600"/>
-            <a:ext cx="2103120" cy="658368"/>
+          <p:cNvPr id="27" name="Text 23"/>
+          <p:cNvSpPr/>
+          <p:nvPr/>
+        </p:nvSpPr>
+        <p:spPr>
+          <a:xfrm>
+            <a:off x="3498494" y="4709160"/>
+            <a:ext cx="2377440" cy="685800"/>
           </a:xfrm>
           <a:prstGeom prst="rect">
             <a:avLst/>
@@ -7179,14 +7232,14 @@
           <a:bodyPr wrap="square" lIns="0" tIns="0" rIns="0" bIns="0" rtlCol="0" anchor="ctr"/>
           <a:lstStyle/>
           <a:p>
-            <a:pPr indent="0" marL="0">
+            <a:pPr algn="ctr" indent="0" marL="0">
               <a:lnSpc>
                 <a:spcPct val="105000"/>
               </a:lnSpc>
               <a:buNone/>
             </a:pPr>
             <a:r>
-              <a:rPr lang="en-US" sz="1350" b="1" dirty="0">
+              <a:rPr lang="en-US" sz="1450" b="1" dirty="0">
                 <a:solidFill>
                   <a:srgbClr val="E8EEF7"/>
                 </a:solidFill>
@@ -7194,68 +7247,26 @@
                 <a:ea typeface="Calibri" pitchFamily="34" charset="-122"/>
                 <a:cs typeface="Calibri" pitchFamily="34" charset="-120"/>
               </a:rPr>
-              <a:t>One number everyone trusts</a:t>
+              <a:t>One trusted number</a:t>
             </a:r>
-            <a:endParaRPr lang="en-US" sz="1350" dirty="0"/>
-          </a:p>
-        </p:txBody>
-      </p:sp>
-      <p:sp>
-        <p:nvSpPr>
-          <p:cNvPr id="30" name="Text 26"/>
-          <p:cNvSpPr/>
-          <p:nvPr/>
-        </p:nvSpPr>
-        <p:spPr>
-          <a:xfrm>
-            <a:off x="3635654" y="4325112"/>
-            <a:ext cx="2103120" cy="1371600"/>
-          </a:xfrm>
-          <a:prstGeom prst="rect">
-            <a:avLst/>
-          </a:prstGeom>
-          <a:noFill/>
-          <a:ln/>
-        </p:spPr>
-        <p:txBody>
-          <a:bodyPr wrap="square" lIns="0" tIns="0" rIns="0" bIns="0" rtlCol="0" anchor="ctr"/>
-          <a:lstStyle/>
-          <a:p>
-            <a:pPr indent="0" marL="0">
-              <a:lnSpc>
-                <a:spcPct val="115000"/>
-              </a:lnSpc>
-              <a:buNone/>
-            </a:pPr>
-            <a:r>
-              <a:rPr lang="en-US" sz="1100" dirty="0">
-                <a:solidFill>
-                  <a:srgbClr val="A9B7C9"/>
-                </a:solidFill>
-                <a:latin typeface="Calibri" pitchFamily="34" charset="0"/>
-                <a:ea typeface="Calibri" pitchFamily="34" charset="-122"/>
-                <a:cs typeface="Calibri" pitchFamily="34" charset="-120"/>
-              </a:rPr>
-              <a:t>Engineers, NOC and management debate actions now — not whose figure is right.</a:t>
-            </a:r>
-            <a:endParaRPr lang="en-US" sz="1100" dirty="0"/>
-          </a:p>
-        </p:txBody>
-      </p:sp>
-      <p:sp>
-        <p:nvSpPr>
-          <p:cNvPr id="31" name="Shape 27"/>
-          <p:cNvSpPr/>
-          <p:nvPr/>
-        </p:nvSpPr>
-        <p:spPr>
-          <a:xfrm>
-            <a:off x="6174029" y="2606040"/>
-            <a:ext cx="2651760" cy="3246120"/>
+            <a:endParaRPr lang="en-US" sz="1450" dirty="0"/>
+          </a:p>
+        </p:txBody>
+      </p:sp>
+      <p:sp>
+        <p:nvSpPr>
+          <p:cNvPr id="28" name="Shape 24"/>
+          <p:cNvSpPr/>
+          <p:nvPr/>
+        </p:nvSpPr>
+        <p:spPr>
+          <a:xfrm>
+            <a:off x="6174029" y="3383280"/>
+            <a:ext cx="2651760" cy="2331720"/>
           </a:xfrm>
           <a:prstGeom prst="roundRect">
             <a:avLst>
-              <a:gd name="adj" fmla="val 4138"/>
+              <a:gd name="adj" fmla="val 4706"/>
             </a:avLst>
           </a:prstGeom>
           <a:solidFill>
@@ -7271,14 +7282,14 @@
       </p:sp>
       <p:sp>
         <p:nvSpPr>
-          <p:cNvPr id="32" name="Shape 28"/>
-          <p:cNvSpPr/>
-          <p:nvPr/>
-        </p:nvSpPr>
-        <p:spPr>
-          <a:xfrm>
-            <a:off x="6448349" y="2926080"/>
-            <a:ext cx="566928" cy="566928"/>
+          <p:cNvPr id="29" name="Shape 25"/>
+          <p:cNvSpPr/>
+          <p:nvPr/>
+        </p:nvSpPr>
+        <p:spPr>
+          <a:xfrm>
+            <a:off x="7097573" y="3703320"/>
+            <a:ext cx="804672" cy="804672"/>
           </a:xfrm>
           <a:prstGeom prst="ellipse">
             <a:avLst/>
@@ -7291,7 +7302,7 @@
       </p:sp>
       <p:pic>
         <p:nvPicPr>
-          <p:cNvPr id="33" name="Image 2" descr="preencoded.png">    </p:cNvPr>
+          <p:cNvPr id="30" name="Image 2" descr="preencoded.png">    </p:cNvPr>
           <p:cNvPicPr>
             <a:picLocks noChangeAspect="1"/>
           </p:cNvPicPr>
@@ -7305,8 +7316,8 @@
         </p:blipFill>
         <p:spPr>
           <a:xfrm>
-            <a:off x="6576365" y="3054096"/>
-            <a:ext cx="310896" cy="310896"/>
+            <a:off x="7298741" y="3904488"/>
+            <a:ext cx="402336" cy="402336"/>
           </a:xfrm>
           <a:prstGeom prst="rect">
             <a:avLst/>
@@ -7315,14 +7326,14 @@
       </p:pic>
       <p:sp>
         <p:nvSpPr>
-          <p:cNvPr id="34" name="Text 29"/>
-          <p:cNvSpPr/>
-          <p:nvPr/>
-        </p:nvSpPr>
-        <p:spPr>
-          <a:xfrm>
-            <a:off x="6448349" y="3657600"/>
-            <a:ext cx="2103120" cy="658368"/>
+          <p:cNvPr id="31" name="Text 26"/>
+          <p:cNvSpPr/>
+          <p:nvPr/>
+        </p:nvSpPr>
+        <p:spPr>
+          <a:xfrm>
+            <a:off x="6311189" y="4709160"/>
+            <a:ext cx="2377440" cy="685800"/>
           </a:xfrm>
           <a:prstGeom prst="rect">
             <a:avLst/>
@@ -7334,14 +7345,14 @@
           <a:bodyPr wrap="square" lIns="0" tIns="0" rIns="0" bIns="0" rtlCol="0" anchor="ctr"/>
           <a:lstStyle/>
           <a:p>
-            <a:pPr indent="0" marL="0">
+            <a:pPr algn="ctr" indent="0" marL="0">
               <a:lnSpc>
                 <a:spcPct val="105000"/>
               </a:lnSpc>
               <a:buNone/>
             </a:pPr>
             <a:r>
-              <a:rPr lang="en-US" sz="1350" b="1" dirty="0">
+              <a:rPr lang="en-US" sz="1450" b="1" dirty="0">
                 <a:solidFill>
                   <a:srgbClr val="E8EEF7"/>
                 </a:solidFill>
@@ -7349,68 +7360,26 @@
                 <a:ea typeface="Calibri" pitchFamily="34" charset="-122"/>
                 <a:cs typeface="Calibri" pitchFamily="34" charset="-120"/>
               </a:rPr>
-              <a:t>Pride of ownership</a:t>
+              <a:t>Built by our engineers</a:t>
             </a:r>
-            <a:endParaRPr lang="en-US" sz="1350" dirty="0"/>
-          </a:p>
-        </p:txBody>
-      </p:sp>
-      <p:sp>
-        <p:nvSpPr>
-          <p:cNvPr id="35" name="Text 30"/>
-          <p:cNvSpPr/>
-          <p:nvPr/>
-        </p:nvSpPr>
-        <p:spPr>
-          <a:xfrm>
-            <a:off x="6448349" y="4325112"/>
-            <a:ext cx="2103120" cy="1371600"/>
-          </a:xfrm>
-          <a:prstGeom prst="rect">
-            <a:avLst/>
-          </a:prstGeom>
-          <a:noFill/>
-          <a:ln/>
-        </p:spPr>
-        <p:txBody>
-          <a:bodyPr wrap="square" lIns="0" tIns="0" rIns="0" bIns="0" rtlCol="0" anchor="ctr"/>
-          <a:lstStyle/>
-          <a:p>
-            <a:pPr indent="0" marL="0">
-              <a:lnSpc>
-                <a:spcPct val="115000"/>
-              </a:lnSpc>
-              <a:buNone/>
-            </a:pPr>
-            <a:r>
-              <a:rPr lang="en-US" sz="1100" dirty="0">
-                <a:solidFill>
-                  <a:srgbClr val="A9B7C9"/>
-                </a:solidFill>
-                <a:latin typeface="Calibri" pitchFamily="34" charset="0"/>
-                <a:ea typeface="Calibri" pitchFamily="34" charset="-122"/>
-                <a:cs typeface="Calibri" pitchFamily="34" charset="-120"/>
-              </a:rPr>
-              <a:t>Built by Zain engineers for Zain's network. Every request lands with a team that can ship it.</a:t>
-            </a:r>
-            <a:endParaRPr lang="en-US" sz="1100" dirty="0"/>
-          </a:p>
-        </p:txBody>
-      </p:sp>
-      <p:sp>
-        <p:nvSpPr>
-          <p:cNvPr id="36" name="Shape 31"/>
-          <p:cNvSpPr/>
-          <p:nvPr/>
-        </p:nvSpPr>
-        <p:spPr>
-          <a:xfrm>
-            <a:off x="8986723" y="2606040"/>
-            <a:ext cx="2651760" cy="3246120"/>
+            <a:endParaRPr lang="en-US" sz="1450" dirty="0"/>
+          </a:p>
+        </p:txBody>
+      </p:sp>
+      <p:sp>
+        <p:nvSpPr>
+          <p:cNvPr id="32" name="Shape 27"/>
+          <p:cNvSpPr/>
+          <p:nvPr/>
+        </p:nvSpPr>
+        <p:spPr>
+          <a:xfrm>
+            <a:off x="8986723" y="3383280"/>
+            <a:ext cx="2651760" cy="2331720"/>
           </a:xfrm>
           <a:prstGeom prst="roundRect">
             <a:avLst>
-              <a:gd name="adj" fmla="val 4138"/>
+              <a:gd name="adj" fmla="val 4706"/>
             </a:avLst>
           </a:prstGeom>
           <a:solidFill>
@@ -7426,14 +7395,14 @@
       </p:sp>
       <p:sp>
         <p:nvSpPr>
-          <p:cNvPr id="37" name="Shape 32"/>
-          <p:cNvSpPr/>
-          <p:nvPr/>
-        </p:nvSpPr>
-        <p:spPr>
-          <a:xfrm>
-            <a:off x="9261043" y="2926080"/>
-            <a:ext cx="566928" cy="566928"/>
+          <p:cNvPr id="33" name="Shape 28"/>
+          <p:cNvSpPr/>
+          <p:nvPr/>
+        </p:nvSpPr>
+        <p:spPr>
+          <a:xfrm>
+            <a:off x="9910267" y="3703320"/>
+            <a:ext cx="804672" cy="804672"/>
           </a:xfrm>
           <a:prstGeom prst="ellipse">
             <a:avLst/>
@@ -7446,7 +7415,7 @@
       </p:sp>
       <p:pic>
         <p:nvPicPr>
-          <p:cNvPr id="38" name="Image 3" descr="preencoded.png">    </p:cNvPr>
+          <p:cNvPr id="34" name="Image 3" descr="preencoded.png">    </p:cNvPr>
           <p:cNvPicPr>
             <a:picLocks noChangeAspect="1"/>
           </p:cNvPicPr>
@@ -7460,8 +7429,8 @@
         </p:blipFill>
         <p:spPr>
           <a:xfrm>
-            <a:off x="9389059" y="3054096"/>
-            <a:ext cx="310896" cy="310896"/>
+            <a:off x="10111435" y="3904488"/>
+            <a:ext cx="402336" cy="402336"/>
           </a:xfrm>
           <a:prstGeom prst="rect">
             <a:avLst/>
@@ -7470,14 +7439,14 @@
       </p:pic>
       <p:sp>
         <p:nvSpPr>
-          <p:cNvPr id="39" name="Text 33"/>
-          <p:cNvSpPr/>
-          <p:nvPr/>
-        </p:nvSpPr>
-        <p:spPr>
-          <a:xfrm>
-            <a:off x="9261043" y="3657600"/>
-            <a:ext cx="2103120" cy="658368"/>
+          <p:cNvPr id="35" name="Text 29"/>
+          <p:cNvSpPr/>
+          <p:nvPr/>
+        </p:nvSpPr>
+        <p:spPr>
+          <a:xfrm>
+            <a:off x="9123883" y="4709160"/>
+            <a:ext cx="2377440" cy="685800"/>
           </a:xfrm>
           <a:prstGeom prst="rect">
             <a:avLst/>
@@ -7489,14 +7458,14 @@
           <a:bodyPr wrap="square" lIns="0" tIns="0" rIns="0" bIns="0" rtlCol="0" anchor="ctr"/>
           <a:lstStyle/>
           <a:p>
-            <a:pPr indent="0" marL="0">
+            <a:pPr algn="ctr" indent="0" marL="0">
               <a:lnSpc>
                 <a:spcPct val="105000"/>
               </a:lnSpc>
               <a:buNone/>
             </a:pPr>
             <a:r>
-              <a:rPr lang="en-US" sz="1350" b="1" dirty="0">
+              <a:rPr lang="en-US" sz="1450" b="1" dirty="0">
                 <a:solidFill>
                   <a:srgbClr val="E8EEF7"/>
                 </a:solidFill>
@@ -7504,51 +7473,9 @@
                 <a:ea typeface="Calibri" pitchFamily="34" charset="-122"/>
                 <a:cs typeface="Calibri" pitchFamily="34" charset="-120"/>
               </a:rPr>
-              <a:t>Growing pull, not push</a:t>
+              <a:t>Adoption by pull</a:t>
             </a:r>
-            <a:endParaRPr lang="en-US" sz="1350" dirty="0"/>
-          </a:p>
-        </p:txBody>
-      </p:sp>
-      <p:sp>
-        <p:nvSpPr>
-          <p:cNvPr id="40" name="Text 34"/>
-          <p:cNvSpPr/>
-          <p:nvPr/>
-        </p:nvSpPr>
-        <p:spPr>
-          <a:xfrm>
-            <a:off x="9261043" y="4325112"/>
-            <a:ext cx="2103120" cy="1371600"/>
-          </a:xfrm>
-          <a:prstGeom prst="rect">
-            <a:avLst/>
-          </a:prstGeom>
-          <a:noFill/>
-          <a:ln/>
-        </p:spPr>
-        <p:txBody>
-          <a:bodyPr wrap="square" lIns="0" tIns="0" rIns="0" bIns="0" rtlCol="0" anchor="ctr"/>
-          <a:lstStyle/>
-          <a:p>
-            <a:pPr indent="0" marL="0">
-              <a:lnSpc>
-                <a:spcPct val="115000"/>
-              </a:lnSpc>
-              <a:buNone/>
-            </a:pPr>
-            <a:r>
-              <a:rPr lang="en-US" sz="1100" dirty="0">
-                <a:solidFill>
-                  <a:srgbClr val="A9B7C9"/>
-                </a:solidFill>
-                <a:latin typeface="Calibri" pitchFamily="34" charset="0"/>
-                <a:ea typeface="Calibri" pitchFamily="34" charset="-122"/>
-                <a:cs typeface="Calibri" pitchFamily="34" charset="-120"/>
-              </a:rPr>
-              <a:t>Adoption spreads module by module — teams ask for more, they aren't told to use it.</a:t>
-            </a:r>
-            <a:endParaRPr lang="en-US" sz="1100" dirty="0"/>
+            <a:endParaRPr lang="en-US" sz="1450" dirty="0"/>
           </a:p>
         </p:txBody>
       </p:sp>
@@ -7955,7 +7882,7 @@
                 <a:ea typeface="Calibri" pitchFamily="34" charset="-122"/>
                 <a:cs typeface="Calibri" pitchFamily="34" charset="-120"/>
               </a:rPr>
-              <a:t>05 — WHAT IT MEANS FOR ZAIN</a:t>
+              <a:t>05 — THE FUTURE: ONE CONNECTED ZAIN</a:t>
             </a:r>
             <a:endParaRPr lang="en-US" sz="1050" dirty="0"/>
           </a:p>
@@ -7994,7 +7921,7 @@
                 <a:ea typeface="Calibri" pitchFamily="34" charset="-122"/>
                 <a:cs typeface="Calibri" pitchFamily="34" charset="-120"/>
               </a:rPr>
-              <a:t>Owned intelligence, a self-optimizing future</a:t>
+              <a:t>Every portal, plugged into network truth</a:t>
             </a:r>
             <a:endParaRPr lang="en-US" sz="2800" dirty="0"/>
           </a:p>
@@ -8008,21 +7935,49 @@
         </p:nvSpPr>
         <p:spPr>
           <a:xfrm>
-            <a:off x="548640" y="1600200"/>
-            <a:ext cx="566928" cy="566928"/>
+            <a:off x="6094476" y="2290572"/>
+            <a:ext cx="9144" cy="1687068"/>
+          </a:xfrm>
+          <a:prstGeom prst="line">
+            <a:avLst/>
+          </a:prstGeom>
+          <a:noFill/>
+          <a:ln w="19050">
+            <a:solidFill>
+              <a:srgbClr val="304258"/>
+            </a:solidFill>
+            <a:prstDash val="dash"/>
+          </a:ln>
+        </p:spPr>
+      </p:sp>
+      <p:sp>
+        <p:nvSpPr>
+          <p:cNvPr id="20" name="Shape 18"/>
+          <p:cNvSpPr/>
+          <p:nvPr/>
+        </p:nvSpPr>
+        <p:spPr>
+          <a:xfrm>
+            <a:off x="5660136" y="1856232"/>
+            <a:ext cx="868680" cy="868680"/>
           </a:xfrm>
           <a:prstGeom prst="ellipse">
             <a:avLst/>
           </a:prstGeom>
           <a:solidFill>
-            <a:srgbClr val="223246"/>
-          </a:solidFill>
-          <a:ln/>
+            <a:srgbClr val="1B2736"/>
+          </a:solidFill>
+          <a:ln w="19050">
+            <a:solidFill>
+              <a:srgbClr val="FBBF24"/>
+            </a:solidFill>
+            <a:prstDash val="solid"/>
+          </a:ln>
         </p:spPr>
       </p:sp>
       <p:pic>
         <p:nvPicPr>
-          <p:cNvPr id="20" name="Image 0" descr="preencoded.png">    </p:cNvPr>
+          <p:cNvPr id="21" name="Image 0" descr="preencoded.png">    </p:cNvPr>
           <p:cNvPicPr>
             <a:picLocks noChangeAspect="1"/>
           </p:cNvPicPr>
@@ -8036,8 +7991,8 @@
         </p:blipFill>
         <p:spPr>
           <a:xfrm>
-            <a:off x="676656" y="1728216"/>
-            <a:ext cx="310896" cy="310896"/>
+            <a:off x="5894680" y="2090776"/>
+            <a:ext cx="399593" cy="399593"/>
           </a:xfrm>
           <a:prstGeom prst="rect">
             <a:avLst/>
@@ -8046,14 +8001,14 @@
       </p:pic>
       <p:sp>
         <p:nvSpPr>
-          <p:cNvPr id="21" name="Text 18"/>
-          <p:cNvSpPr/>
-          <p:nvPr/>
-        </p:nvSpPr>
-        <p:spPr>
-          <a:xfrm>
-            <a:off x="1325880" y="1581912"/>
-            <a:ext cx="4846320" cy="320040"/>
+          <p:cNvPr id="22" name="Text 19"/>
+          <p:cNvSpPr/>
+          <p:nvPr/>
+        </p:nvSpPr>
+        <p:spPr>
+          <a:xfrm>
+            <a:off x="4951476" y="1394460"/>
+            <a:ext cx="2286000" cy="292608"/>
           </a:xfrm>
           <a:prstGeom prst="rect">
             <a:avLst/>
@@ -8065,11 +8020,11 @@
           <a:bodyPr wrap="square" lIns="0" tIns="0" rIns="0" bIns="0" rtlCol="0" anchor="ctr"/>
           <a:lstStyle/>
           <a:p>
-            <a:pPr indent="0" marL="0">
+            <a:pPr algn="ctr" indent="0" marL="0">
               <a:buNone/>
             </a:pPr>
             <a:r>
-              <a:rPr lang="en-US" sz="1550" b="1" dirty="0">
+              <a:rPr lang="en-US" sz="1300" b="1" dirty="0">
                 <a:solidFill>
                   <a:srgbClr val="E8EEF7"/>
                 </a:solidFill>
@@ -8077,22 +8032,22 @@
                 <a:ea typeface="Calibri" pitchFamily="34" charset="-122"/>
                 <a:cs typeface="Calibri" pitchFamily="34" charset="-120"/>
               </a:rPr>
-              <a:t>Strategic independence</a:t>
+              <a:t>Marketing portal</a:t>
             </a:r>
-            <a:endParaRPr lang="en-US" sz="1550" dirty="0"/>
-          </a:p>
-        </p:txBody>
-      </p:sp>
-      <p:sp>
-        <p:nvSpPr>
-          <p:cNvPr id="22" name="Text 19"/>
-          <p:cNvSpPr/>
-          <p:nvPr/>
-        </p:nvSpPr>
-        <p:spPr>
-          <a:xfrm>
-            <a:off x="1325880" y="1947672"/>
-            <a:ext cx="4892040" cy="1051560"/>
+            <a:endParaRPr lang="en-US" sz="1300" dirty="0"/>
+          </a:p>
+        </p:txBody>
+      </p:sp>
+      <p:sp>
+        <p:nvSpPr>
+          <p:cNvPr id="23" name="Text 20"/>
+          <p:cNvSpPr/>
+          <p:nvPr/>
+        </p:nvSpPr>
+        <p:spPr>
+          <a:xfrm>
+            <a:off x="4951476" y="1668780"/>
+            <a:ext cx="2286000" cy="237744"/>
           </a:xfrm>
           <a:prstGeom prst="rect">
             <a:avLst/>
@@ -8104,14 +8059,11 @@
           <a:bodyPr wrap="square" lIns="0" tIns="0" rIns="0" bIns="0" rtlCol="0" anchor="ctr"/>
           <a:lstStyle/>
           <a:p>
-            <a:pPr indent="0" marL="0">
-              <a:lnSpc>
-                <a:spcPct val="118000"/>
-              </a:lnSpc>
+            <a:pPr algn="ctr" indent="0" marL="0">
               <a:buNone/>
             </a:pPr>
             <a:r>
-              <a:rPr lang="en-US" sz="1150" dirty="0">
+              <a:rPr lang="en-US" sz="1050" i="1" dirty="0">
                 <a:solidFill>
                   <a:srgbClr val="A9B7C9"/>
                 </a:solidFill>
@@ -8119,35 +8071,63 @@
                 <a:ea typeface="Calibri" pitchFamily="34" charset="-122"/>
                 <a:cs typeface="Calibri" pitchFamily="34" charset="-120"/>
               </a:rPr>
-              <a:t>Zain sees its multi-vendor network through its own eyes — not through each vendor's window. That strengthens every vendor conversation.</a:t>
+              <a:t>planned</a:t>
             </a:r>
-            <a:endParaRPr lang="en-US" sz="1150" dirty="0"/>
-          </a:p>
-        </p:txBody>
-      </p:sp>
-      <p:sp>
-        <p:nvSpPr>
-          <p:cNvPr id="23" name="Shape 20"/>
-          <p:cNvSpPr/>
-          <p:nvPr/>
-        </p:nvSpPr>
-        <p:spPr>
-          <a:xfrm>
-            <a:off x="548640" y="3172968"/>
-            <a:ext cx="566928" cy="566928"/>
+            <a:endParaRPr lang="en-US" sz="1050" dirty="0"/>
+          </a:p>
+        </p:txBody>
+      </p:sp>
+      <p:sp>
+        <p:nvSpPr>
+          <p:cNvPr id="24" name="Shape 21"/>
+          <p:cNvSpPr/>
+          <p:nvPr/>
+        </p:nvSpPr>
+        <p:spPr>
+          <a:xfrm flipV="1">
+            <a:off x="6094476" y="3134106"/>
+            <a:ext cx="2761729" cy="843534"/>
+          </a:xfrm>
+          <a:prstGeom prst="line">
+            <a:avLst/>
+          </a:prstGeom>
+          <a:noFill/>
+          <a:ln w="19050">
+            <a:solidFill>
+              <a:srgbClr val="304258"/>
+            </a:solidFill>
+            <a:prstDash val="dash"/>
+          </a:ln>
+        </p:spPr>
+      </p:sp>
+      <p:sp>
+        <p:nvSpPr>
+          <p:cNvPr id="25" name="Shape 22"/>
+          <p:cNvSpPr/>
+          <p:nvPr/>
+        </p:nvSpPr>
+        <p:spPr>
+          <a:xfrm>
+            <a:off x="8421865" y="2699766"/>
+            <a:ext cx="868680" cy="868680"/>
           </a:xfrm>
           <a:prstGeom prst="ellipse">
             <a:avLst/>
           </a:prstGeom>
           <a:solidFill>
-            <a:srgbClr val="223246"/>
-          </a:solidFill>
-          <a:ln/>
+            <a:srgbClr val="1B2736"/>
+          </a:solidFill>
+          <a:ln w="19050">
+            <a:solidFill>
+              <a:srgbClr val="34D399"/>
+            </a:solidFill>
+            <a:prstDash val="solid"/>
+          </a:ln>
         </p:spPr>
       </p:sp>
       <p:pic>
         <p:nvPicPr>
-          <p:cNvPr id="24" name="Image 1" descr="preencoded.png">    </p:cNvPr>
+          <p:cNvPr id="26" name="Image 1" descr="preencoded.png">    </p:cNvPr>
           <p:cNvPicPr>
             <a:picLocks noChangeAspect="1"/>
           </p:cNvPicPr>
@@ -8161,8 +8141,8 @@
         </p:blipFill>
         <p:spPr>
           <a:xfrm>
-            <a:off x="676656" y="3300984"/>
-            <a:ext cx="310896" cy="310896"/>
+            <a:off x="8656409" y="2934310"/>
+            <a:ext cx="399593" cy="399593"/>
           </a:xfrm>
           <a:prstGeom prst="rect">
             <a:avLst/>
@@ -8171,14 +8151,14 @@
       </p:pic>
       <p:sp>
         <p:nvSpPr>
-          <p:cNvPr id="25" name="Text 21"/>
-          <p:cNvSpPr/>
-          <p:nvPr/>
-        </p:nvSpPr>
-        <p:spPr>
-          <a:xfrm>
-            <a:off x="1325880" y="3154680"/>
-            <a:ext cx="4846320" cy="320040"/>
+          <p:cNvPr id="27" name="Text 23"/>
+          <p:cNvSpPr/>
+          <p:nvPr/>
+        </p:nvSpPr>
+        <p:spPr>
+          <a:xfrm>
+            <a:off x="7713205" y="2237994"/>
+            <a:ext cx="2286000" cy="292608"/>
           </a:xfrm>
           <a:prstGeom prst="rect">
             <a:avLst/>
@@ -8190,11 +8170,11 @@
           <a:bodyPr wrap="square" lIns="0" tIns="0" rIns="0" bIns="0" rtlCol="0" anchor="ctr"/>
           <a:lstStyle/>
           <a:p>
-            <a:pPr indent="0" marL="0">
+            <a:pPr algn="ctr" indent="0" marL="0">
               <a:buNone/>
             </a:pPr>
             <a:r>
-              <a:rPr lang="en-US" sz="1550" b="1" dirty="0">
+              <a:rPr lang="en-US" sz="1300" b="1" dirty="0">
                 <a:solidFill>
                   <a:srgbClr val="E8EEF7"/>
                 </a:solidFill>
@@ -8202,22 +8182,22 @@
                 <a:ea typeface="Calibri" pitchFamily="34" charset="-122"/>
                 <a:cs typeface="Calibri" pitchFamily="34" charset="-120"/>
               </a:rPr>
-              <a:t>Institutional memory</a:t>
+              <a:t>Sales portal</a:t>
             </a:r>
-            <a:endParaRPr lang="en-US" sz="1550" dirty="0"/>
-          </a:p>
-        </p:txBody>
-      </p:sp>
-      <p:sp>
-        <p:nvSpPr>
-          <p:cNvPr id="26" name="Text 22"/>
-          <p:cNvSpPr/>
-          <p:nvPr/>
-        </p:nvSpPr>
-        <p:spPr>
-          <a:xfrm>
-            <a:off x="1325880" y="3520440"/>
-            <a:ext cx="4892040" cy="1051560"/>
+            <a:endParaRPr lang="en-US" sz="1300" dirty="0"/>
+          </a:p>
+        </p:txBody>
+      </p:sp>
+      <p:sp>
+        <p:nvSpPr>
+          <p:cNvPr id="28" name="Text 24"/>
+          <p:cNvSpPr/>
+          <p:nvPr/>
+        </p:nvSpPr>
+        <p:spPr>
+          <a:xfrm>
+            <a:off x="7713205" y="2512314"/>
+            <a:ext cx="2286000" cy="237744"/>
           </a:xfrm>
           <a:prstGeom prst="rect">
             <a:avLst/>
@@ -8229,14 +8209,11 @@
           <a:bodyPr wrap="square" lIns="0" tIns="0" rIns="0" bIns="0" rtlCol="0" anchor="ctr"/>
           <a:lstStyle/>
           <a:p>
-            <a:pPr indent="0" marL="0">
-              <a:lnSpc>
-                <a:spcPct val="118000"/>
-              </a:lnSpc>
+            <a:pPr algn="ctr" indent="0" marL="0">
               <a:buNone/>
             </a:pPr>
             <a:r>
-              <a:rPr lang="en-US" sz="1150" dirty="0">
+              <a:rPr lang="en-US" sz="1050" i="1" dirty="0">
                 <a:solidFill>
                   <a:srgbClr val="A9B7C9"/>
                 </a:solidFill>
@@ -8244,35 +8221,63 @@
                 <a:ea typeface="Calibri" pitchFamily="34" charset="-122"/>
                 <a:cs typeface="Calibri" pitchFamily="34" charset="-120"/>
               </a:rPr>
-              <a:t>Network knowledge is codified in a platform Zain owns — resilient to staff rotation and vendor churn.</a:t>
+              <a:t>planned</a:t>
             </a:r>
-            <a:endParaRPr lang="en-US" sz="1150" dirty="0"/>
-          </a:p>
-        </p:txBody>
-      </p:sp>
-      <p:sp>
-        <p:nvSpPr>
-          <p:cNvPr id="27" name="Shape 23"/>
-          <p:cNvSpPr/>
-          <p:nvPr/>
-        </p:nvSpPr>
-        <p:spPr>
-          <a:xfrm>
-            <a:off x="548640" y="4745736"/>
-            <a:ext cx="566928" cy="566928"/>
+            <a:endParaRPr lang="en-US" sz="1050" dirty="0"/>
+          </a:p>
+        </p:txBody>
+      </p:sp>
+      <p:sp>
+        <p:nvSpPr>
+          <p:cNvPr id="29" name="Shape 25"/>
+          <p:cNvSpPr/>
+          <p:nvPr/>
+        </p:nvSpPr>
+        <p:spPr>
+          <a:xfrm>
+            <a:off x="6094476" y="3977640"/>
+            <a:ext cx="2761729" cy="843534"/>
+          </a:xfrm>
+          <a:prstGeom prst="line">
+            <a:avLst/>
+          </a:prstGeom>
+          <a:noFill/>
+          <a:ln w="19050">
+            <a:solidFill>
+              <a:srgbClr val="304258"/>
+            </a:solidFill>
+            <a:prstDash val="dash"/>
+          </a:ln>
+        </p:spPr>
+      </p:sp>
+      <p:sp>
+        <p:nvSpPr>
+          <p:cNvPr id="30" name="Shape 26"/>
+          <p:cNvSpPr/>
+          <p:nvPr/>
+        </p:nvSpPr>
+        <p:spPr>
+          <a:xfrm>
+            <a:off x="8421865" y="4386834"/>
+            <a:ext cx="868680" cy="868680"/>
           </a:xfrm>
           <a:prstGeom prst="ellipse">
             <a:avLst/>
           </a:prstGeom>
           <a:solidFill>
-            <a:srgbClr val="223246"/>
-          </a:solidFill>
-          <a:ln/>
+            <a:srgbClr val="1B2736"/>
+          </a:solidFill>
+          <a:ln w="19050">
+            <a:solidFill>
+              <a:srgbClr val="F87171"/>
+            </a:solidFill>
+            <a:prstDash val="solid"/>
+          </a:ln>
         </p:spPr>
       </p:sp>
       <p:pic>
         <p:nvPicPr>
-          <p:cNvPr id="28" name="Image 2" descr="preencoded.png">    </p:cNvPr>
+          <p:cNvPr id="31" name="Image 2" descr="preencoded.png">    </p:cNvPr>
           <p:cNvPicPr>
             <a:picLocks noChangeAspect="1"/>
           </p:cNvPicPr>
@@ -8286,8 +8291,8 @@
         </p:blipFill>
         <p:spPr>
           <a:xfrm>
-            <a:off x="676656" y="4873752"/>
-            <a:ext cx="310896" cy="310896"/>
+            <a:off x="8656409" y="4621378"/>
+            <a:ext cx="399593" cy="399593"/>
           </a:xfrm>
           <a:prstGeom prst="rect">
             <a:avLst/>
@@ -8296,14 +8301,14 @@
       </p:pic>
       <p:sp>
         <p:nvSpPr>
-          <p:cNvPr id="29" name="Text 24"/>
-          <p:cNvSpPr/>
-          <p:nvPr/>
-        </p:nvSpPr>
-        <p:spPr>
-          <a:xfrm>
-            <a:off x="1325880" y="4727448"/>
-            <a:ext cx="4846320" cy="320040"/>
+          <p:cNvPr id="32" name="Text 27"/>
+          <p:cNvSpPr/>
+          <p:nvPr/>
+        </p:nvSpPr>
+        <p:spPr>
+          <a:xfrm>
+            <a:off x="7713205" y="5324094"/>
+            <a:ext cx="2286000" cy="292608"/>
           </a:xfrm>
           <a:prstGeom prst="rect">
             <a:avLst/>
@@ -8315,11 +8320,11 @@
           <a:bodyPr wrap="square" lIns="0" tIns="0" rIns="0" bIns="0" rtlCol="0" anchor="ctr"/>
           <a:lstStyle/>
           <a:p>
-            <a:pPr indent="0" marL="0">
+            <a:pPr algn="ctr" indent="0" marL="0">
               <a:buNone/>
             </a:pPr>
             <a:r>
-              <a:rPr lang="en-US" sz="1550" b="1" dirty="0">
+              <a:rPr lang="en-US" sz="1300" b="1" dirty="0">
                 <a:solidFill>
                   <a:srgbClr val="E8EEF7"/>
                 </a:solidFill>
@@ -8327,22 +8332,22 @@
                 <a:ea typeface="Calibri" pitchFamily="34" charset="-122"/>
                 <a:cs typeface="Calibri" pitchFamily="34" charset="-120"/>
               </a:rPr>
-              <a:t>A data-driven operating model</a:t>
+              <a:t>Customer care</a:t>
             </a:r>
-            <a:endParaRPr lang="en-US" sz="1550" dirty="0"/>
-          </a:p>
-        </p:txBody>
-      </p:sp>
-      <p:sp>
-        <p:nvSpPr>
-          <p:cNvPr id="30" name="Text 25"/>
-          <p:cNvSpPr/>
-          <p:nvPr/>
-        </p:nvSpPr>
-        <p:spPr>
-          <a:xfrm>
-            <a:off x="1325880" y="5093208"/>
-            <a:ext cx="4892040" cy="1051560"/>
+            <a:endParaRPr lang="en-US" sz="1300" dirty="0"/>
+          </a:p>
+        </p:txBody>
+      </p:sp>
+      <p:sp>
+        <p:nvSpPr>
+          <p:cNvPr id="33" name="Text 28"/>
+          <p:cNvSpPr/>
+          <p:nvPr/>
+        </p:nvSpPr>
+        <p:spPr>
+          <a:xfrm>
+            <a:off x="7713205" y="5598414"/>
+            <a:ext cx="2286000" cy="237744"/>
           </a:xfrm>
           <a:prstGeom prst="rect">
             <a:avLst/>
@@ -8354,14 +8359,11 @@
           <a:bodyPr wrap="square" lIns="0" tIns="0" rIns="0" bIns="0" rtlCol="0" anchor="ctr"/>
           <a:lstStyle/>
           <a:p>
-            <a:pPr indent="0" marL="0">
-              <a:lnSpc>
-                <a:spcPct val="118000"/>
-              </a:lnSpc>
+            <a:pPr algn="ctr" indent="0" marL="0">
               <a:buNone/>
             </a:pPr>
             <a:r>
-              <a:rPr lang="en-US" sz="1150" dirty="0">
+              <a:rPr lang="en-US" sz="1050" i="1" dirty="0">
                 <a:solidFill>
                   <a:srgbClr val="A9B7C9"/>
                 </a:solidFill>
@@ -8369,95 +8371,99 @@
                 <a:ea typeface="Calibri" pitchFamily="34" charset="-122"/>
                 <a:cs typeface="Calibri" pitchFamily="34" charset="-120"/>
               </a:rPr>
-              <a:t>Decisions across the radio organization start from shared, live evidence — the culture the whole business is moving toward.</a:t>
+              <a:t>planned</a:t>
             </a:r>
-            <a:endParaRPr lang="en-US" sz="1150" dirty="0"/>
-          </a:p>
-        </p:txBody>
-      </p:sp>
-      <p:sp>
-        <p:nvSpPr>
-          <p:cNvPr id="31" name="Shape 26"/>
-          <p:cNvSpPr/>
-          <p:nvPr/>
-        </p:nvSpPr>
-        <p:spPr>
-          <a:xfrm>
-            <a:off x="6537960" y="1481328"/>
-            <a:ext cx="5102352" cy="4892040"/>
-          </a:xfrm>
-          <a:prstGeom prst="roundRect">
-            <a:avLst>
-              <a:gd name="adj" fmla="val 2243"/>
-            </a:avLst>
+            <a:endParaRPr lang="en-US" sz="1050" dirty="0"/>
+          </a:p>
+        </p:txBody>
+      </p:sp>
+      <p:sp>
+        <p:nvSpPr>
+          <p:cNvPr id="34" name="Shape 29"/>
+          <p:cNvSpPr/>
+          <p:nvPr/>
+        </p:nvSpPr>
+        <p:spPr>
+          <a:xfrm>
+            <a:off x="6094476" y="3977640"/>
+            <a:ext cx="9144" cy="1687068"/>
+          </a:xfrm>
+          <a:prstGeom prst="line">
+            <a:avLst/>
+          </a:prstGeom>
+          <a:noFill/>
+          <a:ln w="19050">
+            <a:solidFill>
+              <a:srgbClr val="38BDF8"/>
+            </a:solidFill>
+            <a:prstDash val="solid"/>
+          </a:ln>
+        </p:spPr>
+      </p:sp>
+      <p:sp>
+        <p:nvSpPr>
+          <p:cNvPr id="35" name="Shape 30"/>
+          <p:cNvSpPr/>
+          <p:nvPr/>
+        </p:nvSpPr>
+        <p:spPr>
+          <a:xfrm>
+            <a:off x="5660136" y="5230368"/>
+            <a:ext cx="868680" cy="868680"/>
+          </a:xfrm>
+          <a:prstGeom prst="ellipse">
+            <a:avLst/>
           </a:prstGeom>
           <a:solidFill>
             <a:srgbClr val="1B2736"/>
           </a:solidFill>
-          <a:ln w="15875">
-            <a:solidFill>
-              <a:srgbClr val="27577B"/>
-            </a:solidFill>
-            <a:prstDash val="solid"/>
-          </a:ln>
-        </p:spPr>
-      </p:sp>
-      <p:sp>
-        <p:nvSpPr>
-          <p:cNvPr id="32" name="Text 27"/>
-          <p:cNvSpPr/>
-          <p:nvPr/>
-        </p:nvSpPr>
-        <p:spPr>
-          <a:xfrm>
-            <a:off x="6903720" y="1783080"/>
-            <a:ext cx="4389120" cy="274320"/>
-          </a:xfrm>
-          <a:prstGeom prst="rect">
-            <a:avLst/>
-          </a:prstGeom>
-          <a:noFill/>
-          <a:ln/>
-        </p:spPr>
-        <p:txBody>
-          <a:bodyPr wrap="square" lIns="0" tIns="0" rIns="0" bIns="0" rtlCol="0" anchor="ctr"/>
-          <a:lstStyle/>
-          <a:p>
-            <a:pPr indent="0" marL="0">
-              <a:buNone/>
-            </a:pPr>
-            <a:r>
-              <a:rPr lang="en-US" sz="1200" b="1" spc="250" kern="0" dirty="0">
-                <a:solidFill>
-                  <a:srgbClr val="38BDF8"/>
-                </a:solidFill>
-                <a:latin typeface="Calibri" pitchFamily="34" charset="0"/>
-                <a:ea typeface="Calibri" pitchFamily="34" charset="-122"/>
-                <a:cs typeface="Calibri" pitchFamily="34" charset="-120"/>
-              </a:rPr>
-              <a:t>THE TRAJECTORY</a:t>
-            </a:r>
-            <a:endParaRPr lang="en-US" sz="1200" dirty="0"/>
-          </a:p>
-        </p:txBody>
-      </p:sp>
-      <p:sp>
-        <p:nvSpPr>
-          <p:cNvPr id="33" name="Text 28"/>
-          <p:cNvSpPr/>
-          <p:nvPr/>
-        </p:nvSpPr>
-        <p:spPr>
-          <a:xfrm>
-            <a:off x="6903720" y="2304288"/>
-            <a:ext cx="457200" cy="457200"/>
-          </a:xfrm>
-          <a:prstGeom prst="ellipse">
-            <a:avLst/>
-          </a:prstGeom>
-          <a:solidFill>
-            <a:srgbClr val="223246"/>
-          </a:solidFill>
+          <a:ln w="19050">
+            <a:solidFill>
+              <a:srgbClr val="FBBF24"/>
+            </a:solidFill>
+            <a:prstDash val="solid"/>
+          </a:ln>
+        </p:spPr>
+      </p:sp>
+      <p:pic>
+        <p:nvPicPr>
+          <p:cNvPr id="36" name="Image 3" descr="preencoded.png">    </p:cNvPr>
+          <p:cNvPicPr>
+            <a:picLocks noChangeAspect="1"/>
+          </p:cNvPicPr>
+          <p:nvPr/>
+        </p:nvPicPr>
+        <p:blipFill>
+          <a:blip r:embed="rId4"/>
+          <a:stretch>
+            <a:fillRect/>
+          </a:stretch>
+        </p:blipFill>
+        <p:spPr>
+          <a:xfrm>
+            <a:off x="5894680" y="5464912"/>
+            <a:ext cx="399593" cy="399593"/>
+          </a:xfrm>
+          <a:prstGeom prst="rect">
+            <a:avLst/>
+          </a:prstGeom>
+        </p:spPr>
+      </p:pic>
+      <p:sp>
+        <p:nvSpPr>
+          <p:cNvPr id="37" name="Text 31"/>
+          <p:cNvSpPr/>
+          <p:nvPr/>
+        </p:nvSpPr>
+        <p:spPr>
+          <a:xfrm>
+            <a:off x="4951476" y="6167628"/>
+            <a:ext cx="2286000" cy="292608"/>
+          </a:xfrm>
+          <a:prstGeom prst="rect">
+            <a:avLst/>
+          </a:prstGeom>
+          <a:noFill/>
           <a:ln/>
         </p:spPr>
         <p:txBody>
@@ -8468,49 +8474,7 @@
               <a:buNone/>
             </a:pPr>
             <a:r>
-              <a:rPr lang="en-US" sz="1500" b="1" dirty="0">
-                <a:solidFill>
-                  <a:srgbClr val="38BDF8"/>
-                </a:solidFill>
-                <a:latin typeface="Calibri" pitchFamily="34" charset="0"/>
-                <a:ea typeface="Calibri" pitchFamily="34" charset="-122"/>
-                <a:cs typeface="Calibri" pitchFamily="34" charset="-120"/>
-              </a:rPr>
-              <a:t>1</a:t>
-            </a:r>
-            <a:endParaRPr lang="en-US" sz="1500" dirty="0"/>
-          </a:p>
-        </p:txBody>
-      </p:sp>
-      <p:sp>
-        <p:nvSpPr>
-          <p:cNvPr id="34" name="Text 29"/>
-          <p:cNvSpPr/>
-          <p:nvPr/>
-        </p:nvSpPr>
-        <p:spPr>
-          <a:xfrm>
-            <a:off x="7589520" y="2286000"/>
-            <a:ext cx="3840480" cy="1234440"/>
-          </a:xfrm>
-          <a:prstGeom prst="rect">
-            <a:avLst/>
-          </a:prstGeom>
-          <a:noFill/>
-          <a:ln/>
-        </p:spPr>
-        <p:txBody>
-          <a:bodyPr wrap="square" lIns="0" tIns="0" rIns="0" bIns="0" rtlCol="0" anchor="t"/>
-          <a:lstStyle/>
-          <a:p>
-            <a:pPr indent="0" marL="0">
-              <a:lnSpc>
-                <a:spcPct val="113000"/>
-              </a:lnSpc>
-              <a:buNone/>
-            </a:pPr>
-            <a:r>
-              <a:rPr lang="en-US" sz="1350" b="1" dirty="0">
+              <a:rPr lang="en-US" sz="1300" b="1" dirty="0">
                 <a:solidFill>
                   <a:srgbClr val="E8EEF7"/>
                 </a:solidFill>
@@ -8518,19 +8482,338 @@
                 <a:ea typeface="Calibri" pitchFamily="34" charset="-122"/>
                 <a:cs typeface="Calibri" pitchFamily="34" charset="-120"/>
               </a:rPr>
-              <a:t>AI-assisted optimization</a:t>
+              <a:t>Executive BI</a:t>
             </a:r>
-            <a:endParaRPr lang="en-US" sz="1350" dirty="0"/>
-          </a:p>
-          <a:p>
-            <a:pPr indent="0" marL="0">
-              <a:lnSpc>
-                <a:spcPct val="113000"/>
-              </a:lnSpc>
+            <a:endParaRPr lang="en-US" sz="1300" dirty="0"/>
+          </a:p>
+        </p:txBody>
+      </p:sp>
+      <p:sp>
+        <p:nvSpPr>
+          <p:cNvPr id="38" name="Text 32"/>
+          <p:cNvSpPr/>
+          <p:nvPr/>
+        </p:nvSpPr>
+        <p:spPr>
+          <a:xfrm>
+            <a:off x="4951476" y="6441948"/>
+            <a:ext cx="2286000" cy="237744"/>
+          </a:xfrm>
+          <a:prstGeom prst="rect">
+            <a:avLst/>
+          </a:prstGeom>
+          <a:noFill/>
+          <a:ln/>
+        </p:spPr>
+        <p:txBody>
+          <a:bodyPr wrap="square" lIns="0" tIns="0" rIns="0" bIns="0" rtlCol="0" anchor="ctr"/>
+          <a:lstStyle/>
+          <a:p>
+            <a:pPr algn="ctr" indent="0" marL="0">
               <a:buNone/>
             </a:pPr>
             <a:r>
-              <a:rPr lang="en-US" sz="1100" dirty="0">
+              <a:rPr lang="en-US" sz="1050" i="1" dirty="0">
+                <a:solidFill>
+                  <a:srgbClr val="34D399"/>
+                </a:solidFill>
+                <a:latin typeface="Calibri" pitchFamily="34" charset="0"/>
+                <a:ea typeface="Calibri" pitchFamily="34" charset="-122"/>
+                <a:cs typeface="Calibri" pitchFamily="34" charset="-120"/>
+              </a:rPr>
+              <a:t>live today</a:t>
+            </a:r>
+            <a:endParaRPr lang="en-US" sz="1050" dirty="0"/>
+          </a:p>
+        </p:txBody>
+      </p:sp>
+      <p:sp>
+        <p:nvSpPr>
+          <p:cNvPr id="39" name="Shape 33"/>
+          <p:cNvSpPr/>
+          <p:nvPr/>
+        </p:nvSpPr>
+        <p:spPr>
+          <a:xfrm flipV="1">
+            <a:off x="3332747" y="3977640"/>
+            <a:ext cx="2761729" cy="843534"/>
+          </a:xfrm>
+          <a:prstGeom prst="line">
+            <a:avLst/>
+          </a:prstGeom>
+          <a:noFill/>
+          <a:ln w="19050">
+            <a:solidFill>
+              <a:srgbClr val="38BDF8"/>
+            </a:solidFill>
+            <a:prstDash val="solid"/>
+          </a:ln>
+        </p:spPr>
+      </p:sp>
+      <p:sp>
+        <p:nvSpPr>
+          <p:cNvPr id="40" name="Shape 34"/>
+          <p:cNvSpPr/>
+          <p:nvPr/>
+        </p:nvSpPr>
+        <p:spPr>
+          <a:xfrm>
+            <a:off x="2898407" y="4386834"/>
+            <a:ext cx="868680" cy="868680"/>
+          </a:xfrm>
+          <a:prstGeom prst="ellipse">
+            <a:avLst/>
+          </a:prstGeom>
+          <a:solidFill>
+            <a:srgbClr val="1B2736"/>
+          </a:solidFill>
+          <a:ln w="19050">
+            <a:solidFill>
+              <a:srgbClr val="38BDF8"/>
+            </a:solidFill>
+            <a:prstDash val="solid"/>
+          </a:ln>
+        </p:spPr>
+      </p:sp>
+      <p:pic>
+        <p:nvPicPr>
+          <p:cNvPr id="41" name="Image 4" descr="preencoded.png">    </p:cNvPr>
+          <p:cNvPicPr>
+            <a:picLocks noChangeAspect="1"/>
+          </p:cNvPicPr>
+          <p:nvPr/>
+        </p:nvPicPr>
+        <p:blipFill>
+          <a:blip r:embed="rId5"/>
+          <a:stretch>
+            <a:fillRect/>
+          </a:stretch>
+        </p:blipFill>
+        <p:spPr>
+          <a:xfrm>
+            <a:off x="3132951" y="4621378"/>
+            <a:ext cx="399593" cy="399593"/>
+          </a:xfrm>
+          <a:prstGeom prst="rect">
+            <a:avLst/>
+          </a:prstGeom>
+        </p:spPr>
+      </p:pic>
+      <p:sp>
+        <p:nvSpPr>
+          <p:cNvPr id="42" name="Text 35"/>
+          <p:cNvSpPr/>
+          <p:nvPr/>
+        </p:nvSpPr>
+        <p:spPr>
+          <a:xfrm>
+            <a:off x="2189747" y="5324094"/>
+            <a:ext cx="2286000" cy="292608"/>
+          </a:xfrm>
+          <a:prstGeom prst="rect">
+            <a:avLst/>
+          </a:prstGeom>
+          <a:noFill/>
+          <a:ln/>
+        </p:spPr>
+        <p:txBody>
+          <a:bodyPr wrap="square" lIns="0" tIns="0" rIns="0" bIns="0" rtlCol="0" anchor="ctr"/>
+          <a:lstStyle/>
+          <a:p>
+            <a:pPr algn="ctr" indent="0" marL="0">
+              <a:buNone/>
+            </a:pPr>
+            <a:r>
+              <a:rPr lang="en-US" sz="1300" b="1" dirty="0">
+                <a:solidFill>
+                  <a:srgbClr val="E8EEF7"/>
+                </a:solidFill>
+                <a:latin typeface="Calibri" pitchFamily="34" charset="0"/>
+                <a:ea typeface="Calibri" pitchFamily="34" charset="-122"/>
+                <a:cs typeface="Calibri" pitchFamily="34" charset="-120"/>
+              </a:rPr>
+              <a:t>NOC &amp; operations</a:t>
+            </a:r>
+            <a:endParaRPr lang="en-US" sz="1300" dirty="0"/>
+          </a:p>
+        </p:txBody>
+      </p:sp>
+      <p:sp>
+        <p:nvSpPr>
+          <p:cNvPr id="43" name="Text 36"/>
+          <p:cNvSpPr/>
+          <p:nvPr/>
+        </p:nvSpPr>
+        <p:spPr>
+          <a:xfrm>
+            <a:off x="2189747" y="5598414"/>
+            <a:ext cx="2286000" cy="237744"/>
+          </a:xfrm>
+          <a:prstGeom prst="rect">
+            <a:avLst/>
+          </a:prstGeom>
+          <a:noFill/>
+          <a:ln/>
+        </p:spPr>
+        <p:txBody>
+          <a:bodyPr wrap="square" lIns="0" tIns="0" rIns="0" bIns="0" rtlCol="0" anchor="ctr"/>
+          <a:lstStyle/>
+          <a:p>
+            <a:pPr algn="ctr" indent="0" marL="0">
+              <a:buNone/>
+            </a:pPr>
+            <a:r>
+              <a:rPr lang="en-US" sz="1050" i="1" dirty="0">
+                <a:solidFill>
+                  <a:srgbClr val="34D399"/>
+                </a:solidFill>
+                <a:latin typeface="Calibri" pitchFamily="34" charset="0"/>
+                <a:ea typeface="Calibri" pitchFamily="34" charset="-122"/>
+                <a:cs typeface="Calibri" pitchFamily="34" charset="-120"/>
+              </a:rPr>
+              <a:t>live today</a:t>
+            </a:r>
+            <a:endParaRPr lang="en-US" sz="1050" dirty="0"/>
+          </a:p>
+        </p:txBody>
+      </p:sp>
+      <p:sp>
+        <p:nvSpPr>
+          <p:cNvPr id="44" name="Shape 37"/>
+          <p:cNvSpPr/>
+          <p:nvPr/>
+        </p:nvSpPr>
+        <p:spPr>
+          <a:xfrm>
+            <a:off x="3332747" y="3134106"/>
+            <a:ext cx="2761729" cy="843534"/>
+          </a:xfrm>
+          <a:prstGeom prst="line">
+            <a:avLst/>
+          </a:prstGeom>
+          <a:noFill/>
+          <a:ln w="19050">
+            <a:solidFill>
+              <a:srgbClr val="304258"/>
+            </a:solidFill>
+            <a:prstDash val="dash"/>
+          </a:ln>
+        </p:spPr>
+      </p:sp>
+      <p:sp>
+        <p:nvSpPr>
+          <p:cNvPr id="45" name="Shape 38"/>
+          <p:cNvSpPr/>
+          <p:nvPr/>
+        </p:nvSpPr>
+        <p:spPr>
+          <a:xfrm>
+            <a:off x="2898407" y="2699766"/>
+            <a:ext cx="868680" cy="868680"/>
+          </a:xfrm>
+          <a:prstGeom prst="ellipse">
+            <a:avLst/>
+          </a:prstGeom>
+          <a:solidFill>
+            <a:srgbClr val="1B2736"/>
+          </a:solidFill>
+          <a:ln w="19050">
+            <a:solidFill>
+              <a:srgbClr val="8BC1FF"/>
+            </a:solidFill>
+            <a:prstDash val="solid"/>
+          </a:ln>
+        </p:spPr>
+      </p:sp>
+      <p:pic>
+        <p:nvPicPr>
+          <p:cNvPr id="46" name="Image 5" descr="preencoded.png">    </p:cNvPr>
+          <p:cNvPicPr>
+            <a:picLocks noChangeAspect="1"/>
+          </p:cNvPicPr>
+          <p:nvPr/>
+        </p:nvPicPr>
+        <p:blipFill>
+          <a:blip r:embed="rId6"/>
+          <a:stretch>
+            <a:fillRect/>
+          </a:stretch>
+        </p:blipFill>
+        <p:spPr>
+          <a:xfrm>
+            <a:off x="3132951" y="2934310"/>
+            <a:ext cx="399593" cy="399593"/>
+          </a:xfrm>
+          <a:prstGeom prst="rect">
+            <a:avLst/>
+          </a:prstGeom>
+        </p:spPr>
+      </p:pic>
+      <p:sp>
+        <p:nvSpPr>
+          <p:cNvPr id="47" name="Text 39"/>
+          <p:cNvSpPr/>
+          <p:nvPr/>
+        </p:nvSpPr>
+        <p:spPr>
+          <a:xfrm>
+            <a:off x="2189747" y="2237994"/>
+            <a:ext cx="2286000" cy="292608"/>
+          </a:xfrm>
+          <a:prstGeom prst="rect">
+            <a:avLst/>
+          </a:prstGeom>
+          <a:noFill/>
+          <a:ln/>
+        </p:spPr>
+        <p:txBody>
+          <a:bodyPr wrap="square" lIns="0" tIns="0" rIns="0" bIns="0" rtlCol="0" anchor="ctr"/>
+          <a:lstStyle/>
+          <a:p>
+            <a:pPr algn="ctr" indent="0" marL="0">
+              <a:buNone/>
+            </a:pPr>
+            <a:r>
+              <a:rPr lang="en-US" sz="1300" b="1" dirty="0">
+                <a:solidFill>
+                  <a:srgbClr val="E8EEF7"/>
+                </a:solidFill>
+                <a:latin typeface="Calibri" pitchFamily="34" charset="0"/>
+                <a:ea typeface="Calibri" pitchFamily="34" charset="-122"/>
+                <a:cs typeface="Calibri" pitchFamily="34" charset="-120"/>
+              </a:rPr>
+              <a:t>Network planning</a:t>
+            </a:r>
+            <a:endParaRPr lang="en-US" sz="1300" dirty="0"/>
+          </a:p>
+        </p:txBody>
+      </p:sp>
+      <p:sp>
+        <p:nvSpPr>
+          <p:cNvPr id="48" name="Text 40"/>
+          <p:cNvSpPr/>
+          <p:nvPr/>
+        </p:nvSpPr>
+        <p:spPr>
+          <a:xfrm>
+            <a:off x="2189747" y="2512314"/>
+            <a:ext cx="2286000" cy="237744"/>
+          </a:xfrm>
+          <a:prstGeom prst="rect">
+            <a:avLst/>
+          </a:prstGeom>
+          <a:noFill/>
+          <a:ln/>
+        </p:spPr>
+        <p:txBody>
+          <a:bodyPr wrap="square" lIns="0" tIns="0" rIns="0" bIns="0" rtlCol="0" anchor="ctr"/>
+          <a:lstStyle/>
+          <a:p>
+            <a:pPr algn="ctr" indent="0" marL="0">
+              <a:buNone/>
+            </a:pPr>
+            <a:r>
+              <a:rPr lang="en-US" sz="1050" i="1" dirty="0">
                 <a:solidFill>
                   <a:srgbClr val="A9B7C9"/>
                 </a:solidFill>
@@ -8538,22 +8821,22 @@
                 <a:ea typeface="Calibri" pitchFamily="34" charset="-122"/>
                 <a:cs typeface="Calibri" pitchFamily="34" charset="-120"/>
               </a:rPr>
-              <a:t>Detectors that recommend the fix — and learn from every outcome.</a:t>
+              <a:t>planned</a:t>
             </a:r>
-            <a:endParaRPr lang="en-US" sz="1350" dirty="0"/>
-          </a:p>
-        </p:txBody>
-      </p:sp>
-      <p:sp>
-        <p:nvSpPr>
-          <p:cNvPr id="35" name="Text 30"/>
-          <p:cNvSpPr/>
-          <p:nvPr/>
-        </p:nvSpPr>
-        <p:spPr>
-          <a:xfrm>
-            <a:off x="6903720" y="3630168"/>
-            <a:ext cx="457200" cy="457200"/>
+            <a:endParaRPr lang="en-US" sz="1050" dirty="0"/>
+          </a:p>
+        </p:txBody>
+      </p:sp>
+      <p:sp>
+        <p:nvSpPr>
+          <p:cNvPr id="49" name="Shape 41"/>
+          <p:cNvSpPr/>
+          <p:nvPr/>
+        </p:nvSpPr>
+        <p:spPr>
+          <a:xfrm>
+            <a:off x="5225796" y="3108960"/>
+            <a:ext cx="1737360" cy="1737360"/>
           </a:xfrm>
           <a:prstGeom prst="ellipse">
             <a:avLst/>
@@ -8561,6 +8844,29 @@
           <a:solidFill>
             <a:srgbClr val="223246"/>
           </a:solidFill>
+          <a:ln w="25400">
+            <a:solidFill>
+              <a:srgbClr val="38BDF8"/>
+            </a:solidFill>
+            <a:prstDash val="solid"/>
+          </a:ln>
+        </p:spPr>
+      </p:sp>
+      <p:sp>
+        <p:nvSpPr>
+          <p:cNvPr id="50" name="Text 42"/>
+          <p:cNvSpPr/>
+          <p:nvPr/>
+        </p:nvSpPr>
+        <p:spPr>
+          <a:xfrm>
+            <a:off x="5225796" y="3108960"/>
+            <a:ext cx="1737360" cy="1737360"/>
+          </a:xfrm>
+          <a:prstGeom prst="rect">
+            <a:avLst/>
+          </a:prstGeom>
+          <a:noFill/>
           <a:ln/>
         </p:spPr>
         <p:txBody>
@@ -8571,49 +8877,7 @@
               <a:buNone/>
             </a:pPr>
             <a:r>
-              <a:rPr lang="en-US" sz="1500" b="1" dirty="0">
-                <a:solidFill>
-                  <a:srgbClr val="38BDF8"/>
-                </a:solidFill>
-                <a:latin typeface="Calibri" pitchFamily="34" charset="0"/>
-                <a:ea typeface="Calibri" pitchFamily="34" charset="-122"/>
-                <a:cs typeface="Calibri" pitchFamily="34" charset="-120"/>
-              </a:rPr>
-              <a:t>2</a:t>
-            </a:r>
-            <a:endParaRPr lang="en-US" sz="1500" dirty="0"/>
-          </a:p>
-        </p:txBody>
-      </p:sp>
-      <p:sp>
-        <p:nvSpPr>
-          <p:cNvPr id="36" name="Text 31"/>
-          <p:cNvSpPr/>
-          <p:nvPr/>
-        </p:nvSpPr>
-        <p:spPr>
-          <a:xfrm>
-            <a:off x="7589520" y="3611880"/>
-            <a:ext cx="3840480" cy="1234440"/>
-          </a:xfrm>
-          <a:prstGeom prst="rect">
-            <a:avLst/>
-          </a:prstGeom>
-          <a:noFill/>
-          <a:ln/>
-        </p:spPr>
-        <p:txBody>
-          <a:bodyPr wrap="square" lIns="0" tIns="0" rIns="0" bIns="0" rtlCol="0" anchor="t"/>
-          <a:lstStyle/>
-          <a:p>
-            <a:pPr indent="0" marL="0">
-              <a:lnSpc>
-                <a:spcPct val="113000"/>
-              </a:lnSpc>
-              <a:buNone/>
-            </a:pPr>
-            <a:r>
-              <a:rPr lang="en-US" sz="1350" b="1" dirty="0">
+              <a:rPr lang="en-US" sz="1600" b="1" dirty="0">
                 <a:solidFill>
                   <a:srgbClr val="E8EEF7"/>
                 </a:solidFill>
@@ -8621,19 +8885,16 @@
                 <a:ea typeface="Calibri" pitchFamily="34" charset="-122"/>
                 <a:cs typeface="Calibri" pitchFamily="34" charset="-120"/>
               </a:rPr>
-              <a:t>Closed-loop automation</a:t>
+              <a:t>PrimeNet</a:t>
             </a:r>
-            <a:endParaRPr lang="en-US" sz="1350" dirty="0"/>
-          </a:p>
-          <a:p>
-            <a:pPr indent="0" marL="0">
-              <a:lnSpc>
-                <a:spcPct val="113000"/>
-              </a:lnSpc>
+            <a:endParaRPr lang="en-US" sz="1600" dirty="0"/>
+          </a:p>
+          <a:p>
+            <a:pPr algn="ctr" indent="0" marL="0">
               <a:buNone/>
             </a:pPr>
             <a:r>
-              <a:rPr lang="en-US" sz="1100" dirty="0">
+              <a:rPr lang="en-US" sz="1050" dirty="0">
                 <a:solidFill>
                   <a:srgbClr val="A9B7C9"/>
                 </a:solidFill>
@@ -8641,112 +8902,9 @@
                 <a:ea typeface="Calibri" pitchFamily="34" charset="-122"/>
                 <a:cs typeface="Calibri" pitchFamily="34" charset="-120"/>
               </a:rPr>
-              <a:t>From flagged issue to applied change with one approval, not a chain of manual steps.</a:t>
+              <a:t>network truth</a:t>
             </a:r>
-            <a:endParaRPr lang="en-US" sz="1350" dirty="0"/>
-          </a:p>
-        </p:txBody>
-      </p:sp>
-      <p:sp>
-        <p:nvSpPr>
-          <p:cNvPr id="37" name="Text 32"/>
-          <p:cNvSpPr/>
-          <p:nvPr/>
-        </p:nvSpPr>
-        <p:spPr>
-          <a:xfrm>
-            <a:off x="6903720" y="4956048"/>
-            <a:ext cx="457200" cy="457200"/>
-          </a:xfrm>
-          <a:prstGeom prst="ellipse">
-            <a:avLst/>
-          </a:prstGeom>
-          <a:solidFill>
-            <a:srgbClr val="223246"/>
-          </a:solidFill>
-          <a:ln/>
-        </p:spPr>
-        <p:txBody>
-          <a:bodyPr wrap="square" lIns="0" tIns="0" rIns="0" bIns="0" rtlCol="0" anchor="ctr"/>
-          <a:lstStyle/>
-          <a:p>
-            <a:pPr algn="ctr" indent="0" marL="0">
-              <a:buNone/>
-            </a:pPr>
-            <a:r>
-              <a:rPr lang="en-US" sz="1500" b="1" dirty="0">
-                <a:solidFill>
-                  <a:srgbClr val="38BDF8"/>
-                </a:solidFill>
-                <a:latin typeface="Calibri" pitchFamily="34" charset="0"/>
-                <a:ea typeface="Calibri" pitchFamily="34" charset="-122"/>
-                <a:cs typeface="Calibri" pitchFamily="34" charset="-120"/>
-              </a:rPr>
-              <a:t>3</a:t>
-            </a:r>
-            <a:endParaRPr lang="en-US" sz="1500" dirty="0"/>
-          </a:p>
-        </p:txBody>
-      </p:sp>
-      <p:sp>
-        <p:nvSpPr>
-          <p:cNvPr id="38" name="Text 33"/>
-          <p:cNvSpPr/>
-          <p:nvPr/>
-        </p:nvSpPr>
-        <p:spPr>
-          <a:xfrm>
-            <a:off x="7589520" y="4937760"/>
-            <a:ext cx="3840480" cy="1234440"/>
-          </a:xfrm>
-          <a:prstGeom prst="rect">
-            <a:avLst/>
-          </a:prstGeom>
-          <a:noFill/>
-          <a:ln/>
-        </p:spPr>
-        <p:txBody>
-          <a:bodyPr wrap="square" lIns="0" tIns="0" rIns="0" bIns="0" rtlCol="0" anchor="t"/>
-          <a:lstStyle/>
-          <a:p>
-            <a:pPr indent="0" marL="0">
-              <a:lnSpc>
-                <a:spcPct val="113000"/>
-              </a:lnSpc>
-              <a:buNone/>
-            </a:pPr>
-            <a:r>
-              <a:rPr lang="en-US" sz="1350" b="1" dirty="0">
-                <a:solidFill>
-                  <a:srgbClr val="E8EEF7"/>
-                </a:solidFill>
-                <a:latin typeface="Calibri" pitchFamily="34" charset="0"/>
-                <a:ea typeface="Calibri" pitchFamily="34" charset="-122"/>
-                <a:cs typeface="Calibri" pitchFamily="34" charset="-120"/>
-              </a:rPr>
-              <a:t>A platform that scales</a:t>
-            </a:r>
-            <a:endParaRPr lang="en-US" sz="1350" dirty="0"/>
-          </a:p>
-          <a:p>
-            <a:pPr indent="0" marL="0">
-              <a:lnSpc>
-                <a:spcPct val="113000"/>
-              </a:lnSpc>
-              <a:buNone/>
-            </a:pPr>
-            <a:r>
-              <a:rPr lang="en-US" sz="1100" dirty="0">
-                <a:solidFill>
-                  <a:srgbClr val="A9B7C9"/>
-                </a:solidFill>
-                <a:latin typeface="Calibri" pitchFamily="34" charset="0"/>
-                <a:ea typeface="Calibri" pitchFamily="34" charset="-122"/>
-                <a:cs typeface="Calibri" pitchFamily="34" charset="-120"/>
-              </a:rPr>
-              <a:t>New technologies and new data domains on the same foundation — a blueprint other Zain operations can adopt.</a:t>
-            </a:r>
-            <a:endParaRPr lang="en-US" sz="1350" dirty="0"/>
+            <a:endParaRPr lang="en-US" sz="1600" dirty="0"/>
           </a:p>
         </p:txBody>
       </p:sp>
@@ -9153,7 +9311,7 @@
                 <a:ea typeface="Calibri" pitchFamily="34" charset="-122"/>
                 <a:cs typeface="Calibri" pitchFamily="34" charset="-120"/>
               </a:rPr>
-              <a:t>06 — BEYOND ENGINEERING</a:t>
+              <a:t>06 — THE ROAD AHEAD</a:t>
             </a:r>
             <a:endParaRPr lang="en-US" sz="1050" dirty="0"/>
           </a:p>
@@ -9192,7 +9350,7 @@
                 <a:ea typeface="Calibri" pitchFamily="34" charset="-122"/>
                 <a:cs typeface="Calibri" pitchFamily="34" charset="-120"/>
               </a:rPr>
-              <a:t>One source of truth for every department</a:t>
+              <a:t>From one team's tool, to Zain's nervous system</a:t>
             </a:r>
             <a:endParaRPr lang="en-US" sz="2800" dirty="0"/>
           </a:p>
@@ -9200,14 +9358,85 @@
       </p:sp>
       <p:sp>
         <p:nvSpPr>
-          <p:cNvPr id="19" name="Text 17"/>
-          <p:cNvSpPr/>
-          <p:nvPr/>
-        </p:nvSpPr>
-        <p:spPr>
-          <a:xfrm>
-            <a:off x="548640" y="1371600"/>
-            <a:ext cx="11064240" cy="292608"/>
+          <p:cNvPr id="19" name="Shape 17"/>
+          <p:cNvSpPr/>
+          <p:nvPr/>
+        </p:nvSpPr>
+        <p:spPr>
+          <a:xfrm>
+            <a:off x="548640" y="4572000"/>
+            <a:ext cx="2697480" cy="1417320"/>
+          </a:xfrm>
+          <a:prstGeom prst="roundRect">
+            <a:avLst>
+              <a:gd name="adj" fmla="val 6452"/>
+            </a:avLst>
+          </a:prstGeom>
+          <a:solidFill>
+            <a:srgbClr val="182230"/>
+          </a:solidFill>
+          <a:ln w="19050">
+            <a:solidFill>
+              <a:srgbClr val="304258"/>
+            </a:solidFill>
+            <a:prstDash val="solid"/>
+          </a:ln>
+        </p:spPr>
+      </p:sp>
+      <p:sp>
+        <p:nvSpPr>
+          <p:cNvPr id="20" name="Shape 18"/>
+          <p:cNvSpPr/>
+          <p:nvPr/>
+        </p:nvSpPr>
+        <p:spPr>
+          <a:xfrm>
+            <a:off x="749808" y="4773168"/>
+            <a:ext cx="457200" cy="457200"/>
+          </a:xfrm>
+          <a:prstGeom prst="ellipse">
+            <a:avLst/>
+          </a:prstGeom>
+          <a:solidFill>
+            <a:srgbClr val="0F1722"/>
+          </a:solidFill>
+          <a:ln/>
+        </p:spPr>
+      </p:sp>
+      <p:pic>
+        <p:nvPicPr>
+          <p:cNvPr id="21" name="Image 0" descr="preencoded.png">    </p:cNvPr>
+          <p:cNvPicPr>
+            <a:picLocks noChangeAspect="1"/>
+          </p:cNvPicPr>
+          <p:nvPr/>
+        </p:nvPicPr>
+        <p:blipFill>
+          <a:blip r:embed="rId1"/>
+          <a:stretch>
+            <a:fillRect/>
+          </a:stretch>
+        </p:blipFill>
+        <p:spPr>
+          <a:xfrm>
+            <a:off x="854964" y="4878324"/>
+            <a:ext cx="246888" cy="246888"/>
+          </a:xfrm>
+          <a:prstGeom prst="rect">
+            <a:avLst/>
+          </a:prstGeom>
+        </p:spPr>
+      </p:pic>
+      <p:sp>
+        <p:nvSpPr>
+          <p:cNvPr id="22" name="Text 19"/>
+          <p:cNvSpPr/>
+          <p:nvPr/>
+        </p:nvSpPr>
+        <p:spPr>
+          <a:xfrm>
+            <a:off x="1325880" y="4791456"/>
+            <a:ext cx="1783080" cy="237744"/>
           </a:xfrm>
           <a:prstGeom prst="rect">
             <a:avLst/>
@@ -9223,667 +9452,7 @@
               <a:buNone/>
             </a:pPr>
             <a:r>
-              <a:rPr lang="en-US" sz="1250" i="1" dirty="0">
-                <a:solidFill>
-                  <a:srgbClr val="8BC1FF"/>
-                </a:solidFill>
-                <a:latin typeface="Calibri" pitchFamily="34" charset="0"/>
-                <a:ea typeface="Calibri" pitchFamily="34" charset="-122"/>
-                <a:cs typeface="Calibri" pitchFamily="34" charset="-120"/>
-              </a:rPr>
-              <a:t>The Power BI bridge is already live: network insight can be delivered where each team works — no engineering degree required.</a:t>
-            </a:r>
-            <a:endParaRPr lang="en-US" sz="1250" dirty="0"/>
-          </a:p>
-        </p:txBody>
-      </p:sp>
-      <p:sp>
-        <p:nvSpPr>
-          <p:cNvPr id="20" name="Shape 18"/>
-          <p:cNvSpPr/>
-          <p:nvPr/>
-        </p:nvSpPr>
-        <p:spPr>
-          <a:xfrm>
-            <a:off x="548640" y="1828800"/>
-            <a:ext cx="2139696" cy="1371600"/>
-          </a:xfrm>
-          <a:prstGeom prst="roundRect">
-            <a:avLst>
-              <a:gd name="adj" fmla="val 6667"/>
-            </a:avLst>
-          </a:prstGeom>
-          <a:solidFill>
-            <a:srgbClr val="182230"/>
-          </a:solidFill>
-          <a:ln w="12700">
-            <a:solidFill>
-              <a:srgbClr val="304258"/>
-            </a:solidFill>
-            <a:prstDash val="solid"/>
-          </a:ln>
-        </p:spPr>
-      </p:sp>
-      <p:sp>
-        <p:nvSpPr>
-          <p:cNvPr id="21" name="Text 19"/>
-          <p:cNvSpPr/>
-          <p:nvPr/>
-        </p:nvSpPr>
-        <p:spPr>
-          <a:xfrm>
-            <a:off x="731520" y="1975104"/>
-            <a:ext cx="1773936" cy="502920"/>
-          </a:xfrm>
-          <a:prstGeom prst="rect">
-            <a:avLst/>
-          </a:prstGeom>
-          <a:noFill/>
-          <a:ln/>
-        </p:spPr>
-        <p:txBody>
-          <a:bodyPr wrap="square" lIns="0" tIns="0" rIns="0" bIns="0" rtlCol="0" anchor="ctr"/>
-          <a:lstStyle/>
-          <a:p>
-            <a:pPr indent="0" marL="0">
-              <a:lnSpc>
-                <a:spcPct val="102000"/>
-              </a:lnSpc>
-              <a:buNone/>
-            </a:pPr>
-            <a:r>
-              <a:rPr lang="en-US" sz="1200" b="1" dirty="0">
-                <a:solidFill>
-                  <a:srgbClr val="E8EEF7"/>
-                </a:solidFill>
-                <a:latin typeface="Calibri" pitchFamily="34" charset="0"/>
-                <a:ea typeface="Calibri" pitchFamily="34" charset="-122"/>
-                <a:cs typeface="Calibri" pitchFamily="34" charset="-120"/>
-              </a:rPr>
-              <a:t>NOC &amp; Operations</a:t>
-            </a:r>
-            <a:endParaRPr lang="en-US" sz="1200" dirty="0"/>
-          </a:p>
-        </p:txBody>
-      </p:sp>
-      <p:sp>
-        <p:nvSpPr>
-          <p:cNvPr id="22" name="Text 20"/>
-          <p:cNvSpPr/>
-          <p:nvPr/>
-        </p:nvSpPr>
-        <p:spPr>
-          <a:xfrm>
-            <a:off x="731520" y="2487168"/>
-            <a:ext cx="1773936" cy="640080"/>
-          </a:xfrm>
-          <a:prstGeom prst="rect">
-            <a:avLst/>
-          </a:prstGeom>
-          <a:noFill/>
-          <a:ln/>
-        </p:spPr>
-        <p:txBody>
-          <a:bodyPr wrap="square" lIns="0" tIns="0" rIns="0" bIns="0" rtlCol="0" anchor="ctr"/>
-          <a:lstStyle/>
-          <a:p>
-            <a:pPr indent="0" marL="0">
-              <a:lnSpc>
-                <a:spcPct val="110000"/>
-              </a:lnSpc>
-              <a:buNone/>
-            </a:pPr>
-            <a:r>
-              <a:rPr lang="en-US" sz="1000" dirty="0">
-                <a:solidFill>
-                  <a:srgbClr val="A9B7C9"/>
-                </a:solidFill>
-                <a:latin typeface="Calibri" pitchFamily="34" charset="0"/>
-                <a:ea typeface="Calibri" pitchFamily="34" charset="-122"/>
-                <a:cs typeface="Calibri" pitchFamily="34" charset="-120"/>
-              </a:rPr>
-              <a:t>Live health, fewer blind spots</a:t>
-            </a:r>
-            <a:endParaRPr lang="en-US" sz="1000" dirty="0"/>
-          </a:p>
-        </p:txBody>
-      </p:sp>
-      <p:sp>
-        <p:nvSpPr>
-          <p:cNvPr id="23" name="Shape 21"/>
-          <p:cNvSpPr/>
-          <p:nvPr/>
-        </p:nvSpPr>
-        <p:spPr>
-          <a:xfrm>
-            <a:off x="2788920" y="1828800"/>
-            <a:ext cx="2139696" cy="1371600"/>
-          </a:xfrm>
-          <a:prstGeom prst="roundRect">
-            <a:avLst>
-              <a:gd name="adj" fmla="val 6667"/>
-            </a:avLst>
-          </a:prstGeom>
-          <a:solidFill>
-            <a:srgbClr val="182230"/>
-          </a:solidFill>
-          <a:ln w="12700">
-            <a:solidFill>
-              <a:srgbClr val="304258"/>
-            </a:solidFill>
-            <a:prstDash val="solid"/>
-          </a:ln>
-        </p:spPr>
-      </p:sp>
-      <p:sp>
-        <p:nvSpPr>
-          <p:cNvPr id="24" name="Text 22"/>
-          <p:cNvSpPr/>
-          <p:nvPr/>
-        </p:nvSpPr>
-        <p:spPr>
-          <a:xfrm>
-            <a:off x="2971800" y="1975104"/>
-            <a:ext cx="1773936" cy="502920"/>
-          </a:xfrm>
-          <a:prstGeom prst="rect">
-            <a:avLst/>
-          </a:prstGeom>
-          <a:noFill/>
-          <a:ln/>
-        </p:spPr>
-        <p:txBody>
-          <a:bodyPr wrap="square" lIns="0" tIns="0" rIns="0" bIns="0" rtlCol="0" anchor="ctr"/>
-          <a:lstStyle/>
-          <a:p>
-            <a:pPr indent="0" marL="0">
-              <a:lnSpc>
-                <a:spcPct val="102000"/>
-              </a:lnSpc>
-              <a:buNone/>
-            </a:pPr>
-            <a:r>
-              <a:rPr lang="en-US" sz="1200" b="1" dirty="0">
-                <a:solidFill>
-                  <a:srgbClr val="E8EEF7"/>
-                </a:solidFill>
-                <a:latin typeface="Calibri" pitchFamily="34" charset="0"/>
-                <a:ea typeface="Calibri" pitchFamily="34" charset="-122"/>
-                <a:cs typeface="Calibri" pitchFamily="34" charset="-120"/>
-              </a:rPr>
-              <a:t>Technology Planning</a:t>
-            </a:r>
-            <a:endParaRPr lang="en-US" sz="1200" dirty="0"/>
-          </a:p>
-        </p:txBody>
-      </p:sp>
-      <p:sp>
-        <p:nvSpPr>
-          <p:cNvPr id="25" name="Text 23"/>
-          <p:cNvSpPr/>
-          <p:nvPr/>
-        </p:nvSpPr>
-        <p:spPr>
-          <a:xfrm>
-            <a:off x="2971800" y="2487168"/>
-            <a:ext cx="1773936" cy="640080"/>
-          </a:xfrm>
-          <a:prstGeom prst="rect">
-            <a:avLst/>
-          </a:prstGeom>
-          <a:noFill/>
-          <a:ln/>
-        </p:spPr>
-        <p:txBody>
-          <a:bodyPr wrap="square" lIns="0" tIns="0" rIns="0" bIns="0" rtlCol="0" anchor="ctr"/>
-          <a:lstStyle/>
-          <a:p>
-            <a:pPr indent="0" marL="0">
-              <a:lnSpc>
-                <a:spcPct val="110000"/>
-              </a:lnSpc>
-              <a:buNone/>
-            </a:pPr>
-            <a:r>
-              <a:rPr lang="en-US" sz="1000" dirty="0">
-                <a:solidFill>
-                  <a:srgbClr val="A9B7C9"/>
-                </a:solidFill>
-                <a:latin typeface="Calibri" pitchFamily="34" charset="0"/>
-                <a:ea typeface="Calibri" pitchFamily="34" charset="-122"/>
-                <a:cs typeface="Calibri" pitchFamily="34" charset="-120"/>
-              </a:rPr>
-              <a:t>Invest where the data shows demand</a:t>
-            </a:r>
-            <a:endParaRPr lang="en-US" sz="1000" dirty="0"/>
-          </a:p>
-        </p:txBody>
-      </p:sp>
-      <p:sp>
-        <p:nvSpPr>
-          <p:cNvPr id="26" name="Shape 24"/>
-          <p:cNvSpPr/>
-          <p:nvPr/>
-        </p:nvSpPr>
-        <p:spPr>
-          <a:xfrm>
-            <a:off x="5029200" y="1828800"/>
-            <a:ext cx="2139696" cy="1371600"/>
-          </a:xfrm>
-          <a:prstGeom prst="roundRect">
-            <a:avLst>
-              <a:gd name="adj" fmla="val 6667"/>
-            </a:avLst>
-          </a:prstGeom>
-          <a:solidFill>
-            <a:srgbClr val="182230"/>
-          </a:solidFill>
-          <a:ln w="12700">
-            <a:solidFill>
-              <a:srgbClr val="304258"/>
-            </a:solidFill>
-            <a:prstDash val="solid"/>
-          </a:ln>
-        </p:spPr>
-      </p:sp>
-      <p:sp>
-        <p:nvSpPr>
-          <p:cNvPr id="27" name="Text 25"/>
-          <p:cNvSpPr/>
-          <p:nvPr/>
-        </p:nvSpPr>
-        <p:spPr>
-          <a:xfrm>
-            <a:off x="5212080" y="1975104"/>
-            <a:ext cx="1773936" cy="502920"/>
-          </a:xfrm>
-          <a:prstGeom prst="rect">
-            <a:avLst/>
-          </a:prstGeom>
-          <a:noFill/>
-          <a:ln/>
-        </p:spPr>
-        <p:txBody>
-          <a:bodyPr wrap="square" lIns="0" tIns="0" rIns="0" bIns="0" rtlCol="0" anchor="ctr"/>
-          <a:lstStyle/>
-          <a:p>
-            <a:pPr indent="0" marL="0">
-              <a:lnSpc>
-                <a:spcPct val="102000"/>
-              </a:lnSpc>
-              <a:buNone/>
-            </a:pPr>
-            <a:r>
-              <a:rPr lang="en-US" sz="1200" b="1" dirty="0">
-                <a:solidFill>
-                  <a:srgbClr val="E8EEF7"/>
-                </a:solidFill>
-                <a:latin typeface="Calibri" pitchFamily="34" charset="0"/>
-                <a:ea typeface="Calibri" pitchFamily="34" charset="-122"/>
-                <a:cs typeface="Calibri" pitchFamily="34" charset="-120"/>
-              </a:rPr>
-              <a:t>Commercial &amp; Marketing</a:t>
-            </a:r>
-            <a:endParaRPr lang="en-US" sz="1200" dirty="0"/>
-          </a:p>
-        </p:txBody>
-      </p:sp>
-      <p:sp>
-        <p:nvSpPr>
-          <p:cNvPr id="28" name="Text 26"/>
-          <p:cNvSpPr/>
-          <p:nvPr/>
-        </p:nvSpPr>
-        <p:spPr>
-          <a:xfrm>
-            <a:off x="5212080" y="2487168"/>
-            <a:ext cx="1773936" cy="640080"/>
-          </a:xfrm>
-          <a:prstGeom prst="rect">
-            <a:avLst/>
-          </a:prstGeom>
-          <a:noFill/>
-          <a:ln/>
-        </p:spPr>
-        <p:txBody>
-          <a:bodyPr wrap="square" lIns="0" tIns="0" rIns="0" bIns="0" rtlCol="0" anchor="ctr"/>
-          <a:lstStyle/>
-          <a:p>
-            <a:pPr indent="0" marL="0">
-              <a:lnSpc>
-                <a:spcPct val="110000"/>
-              </a:lnSpc>
-              <a:buNone/>
-            </a:pPr>
-            <a:r>
-              <a:rPr lang="en-US" sz="1000" dirty="0">
-                <a:solidFill>
-                  <a:srgbClr val="A9B7C9"/>
-                </a:solidFill>
-                <a:latin typeface="Calibri" pitchFamily="34" charset="0"/>
-                <a:ea typeface="Calibri" pitchFamily="34" charset="-122"/>
-                <a:cs typeface="Calibri" pitchFamily="34" charset="-120"/>
-              </a:rPr>
-              <a:t>Launch offers where the network can carry them</a:t>
-            </a:r>
-            <a:endParaRPr lang="en-US" sz="1000" dirty="0"/>
-          </a:p>
-        </p:txBody>
-      </p:sp>
-      <p:sp>
-        <p:nvSpPr>
-          <p:cNvPr id="29" name="Shape 27"/>
-          <p:cNvSpPr/>
-          <p:nvPr/>
-        </p:nvSpPr>
-        <p:spPr>
-          <a:xfrm>
-            <a:off x="7269480" y="1828800"/>
-            <a:ext cx="2139696" cy="1371600"/>
-          </a:xfrm>
-          <a:prstGeom prst="roundRect">
-            <a:avLst>
-              <a:gd name="adj" fmla="val 6667"/>
-            </a:avLst>
-          </a:prstGeom>
-          <a:solidFill>
-            <a:srgbClr val="182230"/>
-          </a:solidFill>
-          <a:ln w="12700">
-            <a:solidFill>
-              <a:srgbClr val="304258"/>
-            </a:solidFill>
-            <a:prstDash val="solid"/>
-          </a:ln>
-        </p:spPr>
-      </p:sp>
-      <p:sp>
-        <p:nvSpPr>
-          <p:cNvPr id="30" name="Text 28"/>
-          <p:cNvSpPr/>
-          <p:nvPr/>
-        </p:nvSpPr>
-        <p:spPr>
-          <a:xfrm>
-            <a:off x="7452360" y="1975104"/>
-            <a:ext cx="1773936" cy="502920"/>
-          </a:xfrm>
-          <a:prstGeom prst="rect">
-            <a:avLst/>
-          </a:prstGeom>
-          <a:noFill/>
-          <a:ln/>
-        </p:spPr>
-        <p:txBody>
-          <a:bodyPr wrap="square" lIns="0" tIns="0" rIns="0" bIns="0" rtlCol="0" anchor="ctr"/>
-          <a:lstStyle/>
-          <a:p>
-            <a:pPr indent="0" marL="0">
-              <a:lnSpc>
-                <a:spcPct val="102000"/>
-              </a:lnSpc>
-              <a:buNone/>
-            </a:pPr>
-            <a:r>
-              <a:rPr lang="en-US" sz="1200" b="1" dirty="0">
-                <a:solidFill>
-                  <a:srgbClr val="E8EEF7"/>
-                </a:solidFill>
-                <a:latin typeface="Calibri" pitchFamily="34" charset="0"/>
-                <a:ea typeface="Calibri" pitchFamily="34" charset="-122"/>
-                <a:cs typeface="Calibri" pitchFamily="34" charset="-120"/>
-              </a:rPr>
-              <a:t>Customer Care</a:t>
-            </a:r>
-            <a:endParaRPr lang="en-US" sz="1200" dirty="0"/>
-          </a:p>
-        </p:txBody>
-      </p:sp>
-      <p:sp>
-        <p:nvSpPr>
-          <p:cNvPr id="31" name="Text 29"/>
-          <p:cNvSpPr/>
-          <p:nvPr/>
-        </p:nvSpPr>
-        <p:spPr>
-          <a:xfrm>
-            <a:off x="7452360" y="2487168"/>
-            <a:ext cx="1773936" cy="640080"/>
-          </a:xfrm>
-          <a:prstGeom prst="rect">
-            <a:avLst/>
-          </a:prstGeom>
-          <a:noFill/>
-          <a:ln/>
-        </p:spPr>
-        <p:txBody>
-          <a:bodyPr wrap="square" lIns="0" tIns="0" rIns="0" bIns="0" rtlCol="0" anchor="ctr"/>
-          <a:lstStyle/>
-          <a:p>
-            <a:pPr indent="0" marL="0">
-              <a:lnSpc>
-                <a:spcPct val="110000"/>
-              </a:lnSpc>
-              <a:buNone/>
-            </a:pPr>
-            <a:r>
-              <a:rPr lang="en-US" sz="1000" dirty="0">
-                <a:solidFill>
-                  <a:srgbClr val="A9B7C9"/>
-                </a:solidFill>
-                <a:latin typeface="Calibri" pitchFamily="34" charset="0"/>
-                <a:ea typeface="Calibri" pitchFamily="34" charset="-122"/>
-                <a:cs typeface="Calibri" pitchFamily="34" charset="-120"/>
-              </a:rPr>
-              <a:t>See the cell behind the complaint</a:t>
-            </a:r>
-            <a:endParaRPr lang="en-US" sz="1000" dirty="0"/>
-          </a:p>
-        </p:txBody>
-      </p:sp>
-      <p:sp>
-        <p:nvSpPr>
-          <p:cNvPr id="32" name="Shape 30"/>
-          <p:cNvSpPr/>
-          <p:nvPr/>
-        </p:nvSpPr>
-        <p:spPr>
-          <a:xfrm>
-            <a:off x="9509760" y="1828800"/>
-            <a:ext cx="2139696" cy="1371600"/>
-          </a:xfrm>
-          <a:prstGeom prst="roundRect">
-            <a:avLst>
-              <a:gd name="adj" fmla="val 6667"/>
-            </a:avLst>
-          </a:prstGeom>
-          <a:solidFill>
-            <a:srgbClr val="182230"/>
-          </a:solidFill>
-          <a:ln w="12700">
-            <a:solidFill>
-              <a:srgbClr val="304258"/>
-            </a:solidFill>
-            <a:prstDash val="solid"/>
-          </a:ln>
-        </p:spPr>
-      </p:sp>
-      <p:sp>
-        <p:nvSpPr>
-          <p:cNvPr id="33" name="Text 31"/>
-          <p:cNvSpPr/>
-          <p:nvPr/>
-        </p:nvSpPr>
-        <p:spPr>
-          <a:xfrm>
-            <a:off x="9692640" y="1975104"/>
-            <a:ext cx="1773936" cy="502920"/>
-          </a:xfrm>
-          <a:prstGeom prst="rect">
-            <a:avLst/>
-          </a:prstGeom>
-          <a:noFill/>
-          <a:ln/>
-        </p:spPr>
-        <p:txBody>
-          <a:bodyPr wrap="square" lIns="0" tIns="0" rIns="0" bIns="0" rtlCol="0" anchor="ctr"/>
-          <a:lstStyle/>
-          <a:p>
-            <a:pPr indent="0" marL="0">
-              <a:lnSpc>
-                <a:spcPct val="102000"/>
-              </a:lnSpc>
-              <a:buNone/>
-            </a:pPr>
-            <a:r>
-              <a:rPr lang="en-US" sz="1200" b="1" dirty="0">
-                <a:solidFill>
-                  <a:srgbClr val="E8EEF7"/>
-                </a:solidFill>
-                <a:latin typeface="Calibri" pitchFamily="34" charset="0"/>
-                <a:ea typeface="Calibri" pitchFamily="34" charset="-122"/>
-                <a:cs typeface="Calibri" pitchFamily="34" charset="-120"/>
-              </a:rPr>
-              <a:t>Executive</a:t>
-            </a:r>
-            <a:endParaRPr lang="en-US" sz="1200" dirty="0"/>
-          </a:p>
-        </p:txBody>
-      </p:sp>
-      <p:sp>
-        <p:nvSpPr>
-          <p:cNvPr id="34" name="Text 32"/>
-          <p:cNvSpPr/>
-          <p:nvPr/>
-        </p:nvSpPr>
-        <p:spPr>
-          <a:xfrm>
-            <a:off x="9692640" y="2487168"/>
-            <a:ext cx="1773936" cy="640080"/>
-          </a:xfrm>
-          <a:prstGeom prst="rect">
-            <a:avLst/>
-          </a:prstGeom>
-          <a:noFill/>
-          <a:ln/>
-        </p:spPr>
-        <p:txBody>
-          <a:bodyPr wrap="square" lIns="0" tIns="0" rIns="0" bIns="0" rtlCol="0" anchor="ctr"/>
-          <a:lstStyle/>
-          <a:p>
-            <a:pPr indent="0" marL="0">
-              <a:lnSpc>
-                <a:spcPct val="110000"/>
-              </a:lnSpc>
-              <a:buNone/>
-            </a:pPr>
-            <a:r>
-              <a:rPr lang="en-US" sz="1000" dirty="0">
-                <a:solidFill>
-                  <a:srgbClr val="A9B7C9"/>
-                </a:solidFill>
-                <a:latin typeface="Calibri" pitchFamily="34" charset="0"/>
-                <a:ea typeface="Calibri" pitchFamily="34" charset="-122"/>
-                <a:cs typeface="Calibri" pitchFamily="34" charset="-120"/>
-              </a:rPr>
-              <a:t>One dashboard — no translation layer</a:t>
-            </a:r>
-            <a:endParaRPr lang="en-US" sz="1000" dirty="0"/>
-          </a:p>
-        </p:txBody>
-      </p:sp>
-      <p:sp>
-        <p:nvSpPr>
-          <p:cNvPr id="35" name="Text 33"/>
-          <p:cNvSpPr/>
-          <p:nvPr/>
-        </p:nvSpPr>
-        <p:spPr>
-          <a:xfrm>
-            <a:off x="548640" y="3520440"/>
-            <a:ext cx="4572000" cy="274320"/>
-          </a:xfrm>
-          <a:prstGeom prst="rect">
-            <a:avLst/>
-          </a:prstGeom>
-          <a:noFill/>
-          <a:ln/>
-        </p:spPr>
-        <p:txBody>
-          <a:bodyPr wrap="square" lIns="0" tIns="0" rIns="0" bIns="0" rtlCol="0" anchor="ctr"/>
-          <a:lstStyle/>
-          <a:p>
-            <a:pPr indent="0" marL="0">
-              <a:buNone/>
-            </a:pPr>
-            <a:r>
-              <a:rPr lang="en-US" sz="1100" b="1" spc="250" kern="0" dirty="0">
-                <a:solidFill>
-                  <a:srgbClr val="38BDF8"/>
-                </a:solidFill>
-                <a:latin typeface="Calibri" pitchFamily="34" charset="0"/>
-                <a:ea typeface="Calibri" pitchFamily="34" charset="-122"/>
-                <a:cs typeface="Calibri" pitchFamily="34" charset="-120"/>
-              </a:rPr>
-              <a:t>THE ROAD AHEAD</a:t>
-            </a:r>
-            <a:endParaRPr lang="en-US" sz="1100" dirty="0"/>
-          </a:p>
-        </p:txBody>
-      </p:sp>
-      <p:sp>
-        <p:nvSpPr>
-          <p:cNvPr id="36" name="Shape 34"/>
-          <p:cNvSpPr/>
-          <p:nvPr/>
-        </p:nvSpPr>
-        <p:spPr>
-          <a:xfrm>
-            <a:off x="548640" y="3886200"/>
-            <a:ext cx="3456432" cy="1828800"/>
-          </a:xfrm>
-          <a:prstGeom prst="roundRect">
-            <a:avLst>
-              <a:gd name="adj" fmla="val 5000"/>
-            </a:avLst>
-          </a:prstGeom>
-          <a:solidFill>
-            <a:srgbClr val="182230"/>
-          </a:solidFill>
-          <a:ln w="15875">
-            <a:solidFill>
-              <a:srgbClr val="304258"/>
-            </a:solidFill>
-            <a:prstDash val="solid"/>
-          </a:ln>
-        </p:spPr>
-      </p:sp>
-      <p:sp>
-        <p:nvSpPr>
-          <p:cNvPr id="37" name="Text 35"/>
-          <p:cNvSpPr/>
-          <p:nvPr/>
-        </p:nvSpPr>
-        <p:spPr>
-          <a:xfrm>
-            <a:off x="804672" y="4069080"/>
-            <a:ext cx="2944368" cy="256032"/>
-          </a:xfrm>
-          <a:prstGeom prst="rect">
-            <a:avLst/>
-          </a:prstGeom>
-          <a:noFill/>
-          <a:ln/>
-        </p:spPr>
-        <p:txBody>
-          <a:bodyPr wrap="square" lIns="0" tIns="0" rIns="0" bIns="0" rtlCol="0" anchor="ctr"/>
-          <a:lstStyle/>
-          <a:p>
-            <a:pPr indent="0" marL="0">
-              <a:buNone/>
-            </a:pPr>
-            <a:r>
-              <a:rPr lang="en-US" sz="1100" b="1" spc="200" kern="0" dirty="0">
+              <a:rPr lang="en-US" sz="1050" b="1" spc="200" kern="0" dirty="0">
                 <a:solidFill>
                   <a:srgbClr val="38BDF8"/>
                 </a:solidFill>
@@ -9893,20 +9462,20 @@
               </a:rPr>
               <a:t>NOW</a:t>
             </a:r>
-            <a:endParaRPr lang="en-US" sz="1100" dirty="0"/>
-          </a:p>
-        </p:txBody>
-      </p:sp>
-      <p:sp>
-        <p:nvSpPr>
-          <p:cNvPr id="38" name="Text 36"/>
-          <p:cNvSpPr/>
-          <p:nvPr/>
-        </p:nvSpPr>
-        <p:spPr>
-          <a:xfrm>
-            <a:off x="804672" y="4343400"/>
-            <a:ext cx="2944368" cy="292608"/>
+            <a:endParaRPr lang="en-US" sz="1050" dirty="0"/>
+          </a:p>
+        </p:txBody>
+      </p:sp>
+      <p:sp>
+        <p:nvSpPr>
+          <p:cNvPr id="23" name="Text 20"/>
+          <p:cNvSpPr/>
+          <p:nvPr/>
+        </p:nvSpPr>
+        <p:spPr>
+          <a:xfrm>
+            <a:off x="749808" y="5321808"/>
+            <a:ext cx="2295144" cy="566928"/>
           </a:xfrm>
           <a:prstGeom prst="rect">
             <a:avLst/>
@@ -9919,10 +9488,13 @@
           <a:lstStyle/>
           <a:p>
             <a:pPr indent="0" marL="0">
+              <a:lnSpc>
+                <a:spcPct val="102000"/>
+              </a:lnSpc>
               <a:buNone/>
             </a:pPr>
             <a:r>
-              <a:rPr lang="en-US" sz="1400" b="1" dirty="0">
+              <a:rPr lang="en-US" sz="1350" b="1" dirty="0">
                 <a:solidFill>
                   <a:srgbClr val="E8EEF7"/>
                 </a:solidFill>
@@ -9930,94 +9502,55 @@
                 <a:ea typeface="Calibri" pitchFamily="34" charset="-122"/>
                 <a:cs typeface="Calibri" pitchFamily="34" charset="-120"/>
               </a:rPr>
-              <a:t>Radio network unified</a:t>
+              <a:t>Unified RAN</a:t>
             </a:r>
-            <a:endParaRPr lang="en-US" sz="1400" dirty="0"/>
-          </a:p>
-        </p:txBody>
-      </p:sp>
-      <p:sp>
-        <p:nvSpPr>
-          <p:cNvPr id="39" name="Text 37"/>
-          <p:cNvSpPr/>
-          <p:nvPr/>
-        </p:nvSpPr>
-        <p:spPr>
-          <a:xfrm>
-            <a:off x="804672" y="4681728"/>
-            <a:ext cx="2944368" cy="914400"/>
-          </a:xfrm>
-          <a:prstGeom prst="rect">
-            <a:avLst/>
-          </a:prstGeom>
-          <a:noFill/>
-          <a:ln/>
-        </p:spPr>
-        <p:txBody>
-          <a:bodyPr wrap="square" lIns="0" tIns="0" rIns="0" bIns="0" rtlCol="0" anchor="ctr"/>
-          <a:lstStyle/>
-          <a:p>
-            <a:pPr indent="0" marL="0">
-              <a:lnSpc>
-                <a:spcPct val="112000"/>
-              </a:lnSpc>
-              <a:buNone/>
-            </a:pPr>
-            <a:r>
-              <a:rPr lang="en-US" sz="1050" dirty="0">
-                <a:solidFill>
-                  <a:srgbClr val="A9B7C9"/>
-                </a:solidFill>
-                <a:latin typeface="Calibri" pitchFamily="34" charset="0"/>
-                <a:ea typeface="Calibri" pitchFamily="34" charset="-122"/>
-                <a:cs typeface="Calibri" pitchFamily="34" charset="-120"/>
-              </a:rPr>
-              <a:t>40+ tools live across performance, optimization and configuration; Power BI bridge in place.</a:t>
-            </a:r>
-            <a:endParaRPr lang="en-US" sz="1050" dirty="0"/>
-          </a:p>
-        </p:txBody>
-      </p:sp>
-      <p:sp>
-        <p:nvSpPr>
-          <p:cNvPr id="40" name="Shape 38"/>
-          <p:cNvSpPr/>
-          <p:nvPr/>
-        </p:nvSpPr>
-        <p:spPr>
-          <a:xfrm>
-            <a:off x="4059936" y="4617720"/>
-            <a:ext cx="274320" cy="256032"/>
-          </a:xfrm>
-          <a:prstGeom prst="rightArrow">
-            <a:avLst/>
-          </a:prstGeom>
-          <a:solidFill>
-            <a:srgbClr val="38BDF8"/>
-          </a:solidFill>
-          <a:ln/>
-        </p:spPr>
-      </p:sp>
-      <p:sp>
-        <p:nvSpPr>
-          <p:cNvPr id="41" name="Shape 39"/>
-          <p:cNvSpPr/>
-          <p:nvPr/>
-        </p:nvSpPr>
-        <p:spPr>
-          <a:xfrm>
-            <a:off x="4370832" y="3886200"/>
-            <a:ext cx="3456432" cy="1828800"/>
+            <a:endParaRPr lang="en-US" sz="1350" dirty="0"/>
+          </a:p>
+        </p:txBody>
+      </p:sp>
+      <p:sp>
+        <p:nvSpPr>
+          <p:cNvPr id="24" name="Shape 21"/>
+          <p:cNvSpPr/>
+          <p:nvPr/>
+        </p:nvSpPr>
+        <p:spPr>
+          <a:xfrm flipV="1">
+            <a:off x="3136392" y="4114800"/>
+            <a:ext cx="658368" cy="292608"/>
+          </a:xfrm>
+          <a:prstGeom prst="line">
+            <a:avLst/>
+          </a:prstGeom>
+          <a:noFill/>
+          <a:ln w="19050">
+            <a:solidFill>
+              <a:srgbClr val="38BDF8"/>
+            </a:solidFill>
+            <a:prstDash val="dash"/>
+          </a:ln>
+        </p:spPr>
+      </p:sp>
+      <p:sp>
+        <p:nvSpPr>
+          <p:cNvPr id="25" name="Shape 22"/>
+          <p:cNvSpPr/>
+          <p:nvPr/>
+        </p:nvSpPr>
+        <p:spPr>
+          <a:xfrm>
+            <a:off x="3337560" y="3977640"/>
+            <a:ext cx="2697480" cy="1417320"/>
           </a:xfrm>
           <a:prstGeom prst="roundRect">
             <a:avLst>
-              <a:gd name="adj" fmla="val 5000"/>
+              <a:gd name="adj" fmla="val 6452"/>
             </a:avLst>
           </a:prstGeom>
           <a:solidFill>
             <a:srgbClr val="1B2736"/>
           </a:solidFill>
-          <a:ln w="15875">
+          <a:ln w="19050">
             <a:solidFill>
               <a:srgbClr val="27577B"/>
             </a:solidFill>
@@ -10027,14 +9560,58 @@
       </p:sp>
       <p:sp>
         <p:nvSpPr>
-          <p:cNvPr id="42" name="Text 40"/>
-          <p:cNvSpPr/>
-          <p:nvPr/>
-        </p:nvSpPr>
-        <p:spPr>
-          <a:xfrm>
-            <a:off x="4626864" y="4069080"/>
-            <a:ext cx="2944368" cy="256032"/>
+          <p:cNvPr id="26" name="Shape 23"/>
+          <p:cNvSpPr/>
+          <p:nvPr/>
+        </p:nvSpPr>
+        <p:spPr>
+          <a:xfrm>
+            <a:off x="3538728" y="4178808"/>
+            <a:ext cx="457200" cy="457200"/>
+          </a:xfrm>
+          <a:prstGeom prst="ellipse">
+            <a:avLst/>
+          </a:prstGeom>
+          <a:solidFill>
+            <a:srgbClr val="0F1722"/>
+          </a:solidFill>
+          <a:ln/>
+        </p:spPr>
+      </p:sp>
+      <p:pic>
+        <p:nvPicPr>
+          <p:cNvPr id="27" name="Image 1" descr="preencoded.png">    </p:cNvPr>
+          <p:cNvPicPr>
+            <a:picLocks noChangeAspect="1"/>
+          </p:cNvPicPr>
+          <p:nvPr/>
+        </p:nvPicPr>
+        <p:blipFill>
+          <a:blip r:embed="rId2"/>
+          <a:stretch>
+            <a:fillRect/>
+          </a:stretch>
+        </p:blipFill>
+        <p:spPr>
+          <a:xfrm>
+            <a:off x="3643884" y="4283964"/>
+            <a:ext cx="246888" cy="246888"/>
+          </a:xfrm>
+          <a:prstGeom prst="rect">
+            <a:avLst/>
+          </a:prstGeom>
+        </p:spPr>
+      </p:pic>
+      <p:sp>
+        <p:nvSpPr>
+          <p:cNvPr id="28" name="Text 24"/>
+          <p:cNvSpPr/>
+          <p:nvPr/>
+        </p:nvSpPr>
+        <p:spPr>
+          <a:xfrm>
+            <a:off x="4114800" y="4197096"/>
+            <a:ext cx="1783080" cy="237744"/>
           </a:xfrm>
           <a:prstGeom prst="rect">
             <a:avLst/>
@@ -10050,7 +9627,7 @@
               <a:buNone/>
             </a:pPr>
             <a:r>
-              <a:rPr lang="en-US" sz="1100" b="1" spc="200" kern="0" dirty="0">
+              <a:rPr lang="en-US" sz="1050" b="1" spc="200" kern="0" dirty="0">
                 <a:solidFill>
                   <a:srgbClr val="38BDF8"/>
                 </a:solidFill>
@@ -10060,20 +9637,20 @@
               </a:rPr>
               <a:t>NEXT</a:t>
             </a:r>
-            <a:endParaRPr lang="en-US" sz="1100" dirty="0"/>
-          </a:p>
-        </p:txBody>
-      </p:sp>
-      <p:sp>
-        <p:nvSpPr>
-          <p:cNvPr id="43" name="Text 41"/>
-          <p:cNvSpPr/>
-          <p:nvPr/>
-        </p:nvSpPr>
-        <p:spPr>
-          <a:xfrm>
-            <a:off x="4626864" y="4343400"/>
-            <a:ext cx="2944368" cy="292608"/>
+            <a:endParaRPr lang="en-US" sz="1050" dirty="0"/>
+          </a:p>
+        </p:txBody>
+      </p:sp>
+      <p:sp>
+        <p:nvSpPr>
+          <p:cNvPr id="29" name="Text 25"/>
+          <p:cNvSpPr/>
+          <p:nvPr/>
+        </p:nvSpPr>
+        <p:spPr>
+          <a:xfrm>
+            <a:off x="3538728" y="4727448"/>
+            <a:ext cx="2295144" cy="566928"/>
           </a:xfrm>
           <a:prstGeom prst="rect">
             <a:avLst/>
@@ -10086,10 +9663,13 @@
           <a:lstStyle/>
           <a:p>
             <a:pPr indent="0" marL="0">
+              <a:lnSpc>
+                <a:spcPct val="102000"/>
+              </a:lnSpc>
               <a:buNone/>
             </a:pPr>
             <a:r>
-              <a:rPr lang="en-US" sz="1400" b="1" dirty="0">
+              <a:rPr lang="en-US" sz="1350" b="1" dirty="0">
                 <a:solidFill>
                   <a:srgbClr val="E8EEF7"/>
                 </a:solidFill>
@@ -10097,22 +9677,116 @@
                 <a:ea typeface="Calibri" pitchFamily="34" charset="-122"/>
                 <a:cs typeface="Calibri" pitchFamily="34" charset="-120"/>
               </a:rPr>
-              <a:t>Cross-department insight</a:t>
+              <a:t>Cross-dept dashboards</a:t>
             </a:r>
-            <a:endParaRPr lang="en-US" sz="1400" dirty="0"/>
-          </a:p>
-        </p:txBody>
-      </p:sp>
-      <p:sp>
-        <p:nvSpPr>
-          <p:cNvPr id="44" name="Text 42"/>
-          <p:cNvSpPr/>
-          <p:nvPr/>
-        </p:nvSpPr>
-        <p:spPr>
-          <a:xfrm>
-            <a:off x="4626864" y="4681728"/>
-            <a:ext cx="2944368" cy="914400"/>
+            <a:endParaRPr lang="en-US" sz="1350" dirty="0"/>
+          </a:p>
+        </p:txBody>
+      </p:sp>
+      <p:sp>
+        <p:nvSpPr>
+          <p:cNvPr id="30" name="Shape 26"/>
+          <p:cNvSpPr/>
+          <p:nvPr/>
+        </p:nvSpPr>
+        <p:spPr>
+          <a:xfrm flipV="1">
+            <a:off x="5925312" y="3520440"/>
+            <a:ext cx="658368" cy="292608"/>
+          </a:xfrm>
+          <a:prstGeom prst="line">
+            <a:avLst/>
+          </a:prstGeom>
+          <a:noFill/>
+          <a:ln w="19050">
+            <a:solidFill>
+              <a:srgbClr val="38BDF8"/>
+            </a:solidFill>
+            <a:prstDash val="dash"/>
+          </a:ln>
+        </p:spPr>
+      </p:sp>
+      <p:sp>
+        <p:nvSpPr>
+          <p:cNvPr id="31" name="Shape 27"/>
+          <p:cNvSpPr/>
+          <p:nvPr/>
+        </p:nvSpPr>
+        <p:spPr>
+          <a:xfrm>
+            <a:off x="6126480" y="3383280"/>
+            <a:ext cx="2697480" cy="1417320"/>
+          </a:xfrm>
+          <a:prstGeom prst="roundRect">
+            <a:avLst>
+              <a:gd name="adj" fmla="val 6452"/>
+            </a:avLst>
+          </a:prstGeom>
+          <a:solidFill>
+            <a:srgbClr val="223246"/>
+          </a:solidFill>
+          <a:ln w="19050">
+            <a:solidFill>
+              <a:srgbClr val="3A6B93"/>
+            </a:solidFill>
+            <a:prstDash val="solid"/>
+          </a:ln>
+        </p:spPr>
+      </p:sp>
+      <p:sp>
+        <p:nvSpPr>
+          <p:cNvPr id="32" name="Shape 28"/>
+          <p:cNvSpPr/>
+          <p:nvPr/>
+        </p:nvSpPr>
+        <p:spPr>
+          <a:xfrm>
+            <a:off x="6327648" y="3584448"/>
+            <a:ext cx="457200" cy="457200"/>
+          </a:xfrm>
+          <a:prstGeom prst="ellipse">
+            <a:avLst/>
+          </a:prstGeom>
+          <a:solidFill>
+            <a:srgbClr val="0F1722"/>
+          </a:solidFill>
+          <a:ln/>
+        </p:spPr>
+      </p:sp>
+      <p:pic>
+        <p:nvPicPr>
+          <p:cNvPr id="33" name="Image 2" descr="preencoded.png">    </p:cNvPr>
+          <p:cNvPicPr>
+            <a:picLocks noChangeAspect="1"/>
+          </p:cNvPicPr>
+          <p:nvPr/>
+        </p:nvPicPr>
+        <p:blipFill>
+          <a:blip r:embed="rId3"/>
+          <a:stretch>
+            <a:fillRect/>
+          </a:stretch>
+        </p:blipFill>
+        <p:spPr>
+          <a:xfrm>
+            <a:off x="6432804" y="3689604"/>
+            <a:ext cx="246888" cy="246888"/>
+          </a:xfrm>
+          <a:prstGeom prst="rect">
+            <a:avLst/>
+          </a:prstGeom>
+        </p:spPr>
+      </p:pic>
+      <p:sp>
+        <p:nvSpPr>
+          <p:cNvPr id="34" name="Text 29"/>
+          <p:cNvSpPr/>
+          <p:nvPr/>
+        </p:nvSpPr>
+        <p:spPr>
+          <a:xfrm>
+            <a:off x="6903720" y="3602736"/>
+            <a:ext cx="1783080" cy="237744"/>
           </a:xfrm>
           <a:prstGeom prst="rect">
             <a:avLst/>
@@ -10125,21 +9799,18 @@
           <a:lstStyle/>
           <a:p>
             <a:pPr indent="0" marL="0">
-              <a:lnSpc>
-                <a:spcPct val="112000"/>
-              </a:lnSpc>
               <a:buNone/>
             </a:pPr>
             <a:r>
-              <a:rPr lang="en-US" sz="1050" dirty="0">
+              <a:rPr lang="en-US" sz="1050" b="1" spc="200" kern="0" dirty="0">
                 <a:solidFill>
-                  <a:srgbClr val="A9B7C9"/>
+                  <a:srgbClr val="38BDF8"/>
                 </a:solidFill>
                 <a:latin typeface="Calibri" pitchFamily="34" charset="0"/>
                 <a:ea typeface="Calibri" pitchFamily="34" charset="-122"/>
                 <a:cs typeface="Calibri" pitchFamily="34" charset="-120"/>
               </a:rPr>
-              <a:t>Shared KPI dashboards, embedded analytics, complaint-to-cell correlation with Customer Care.</a:t>
+              <a:t>THEN</a:t>
             </a:r>
             <a:endParaRPr lang="en-US" sz="1050" dirty="0"/>
           </a:p>
@@ -10147,61 +9818,150 @@
       </p:sp>
       <p:sp>
         <p:nvSpPr>
-          <p:cNvPr id="45" name="Shape 43"/>
-          <p:cNvSpPr/>
-          <p:nvPr/>
-        </p:nvSpPr>
-        <p:spPr>
-          <a:xfrm>
-            <a:off x="7882128" y="4617720"/>
-            <a:ext cx="274320" cy="256032"/>
-          </a:xfrm>
-          <a:prstGeom prst="rightArrow">
-            <a:avLst/>
-          </a:prstGeom>
-          <a:solidFill>
-            <a:srgbClr val="38BDF8"/>
-          </a:solidFill>
-          <a:ln/>
-        </p:spPr>
-      </p:sp>
-      <p:sp>
-        <p:nvSpPr>
-          <p:cNvPr id="46" name="Shape 44"/>
-          <p:cNvSpPr/>
-          <p:nvPr/>
-        </p:nvSpPr>
-        <p:spPr>
-          <a:xfrm>
-            <a:off x="8193024" y="3886200"/>
-            <a:ext cx="3456432" cy="1828800"/>
+          <p:cNvPr id="35" name="Text 30"/>
+          <p:cNvSpPr/>
+          <p:nvPr/>
+        </p:nvSpPr>
+        <p:spPr>
+          <a:xfrm>
+            <a:off x="6327648" y="4133088"/>
+            <a:ext cx="2295144" cy="566928"/>
+          </a:xfrm>
+          <a:prstGeom prst="rect">
+            <a:avLst/>
+          </a:prstGeom>
+          <a:noFill/>
+          <a:ln/>
+        </p:spPr>
+        <p:txBody>
+          <a:bodyPr wrap="square" lIns="0" tIns="0" rIns="0" bIns="0" rtlCol="0" anchor="ctr"/>
+          <a:lstStyle/>
+          <a:p>
+            <a:pPr indent="0" marL="0">
+              <a:lnSpc>
+                <a:spcPct val="102000"/>
+              </a:lnSpc>
+              <a:buNone/>
+            </a:pPr>
+            <a:r>
+              <a:rPr lang="en-US" sz="1350" b="1" dirty="0">
+                <a:solidFill>
+                  <a:srgbClr val="E8EEF7"/>
+                </a:solidFill>
+                <a:latin typeface="Calibri" pitchFamily="34" charset="0"/>
+                <a:ea typeface="Calibri" pitchFamily="34" charset="-122"/>
+                <a:cs typeface="Calibri" pitchFamily="34" charset="-120"/>
+              </a:rPr>
+              <a:t>Marketing &amp; sales portals</a:t>
+            </a:r>
+            <a:endParaRPr lang="en-US" sz="1350" dirty="0"/>
+          </a:p>
+        </p:txBody>
+      </p:sp>
+      <p:sp>
+        <p:nvSpPr>
+          <p:cNvPr id="36" name="Shape 31"/>
+          <p:cNvSpPr/>
+          <p:nvPr/>
+        </p:nvSpPr>
+        <p:spPr>
+          <a:xfrm flipV="1">
+            <a:off x="8714232" y="2926080"/>
+            <a:ext cx="658368" cy="292608"/>
+          </a:xfrm>
+          <a:prstGeom prst="line">
+            <a:avLst/>
+          </a:prstGeom>
+          <a:noFill/>
+          <a:ln w="19050">
+            <a:solidFill>
+              <a:srgbClr val="38BDF8"/>
+            </a:solidFill>
+            <a:prstDash val="dash"/>
+          </a:ln>
+        </p:spPr>
+      </p:sp>
+      <p:sp>
+        <p:nvSpPr>
+          <p:cNvPr id="37" name="Shape 32"/>
+          <p:cNvSpPr/>
+          <p:nvPr/>
+        </p:nvSpPr>
+        <p:spPr>
+          <a:xfrm>
+            <a:off x="8915400" y="2788920"/>
+            <a:ext cx="2697480" cy="1417320"/>
           </a:xfrm>
           <a:prstGeom prst="roundRect">
             <a:avLst>
-              <a:gd name="adj" fmla="val 5000"/>
+              <a:gd name="adj" fmla="val 6452"/>
             </a:avLst>
           </a:prstGeom>
           <a:solidFill>
-            <a:srgbClr val="223246"/>
-          </a:solidFill>
-          <a:ln w="15875">
-            <a:solidFill>
-              <a:srgbClr val="3A6B93"/>
-            </a:solidFill>
-            <a:prstDash val="solid"/>
-          </a:ln>
-        </p:spPr>
-      </p:sp>
-      <p:sp>
-        <p:nvSpPr>
-          <p:cNvPr id="47" name="Text 45"/>
-          <p:cNvSpPr/>
-          <p:nvPr/>
-        </p:nvSpPr>
-        <p:spPr>
-          <a:xfrm>
-            <a:off x="8449056" y="4069080"/>
-            <a:ext cx="2944368" cy="256032"/>
+            <a:srgbClr val="27405C"/>
+          </a:solidFill>
+          <a:ln w="19050">
+            <a:solidFill>
+              <a:srgbClr val="38BDF8"/>
+            </a:solidFill>
+            <a:prstDash val="solid"/>
+          </a:ln>
+        </p:spPr>
+      </p:sp>
+      <p:sp>
+        <p:nvSpPr>
+          <p:cNvPr id="38" name="Shape 33"/>
+          <p:cNvSpPr/>
+          <p:nvPr/>
+        </p:nvSpPr>
+        <p:spPr>
+          <a:xfrm>
+            <a:off x="9116568" y="2990088"/>
+            <a:ext cx="457200" cy="457200"/>
+          </a:xfrm>
+          <a:prstGeom prst="ellipse">
+            <a:avLst/>
+          </a:prstGeom>
+          <a:solidFill>
+            <a:srgbClr val="0F1722"/>
+          </a:solidFill>
+          <a:ln/>
+        </p:spPr>
+      </p:sp>
+      <p:pic>
+        <p:nvPicPr>
+          <p:cNvPr id="39" name="Image 3" descr="preencoded.png">    </p:cNvPr>
+          <p:cNvPicPr>
+            <a:picLocks noChangeAspect="1"/>
+          </p:cNvPicPr>
+          <p:nvPr/>
+        </p:nvPicPr>
+        <p:blipFill>
+          <a:blip r:embed="rId4"/>
+          <a:stretch>
+            <a:fillRect/>
+          </a:stretch>
+        </p:blipFill>
+        <p:spPr>
+          <a:xfrm>
+            <a:off x="9221724" y="3095244"/>
+            <a:ext cx="246888" cy="246888"/>
+          </a:xfrm>
+          <a:prstGeom prst="rect">
+            <a:avLst/>
+          </a:prstGeom>
+        </p:spPr>
+      </p:pic>
+      <p:sp>
+        <p:nvSpPr>
+          <p:cNvPr id="40" name="Text 34"/>
+          <p:cNvSpPr/>
+          <p:nvPr/>
+        </p:nvSpPr>
+        <p:spPr>
+          <a:xfrm>
+            <a:off x="9692640" y="3008376"/>
+            <a:ext cx="1783080" cy="237744"/>
           </a:xfrm>
           <a:prstGeom prst="rect">
             <a:avLst/>
@@ -10217,7 +9977,7 @@
               <a:buNone/>
             </a:pPr>
             <a:r>
-              <a:rPr lang="en-US" sz="1100" b="1" spc="200" kern="0" dirty="0">
+              <a:rPr lang="en-US" sz="1050" b="1" spc="200" kern="0" dirty="0">
                 <a:solidFill>
                   <a:srgbClr val="38BDF8"/>
                 </a:solidFill>
@@ -10227,20 +9987,20 @@
               </a:rPr>
               <a:t>BEYOND</a:t>
             </a:r>
-            <a:endParaRPr lang="en-US" sz="1100" dirty="0"/>
-          </a:p>
-        </p:txBody>
-      </p:sp>
-      <p:sp>
-        <p:nvSpPr>
-          <p:cNvPr id="48" name="Text 46"/>
-          <p:cNvSpPr/>
-          <p:nvPr/>
-        </p:nvSpPr>
-        <p:spPr>
-          <a:xfrm>
-            <a:off x="8449056" y="4343400"/>
-            <a:ext cx="2944368" cy="292608"/>
+            <a:endParaRPr lang="en-US" sz="1050" dirty="0"/>
+          </a:p>
+        </p:txBody>
+      </p:sp>
+      <p:sp>
+        <p:nvSpPr>
+          <p:cNvPr id="41" name="Text 35"/>
+          <p:cNvSpPr/>
+          <p:nvPr/>
+        </p:nvSpPr>
+        <p:spPr>
+          <a:xfrm>
+            <a:off x="9116568" y="3538728"/>
+            <a:ext cx="2295144" cy="566928"/>
           </a:xfrm>
           <a:prstGeom prst="rect">
             <a:avLst/>
@@ -10253,10 +10013,13 @@
           <a:lstStyle/>
           <a:p>
             <a:pPr indent="0" marL="0">
+              <a:lnSpc>
+                <a:spcPct val="102000"/>
+              </a:lnSpc>
               <a:buNone/>
             </a:pPr>
             <a:r>
-              <a:rPr lang="en-US" sz="1400" b="1" dirty="0">
+              <a:rPr lang="en-US" sz="1350" b="1" dirty="0">
                 <a:solidFill>
                   <a:srgbClr val="E8EEF7"/>
                 </a:solidFill>
@@ -10264,63 +10027,44 @@
                 <a:ea typeface="Calibri" pitchFamily="34" charset="-122"/>
                 <a:cs typeface="Calibri" pitchFamily="34" charset="-120"/>
               </a:rPr>
-              <a:t>AI-driven, closed-loop</a:t>
+              <a:t>AI closed-loop network</a:t>
             </a:r>
-            <a:endParaRPr lang="en-US" sz="1400" dirty="0"/>
-          </a:p>
-        </p:txBody>
-      </p:sp>
-      <p:sp>
-        <p:nvSpPr>
-          <p:cNvPr id="49" name="Text 47"/>
-          <p:cNvSpPr/>
-          <p:nvPr/>
-        </p:nvSpPr>
-        <p:spPr>
-          <a:xfrm>
-            <a:off x="8449056" y="4681728"/>
-            <a:ext cx="2944368" cy="914400"/>
-          </a:xfrm>
-          <a:prstGeom prst="rect">
-            <a:avLst/>
-          </a:prstGeom>
-          <a:noFill/>
-          <a:ln/>
-        </p:spPr>
-        <p:txBody>
-          <a:bodyPr wrap="square" lIns="0" tIns="0" rIns="0" bIns="0" rtlCol="0" anchor="ctr"/>
-          <a:lstStyle/>
-          <a:p>
-            <a:pPr indent="0" marL="0">
-              <a:lnSpc>
-                <a:spcPct val="112000"/>
-              </a:lnSpc>
-              <a:buNone/>
-            </a:pPr>
-            <a:r>
-              <a:rPr lang="en-US" sz="1050" dirty="0">
-                <a:solidFill>
-                  <a:srgbClr val="A9B7C9"/>
-                </a:solidFill>
-                <a:latin typeface="Calibri" pitchFamily="34" charset="0"/>
-                <a:ea typeface="Calibri" pitchFamily="34" charset="-122"/>
-                <a:cs typeface="Calibri" pitchFamily="34" charset="-120"/>
-              </a:rPr>
-              <a:t>A network that detects, recommends and — with approval — corrects itself.</a:t>
-            </a:r>
-            <a:endParaRPr lang="en-US" sz="1050" dirty="0"/>
-          </a:p>
-        </p:txBody>
-      </p:sp>
-      <p:sp>
-        <p:nvSpPr>
-          <p:cNvPr id="50" name="Text 48"/>
-          <p:cNvSpPr/>
-          <p:nvPr/>
-        </p:nvSpPr>
-        <p:spPr>
-          <a:xfrm>
-            <a:off x="548640" y="6144768"/>
+            <a:endParaRPr lang="en-US" sz="1350" dirty="0"/>
+          </a:p>
+        </p:txBody>
+      </p:sp>
+      <p:sp>
+        <p:nvSpPr>
+          <p:cNvPr id="42" name="Shape 36"/>
+          <p:cNvSpPr/>
+          <p:nvPr/>
+        </p:nvSpPr>
+        <p:spPr>
+          <a:xfrm>
+            <a:off x="548640" y="6263640"/>
+            <a:ext cx="11091672" cy="9144"/>
+          </a:xfrm>
+          <a:prstGeom prst="line">
+            <a:avLst/>
+          </a:prstGeom>
+          <a:noFill/>
+          <a:ln w="12700">
+            <a:solidFill>
+              <a:srgbClr val="304258"/>
+            </a:solidFill>
+            <a:prstDash val="solid"/>
+          </a:ln>
+        </p:spPr>
+      </p:sp>
+      <p:sp>
+        <p:nvSpPr>
+          <p:cNvPr id="43" name="Text 37"/>
+          <p:cNvSpPr/>
+          <p:nvPr/>
+        </p:nvSpPr>
+        <p:spPr>
+          <a:xfrm>
+            <a:off x="548640" y="6355080"/>
             <a:ext cx="11064240" cy="365760"/>
           </a:xfrm>
           <a:prstGeom prst="rect">
@@ -10337,7 +10081,7 @@
               <a:buNone/>
             </a:pPr>
             <a:r>
-              <a:rPr lang="en-US" sz="1500" b="1" dirty="0">
+              <a:rPr lang="en-US" sz="1600" b="1" dirty="0">
                 <a:solidFill>
                   <a:srgbClr val="38BDF8"/>
                 </a:solidFill>
@@ -10347,7 +10091,7 @@
               </a:rPr>
               <a:t>Built by Zain, for Zain — and just getting started.</a:t>
             </a:r>
-            <a:endParaRPr lang="en-US" sz="1500" dirty="0"/>
+            <a:endParaRPr lang="en-US" sz="1600" dirty="0"/>
           </a:p>
         </p:txBody>
       </p:sp>
